--- a/Slides/unit_6_prog_3.pptx
+++ b/Slides/unit_6_prog_3.pptx
@@ -56,26 +56,15 @@
   <p:notesSz cx="7099300" cy="10234613"/>
   <p:embeddedFontLst>
     <p:embeddedFont>
-      <p:font typeface="Blackadder ITC" panose="04020505051007020D02" pitchFamily="82" charset="0"/>
+      <p:font typeface="Blackadder ITC" pitchFamily="82" charset="77"/>
       <p:regular r:id="rId46"/>
     </p:embeddedFont>
     <p:embeddedFont>
-      <p:font typeface="Calibri" panose="020F0502020204030204" pitchFamily="34" charset="0"/>
+      <p:font typeface="Consolas" panose="020B0609020204030204" pitchFamily="49" charset="0"/>
       <p:regular r:id="rId47"/>
       <p:bold r:id="rId48"/>
       <p:italic r:id="rId49"/>
       <p:boldItalic r:id="rId50"/>
-    </p:embeddedFont>
-    <p:embeddedFont>
-      <p:font typeface="Cambria Math" panose="02040503050406030204" pitchFamily="18" charset="0"/>
-      <p:regular r:id="rId51"/>
-    </p:embeddedFont>
-    <p:embeddedFont>
-      <p:font typeface="Consolas" panose="020B0609020204030204" pitchFamily="49" charset="0"/>
-      <p:regular r:id="rId52"/>
-      <p:bold r:id="rId53"/>
-      <p:italic r:id="rId54"/>
-      <p:boldItalic r:id="rId55"/>
     </p:embeddedFont>
   </p:embeddedFontLst>
   <p:defaultTextStyle>
@@ -323,7 +312,7 @@
       </p15:sldGuideLst>
     </p:ext>
     <p:ext uri="http://customooxmlschemas.google.com/">
-      <go:slidesCustomData xmlns:go="http://customooxmlschemas.google.com/" xmlns:ahyp="http://schemas.microsoft.com/office/drawing/2018/hyperlinkcolor" xmlns:p15="http://schemas.microsoft.com/office/powerpoint/2012/main" xmlns:p14="http://schemas.microsoft.com/office/powerpoint/2010/main" xmlns:com="http://schemas.openxmlformats.org/drawingml/2006/compatibility" xmlns:pvml="urn:schemas-microsoft-com:office:powerpoint" xmlns:v="urn:schemas-microsoft-com:vml" xmlns:o="urn:schemas-microsoft-com:office:office" xmlns:dgm="http://schemas.openxmlformats.org/drawingml/2006/diagram" xmlns:c="http://schemas.openxmlformats.org/drawingml/2006/chart" xmlns:mv="urn:schemas-microsoft-com:mac:vml" xmlns:mc="http://schemas.openxmlformats.org/markup-compatibility/2006" xmlns="" r:id="rId80" roundtripDataSignature="AMtx7milieXwv5OUJdQk1cj/252aZuXcIQ=="/>
+      <go:slidesCustomData xmlns="" xmlns:mc="http://schemas.openxmlformats.org/markup-compatibility/2006" xmlns:mv="urn:schemas-microsoft-com:mac:vml" xmlns:c="http://schemas.openxmlformats.org/drawingml/2006/chart" xmlns:dgm="http://schemas.openxmlformats.org/drawingml/2006/diagram" xmlns:o="urn:schemas-microsoft-com:office:office" xmlns:v="urn:schemas-microsoft-com:vml" xmlns:pvml="urn:schemas-microsoft-com:office:powerpoint" xmlns:com="http://schemas.openxmlformats.org/drawingml/2006/compatibility" xmlns:p14="http://schemas.microsoft.com/office/powerpoint/2010/main" xmlns:p15="http://schemas.microsoft.com/office/powerpoint/2012/main" xmlns:ahyp="http://schemas.microsoft.com/office/drawing/2018/hyperlinkcolor" xmlns:go="http://customooxmlschemas.google.com/" r:id="rId80" roundtripDataSignature="AMtx7milieXwv5OUJdQk1cj/252aZuXcIQ=="/>
     </p:ext>
   </p:extLst>
 </p:presentation>
@@ -332,9 +321,7 @@
 <file path=ppt/revisionInfo.xml><?xml version="1.0" encoding="utf-8"?>
 <p1510:revInfo xmlns:a="http://schemas.openxmlformats.org/drawingml/2006/main" xmlns:r="http://schemas.openxmlformats.org/officeDocument/2006/relationships" xmlns:p1510="http://schemas.microsoft.com/office/powerpoint/2015/10/main">
   <p1510:revLst>
-    <p1510:client id="{690A8561-0462-61C5-122F-B37E0D33A249}" v="452" dt="2022-02-25T18:00:28.886"/>
-    <p1510:client id="{6650C529-5FF6-DF91-408E-CA6877BEA450}" v="10" dt="2022-02-28T12:12:33.858"/>
-    <p1510:client id="{B0536F86-C883-7A67-11FA-EA747C9A93F9}" v="3132" dt="2022-02-27T19:54:03.084"/>
+    <p1510:client id="{DAE90922-6980-2D48-AF72-CAB4AE2BC018}" v="5" dt="2025-11-05T23:34:45.082"/>
   </p1510:revLst>
 </p1510:revInfo>
 </file>
@@ -342,2268 +329,221 @@
 <file path=ppt/changesInfos/changesInfo1.xml><?xml version="1.0" encoding="utf-8"?>
 <pc:chgInfo xmlns:a="http://schemas.openxmlformats.org/drawingml/2006/main" xmlns:r="http://schemas.openxmlformats.org/officeDocument/2006/relationships" xmlns:ac="http://schemas.microsoft.com/office/drawing/2013/main/command" xmlns:pc="http://schemas.microsoft.com/office/powerpoint/2013/main/command">
   <pc:docChgLst>
-    <pc:chgData name="Daniel Dan" userId="S::daniel.dan@modul.ac.at::e2a95533-a292-400e-bcf5-c81090ef720f" providerId="AD" clId="Web-{B0536F86-C883-7A67-11FA-EA747C9A93F9}"/>
-    <pc:docChg chg="addSld delSld modSld sldOrd">
-      <pc:chgData name="Daniel Dan" userId="S::daniel.dan@modul.ac.at::e2a95533-a292-400e-bcf5-c81090ef720f" providerId="AD" clId="Web-{B0536F86-C883-7A67-11FA-EA747C9A93F9}" dt="2022-02-27T19:54:03.084" v="2519"/>
+    <pc:chgData name="Ingo Frommholz" userId="ee3b4549-206f-4e4f-93a1-b7ff676f0af7" providerId="ADAL" clId="{5F8971C4-3D52-5FAB-A951-9912A46CDBB0}"/>
+    <pc:docChg chg="custSel modSld">
+      <pc:chgData name="Ingo Frommholz" userId="ee3b4549-206f-4e4f-93a1-b7ff676f0af7" providerId="ADAL" clId="{5F8971C4-3D52-5FAB-A951-9912A46CDBB0}" dt="2025-11-05T23:34:46.491" v="368" actId="20577"/>
       <pc:docMkLst>
         <pc:docMk/>
       </pc:docMkLst>
-      <pc:sldChg chg="modSp">
-        <pc:chgData name="Daniel Dan" userId="S::daniel.dan@modul.ac.at::e2a95533-a292-400e-bcf5-c81090ef720f" providerId="AD" clId="Web-{B0536F86-C883-7A67-11FA-EA747C9A93F9}" dt="2022-02-27T19:41:23.940" v="1323" actId="20577"/>
-        <pc:sldMkLst>
-          <pc:docMk/>
-          <pc:sldMk cId="0" sldId="257"/>
-        </pc:sldMkLst>
-        <pc:spChg chg="mod">
-          <ac:chgData name="Daniel Dan" userId="S::daniel.dan@modul.ac.at::e2a95533-a292-400e-bcf5-c81090ef720f" providerId="AD" clId="Web-{B0536F86-C883-7A67-11FA-EA747C9A93F9}" dt="2022-02-27T19:41:23.940" v="1323" actId="20577"/>
-          <ac:spMkLst>
-            <pc:docMk/>
-            <pc:sldMk cId="0" sldId="257"/>
-            <ac:spMk id="87" creationId="{00000000-0000-0000-0000-000000000000}"/>
-          </ac:spMkLst>
-        </pc:spChg>
-      </pc:sldChg>
-      <pc:sldChg chg="modSp">
-        <pc:chgData name="Daniel Dan" userId="S::daniel.dan@modul.ac.at::e2a95533-a292-400e-bcf5-c81090ef720f" providerId="AD" clId="Web-{B0536F86-C883-7A67-11FA-EA747C9A93F9}" dt="2022-02-27T10:47:02.715" v="4" actId="20577"/>
-        <pc:sldMkLst>
-          <pc:docMk/>
-          <pc:sldMk cId="0" sldId="258"/>
-        </pc:sldMkLst>
-        <pc:spChg chg="mod">
-          <ac:chgData name="Daniel Dan" userId="S::daniel.dan@modul.ac.at::e2a95533-a292-400e-bcf5-c81090ef720f" providerId="AD" clId="Web-{B0536F86-C883-7A67-11FA-EA747C9A93F9}" dt="2022-02-27T10:47:02.715" v="4" actId="20577"/>
-          <ac:spMkLst>
-            <pc:docMk/>
-            <pc:sldMk cId="0" sldId="258"/>
-            <ac:spMk id="2" creationId="{2AC6E17C-95F6-43A8-9683-8D544AABF34F}"/>
-          </ac:spMkLst>
-        </pc:spChg>
-      </pc:sldChg>
-      <pc:sldChg chg="addSp modSp">
-        <pc:chgData name="Daniel Dan" userId="S::daniel.dan@modul.ac.at::e2a95533-a292-400e-bcf5-c81090ef720f" providerId="AD" clId="Web-{B0536F86-C883-7A67-11FA-EA747C9A93F9}" dt="2022-02-27T11:12:59.042" v="70" actId="1076"/>
-        <pc:sldMkLst>
-          <pc:docMk/>
-          <pc:sldMk cId="0" sldId="262"/>
-        </pc:sldMkLst>
-        <pc:spChg chg="mod">
-          <ac:chgData name="Daniel Dan" userId="S::daniel.dan@modul.ac.at::e2a95533-a292-400e-bcf5-c81090ef720f" providerId="AD" clId="Web-{B0536F86-C883-7A67-11FA-EA747C9A93F9}" dt="2022-02-27T11:09:47.609" v="63" actId="20577"/>
-          <ac:spMkLst>
-            <pc:docMk/>
-            <pc:sldMk cId="0" sldId="262"/>
-            <ac:spMk id="127" creationId="{00000000-0000-0000-0000-000000000000}"/>
-          </ac:spMkLst>
-        </pc:spChg>
-        <pc:spChg chg="mod">
-          <ac:chgData name="Daniel Dan" userId="S::daniel.dan@modul.ac.at::e2a95533-a292-400e-bcf5-c81090ef720f" providerId="AD" clId="Web-{B0536F86-C883-7A67-11FA-EA747C9A93F9}" dt="2022-02-27T11:10:05.735" v="66" actId="20577"/>
-          <ac:spMkLst>
-            <pc:docMk/>
-            <pc:sldMk cId="0" sldId="262"/>
-            <ac:spMk id="128" creationId="{00000000-0000-0000-0000-000000000000}"/>
-          </ac:spMkLst>
-        </pc:spChg>
-        <pc:picChg chg="add mod">
-          <ac:chgData name="Daniel Dan" userId="S::daniel.dan@modul.ac.at::e2a95533-a292-400e-bcf5-c81090ef720f" providerId="AD" clId="Web-{B0536F86-C883-7A67-11FA-EA747C9A93F9}" dt="2022-02-27T11:12:59.042" v="70" actId="1076"/>
-          <ac:picMkLst>
-            <pc:docMk/>
-            <pc:sldMk cId="0" sldId="262"/>
-            <ac:picMk id="2" creationId="{04DAB524-A9F3-4A49-A8C0-8C2EC209D27E}"/>
-          </ac:picMkLst>
-        </pc:picChg>
-      </pc:sldChg>
-      <pc:sldChg chg="addSp modSp">
-        <pc:chgData name="Daniel Dan" userId="S::daniel.dan@modul.ac.at::e2a95533-a292-400e-bcf5-c81090ef720f" providerId="AD" clId="Web-{B0536F86-C883-7A67-11FA-EA747C9A93F9}" dt="2022-02-27T11:16:29.475" v="102" actId="20577"/>
-        <pc:sldMkLst>
-          <pc:docMk/>
-          <pc:sldMk cId="0" sldId="263"/>
-        </pc:sldMkLst>
-        <pc:spChg chg="add mod">
-          <ac:chgData name="Daniel Dan" userId="S::daniel.dan@modul.ac.at::e2a95533-a292-400e-bcf5-c81090ef720f" providerId="AD" clId="Web-{B0536F86-C883-7A67-11FA-EA747C9A93F9}" dt="2022-02-27T11:16:29.475" v="102" actId="20577"/>
-          <ac:spMkLst>
-            <pc:docMk/>
-            <pc:sldMk cId="0" sldId="263"/>
-            <ac:spMk id="3" creationId="{4D3EA09A-1AEA-41F2-997D-E1849B0F2163}"/>
-          </ac:spMkLst>
-        </pc:spChg>
-        <pc:spChg chg="mod">
-          <ac:chgData name="Daniel Dan" userId="S::daniel.dan@modul.ac.at::e2a95533-a292-400e-bcf5-c81090ef720f" providerId="AD" clId="Web-{B0536F86-C883-7A67-11FA-EA747C9A93F9}" dt="2022-02-27T11:13:47.904" v="74" actId="20577"/>
-          <ac:spMkLst>
-            <pc:docMk/>
-            <pc:sldMk cId="0" sldId="263"/>
-            <ac:spMk id="134" creationId="{00000000-0000-0000-0000-000000000000}"/>
-          </ac:spMkLst>
-        </pc:spChg>
-        <pc:spChg chg="mod">
-          <ac:chgData name="Daniel Dan" userId="S::daniel.dan@modul.ac.at::e2a95533-a292-400e-bcf5-c81090ef720f" providerId="AD" clId="Web-{B0536F86-C883-7A67-11FA-EA747C9A93F9}" dt="2022-02-27T11:15:24.347" v="86" actId="20577"/>
-          <ac:spMkLst>
-            <pc:docMk/>
-            <pc:sldMk cId="0" sldId="263"/>
-            <ac:spMk id="135" creationId="{00000000-0000-0000-0000-000000000000}"/>
-          </ac:spMkLst>
-        </pc:spChg>
-        <pc:picChg chg="add mod">
-          <ac:chgData name="Daniel Dan" userId="S::daniel.dan@modul.ac.at::e2a95533-a292-400e-bcf5-c81090ef720f" providerId="AD" clId="Web-{B0536F86-C883-7A67-11FA-EA747C9A93F9}" dt="2022-02-27T11:15:31.675" v="89" actId="14100"/>
-          <ac:picMkLst>
-            <pc:docMk/>
-            <pc:sldMk cId="0" sldId="263"/>
-            <ac:picMk id="2" creationId="{A4BEBE51-DC18-4D86-A4F0-FACE4AD031D8}"/>
-          </ac:picMkLst>
-        </pc:picChg>
-      </pc:sldChg>
-      <pc:sldChg chg="addSp delSp modSp">
-        <pc:chgData name="Daniel Dan" userId="S::daniel.dan@modul.ac.at::e2a95533-a292-400e-bcf5-c81090ef720f" providerId="AD" clId="Web-{B0536F86-C883-7A67-11FA-EA747C9A93F9}" dt="2022-02-27T11:36:49.627" v="332" actId="1076"/>
-        <pc:sldMkLst>
-          <pc:docMk/>
-          <pc:sldMk cId="0" sldId="264"/>
-        </pc:sldMkLst>
-        <pc:spChg chg="add mod">
-          <ac:chgData name="Daniel Dan" userId="S::daniel.dan@modul.ac.at::e2a95533-a292-400e-bcf5-c81090ef720f" providerId="AD" clId="Web-{B0536F86-C883-7A67-11FA-EA747C9A93F9}" dt="2022-02-27T11:17:30.323" v="108"/>
-          <ac:spMkLst>
-            <pc:docMk/>
-            <pc:sldMk cId="0" sldId="264"/>
-            <ac:spMk id="3" creationId="{FA7269B2-5EAC-40A0-BC78-8699C651F14B}"/>
-          </ac:spMkLst>
-        </pc:spChg>
-        <pc:spChg chg="add del">
-          <ac:chgData name="Daniel Dan" userId="S::daniel.dan@modul.ac.at::e2a95533-a292-400e-bcf5-c81090ef720f" providerId="AD" clId="Web-{B0536F86-C883-7A67-11FA-EA747C9A93F9}" dt="2022-02-27T11:20:26.317" v="111"/>
-          <ac:spMkLst>
-            <pc:docMk/>
-            <pc:sldMk cId="0" sldId="264"/>
-            <ac:spMk id="4" creationId="{594DD0DF-F057-4111-B631-0FE84BCCDA1B}"/>
-          </ac:spMkLst>
-        </pc:spChg>
-        <pc:spChg chg="add del mod">
-          <ac:chgData name="Daniel Dan" userId="S::daniel.dan@modul.ac.at::e2a95533-a292-400e-bcf5-c81090ef720f" providerId="AD" clId="Web-{B0536F86-C883-7A67-11FA-EA747C9A93F9}" dt="2022-02-27T11:20:53.662" v="114"/>
-          <ac:spMkLst>
-            <pc:docMk/>
-            <pc:sldMk cId="0" sldId="264"/>
-            <ac:spMk id="5" creationId="{9FE7237F-E970-451C-B9BA-A3A8ECB8F5BD}"/>
-          </ac:spMkLst>
-        </pc:spChg>
-        <pc:spChg chg="add del">
-          <ac:chgData name="Daniel Dan" userId="S::daniel.dan@modul.ac.at::e2a95533-a292-400e-bcf5-c81090ef720f" providerId="AD" clId="Web-{B0536F86-C883-7A67-11FA-EA747C9A93F9}" dt="2022-02-27T11:21:04.241" v="116"/>
-          <ac:spMkLst>
-            <pc:docMk/>
-            <pc:sldMk cId="0" sldId="264"/>
-            <ac:spMk id="6" creationId="{FFBBD527-BAAF-458A-915A-72F1C6D56E7C}"/>
-          </ac:spMkLst>
-        </pc:spChg>
-        <pc:spChg chg="add del mod">
-          <ac:chgData name="Daniel Dan" userId="S::daniel.dan@modul.ac.at::e2a95533-a292-400e-bcf5-c81090ef720f" providerId="AD" clId="Web-{B0536F86-C883-7A67-11FA-EA747C9A93F9}" dt="2022-02-27T11:21:40.274" v="120"/>
-          <ac:spMkLst>
-            <pc:docMk/>
-            <pc:sldMk cId="0" sldId="264"/>
-            <ac:spMk id="7" creationId="{B1D5E76B-264B-4A72-AB89-9522D0656748}"/>
-          </ac:spMkLst>
-        </pc:spChg>
-        <pc:spChg chg="add mod">
-          <ac:chgData name="Daniel Dan" userId="S::daniel.dan@modul.ac.at::e2a95533-a292-400e-bcf5-c81090ef720f" providerId="AD" clId="Web-{B0536F86-C883-7A67-11FA-EA747C9A93F9}" dt="2022-02-27T11:24:38.503" v="148" actId="1076"/>
-          <ac:spMkLst>
-            <pc:docMk/>
-            <pc:sldMk cId="0" sldId="264"/>
-            <ac:spMk id="8" creationId="{12ED535B-6CCF-43FC-81E9-04835CE0D12D}"/>
-          </ac:spMkLst>
-        </pc:spChg>
-        <pc:spChg chg="add mod">
-          <ac:chgData name="Daniel Dan" userId="S::daniel.dan@modul.ac.at::e2a95533-a292-400e-bcf5-c81090ef720f" providerId="AD" clId="Web-{B0536F86-C883-7A67-11FA-EA747C9A93F9}" dt="2022-02-27T11:31:43.015" v="215" actId="20577"/>
-          <ac:spMkLst>
-            <pc:docMk/>
-            <pc:sldMk cId="0" sldId="264"/>
-            <ac:spMk id="12" creationId="{A73186A8-BEB2-4989-9C4B-6A12C1481E27}"/>
-          </ac:spMkLst>
-        </pc:spChg>
-        <pc:spChg chg="add mod">
-          <ac:chgData name="Daniel Dan" userId="S::daniel.dan@modul.ac.at::e2a95533-a292-400e-bcf5-c81090ef720f" providerId="AD" clId="Web-{B0536F86-C883-7A67-11FA-EA747C9A93F9}" dt="2022-02-27T11:24:45.175" v="150" actId="1076"/>
-          <ac:spMkLst>
-            <pc:docMk/>
-            <pc:sldMk cId="0" sldId="264"/>
-            <ac:spMk id="13" creationId="{67FE433E-2D4C-4D9A-9E36-4ECF262E5DAA}"/>
-          </ac:spMkLst>
-        </pc:spChg>
-        <pc:spChg chg="add mod">
-          <ac:chgData name="Daniel Dan" userId="S::daniel.dan@modul.ac.at::e2a95533-a292-400e-bcf5-c81090ef720f" providerId="AD" clId="Web-{B0536F86-C883-7A67-11FA-EA747C9A93F9}" dt="2022-02-27T11:23:53.954" v="139" actId="14100"/>
-          <ac:spMkLst>
-            <pc:docMk/>
-            <pc:sldMk cId="0" sldId="264"/>
-            <ac:spMk id="14" creationId="{7222F7DF-9180-46F4-A269-AA6E4230EE0B}"/>
-          </ac:spMkLst>
-        </pc:spChg>
-        <pc:spChg chg="add mod">
-          <ac:chgData name="Daniel Dan" userId="S::daniel.dan@modul.ac.at::e2a95533-a292-400e-bcf5-c81090ef720f" providerId="AD" clId="Web-{B0536F86-C883-7A67-11FA-EA747C9A93F9}" dt="2022-02-27T11:23:58.938" v="142" actId="1076"/>
-          <ac:spMkLst>
-            <pc:docMk/>
-            <pc:sldMk cId="0" sldId="264"/>
-            <ac:spMk id="15" creationId="{5BFFB2CD-BB7C-403E-A6ED-0FB8A30D7042}"/>
-          </ac:spMkLst>
-        </pc:spChg>
-        <pc:spChg chg="add mod">
-          <ac:chgData name="Daniel Dan" userId="S::daniel.dan@modul.ac.at::e2a95533-a292-400e-bcf5-c81090ef720f" providerId="AD" clId="Web-{B0536F86-C883-7A67-11FA-EA747C9A93F9}" dt="2022-02-27T11:24:04.017" v="143" actId="1076"/>
-          <ac:spMkLst>
-            <pc:docMk/>
-            <pc:sldMk cId="0" sldId="264"/>
-            <ac:spMk id="16" creationId="{2C9E1B4A-8E9D-432E-AEFB-8382DAA6AD5F}"/>
-          </ac:spMkLst>
-        </pc:spChg>
-        <pc:spChg chg="add mod">
-          <ac:chgData name="Daniel Dan" userId="S::daniel.dan@modul.ac.at::e2a95533-a292-400e-bcf5-c81090ef720f" providerId="AD" clId="Web-{B0536F86-C883-7A67-11FA-EA747C9A93F9}" dt="2022-02-27T11:24:31.675" v="146" actId="1076"/>
-          <ac:spMkLst>
-            <pc:docMk/>
-            <pc:sldMk cId="0" sldId="264"/>
-            <ac:spMk id="17" creationId="{AA5ADC1B-F307-4221-9E8B-40A4A8919F57}"/>
-          </ac:spMkLst>
-        </pc:spChg>
-        <pc:spChg chg="add mod">
-          <ac:chgData name="Daniel Dan" userId="S::daniel.dan@modul.ac.at::e2a95533-a292-400e-bcf5-c81090ef720f" providerId="AD" clId="Web-{B0536F86-C883-7A67-11FA-EA747C9A93F9}" dt="2022-02-27T11:24:31.675" v="147" actId="1076"/>
-          <ac:spMkLst>
-            <pc:docMk/>
-            <pc:sldMk cId="0" sldId="264"/>
-            <ac:spMk id="18" creationId="{5EE5DB66-D0EC-4202-AA15-D7A5337D8222}"/>
-          </ac:spMkLst>
-        </pc:spChg>
-        <pc:spChg chg="add mod">
-          <ac:chgData name="Daniel Dan" userId="S::daniel.dan@modul.ac.at::e2a95533-a292-400e-bcf5-c81090ef720f" providerId="AD" clId="Web-{B0536F86-C883-7A67-11FA-EA747C9A93F9}" dt="2022-02-27T11:31:29.905" v="214" actId="1076"/>
-          <ac:spMkLst>
-            <pc:docMk/>
-            <pc:sldMk cId="0" sldId="264"/>
-            <ac:spMk id="20" creationId="{294E924A-BA10-4FD7-983B-9E1FB12B6558}"/>
-          </ac:spMkLst>
-        </pc:spChg>
-        <pc:spChg chg="add mod">
-          <ac:chgData name="Daniel Dan" userId="S::daniel.dan@modul.ac.at::e2a95533-a292-400e-bcf5-c81090ef720f" providerId="AD" clId="Web-{B0536F86-C883-7A67-11FA-EA747C9A93F9}" dt="2022-02-27T11:33:09.005" v="243" actId="1076"/>
-          <ac:spMkLst>
-            <pc:docMk/>
-            <pc:sldMk cId="0" sldId="264"/>
-            <ac:spMk id="28" creationId="{BB30CBD7-0375-4DF7-B0AE-753ED713CE6D}"/>
-          </ac:spMkLst>
-        </pc:spChg>
-        <pc:spChg chg="add mod">
-          <ac:chgData name="Daniel Dan" userId="S::daniel.dan@modul.ac.at::e2a95533-a292-400e-bcf5-c81090ef720f" providerId="AD" clId="Web-{B0536F86-C883-7A67-11FA-EA747C9A93F9}" dt="2022-02-27T11:32:58.707" v="242" actId="1076"/>
-          <ac:spMkLst>
-            <pc:docMk/>
-            <pc:sldMk cId="0" sldId="264"/>
-            <ac:spMk id="29" creationId="{58EDA8A9-9308-4A04-BC70-F2C750A11B10}"/>
-          </ac:spMkLst>
-        </pc:spChg>
-        <pc:spChg chg="add mod">
-          <ac:chgData name="Daniel Dan" userId="S::daniel.dan@modul.ac.at::e2a95533-a292-400e-bcf5-c81090ef720f" providerId="AD" clId="Web-{B0536F86-C883-7A67-11FA-EA747C9A93F9}" dt="2022-02-27T11:34:06.508" v="266" actId="1076"/>
-          <ac:spMkLst>
-            <pc:docMk/>
-            <pc:sldMk cId="0" sldId="264"/>
-            <ac:spMk id="30" creationId="{E1491593-CF0A-47E4-95A2-DBC0183F0411}"/>
-          </ac:spMkLst>
-        </pc:spChg>
-        <pc:spChg chg="add mod">
-          <ac:chgData name="Daniel Dan" userId="S::daniel.dan@modul.ac.at::e2a95533-a292-400e-bcf5-c81090ef720f" providerId="AD" clId="Web-{B0536F86-C883-7A67-11FA-EA747C9A93F9}" dt="2022-02-27T11:34:39.057" v="280" actId="1076"/>
-          <ac:spMkLst>
-            <pc:docMk/>
-            <pc:sldMk cId="0" sldId="264"/>
-            <ac:spMk id="31" creationId="{BB428BE3-86D3-42A5-A89C-3436F402C584}"/>
-          </ac:spMkLst>
-        </pc:spChg>
-        <pc:spChg chg="add mod">
-          <ac:chgData name="Daniel Dan" userId="S::daniel.dan@modul.ac.at::e2a95533-a292-400e-bcf5-c81090ef720f" providerId="AD" clId="Web-{B0536F86-C883-7A67-11FA-EA747C9A93F9}" dt="2022-02-27T11:36:27.500" v="310" actId="1076"/>
-          <ac:spMkLst>
-            <pc:docMk/>
-            <pc:sldMk cId="0" sldId="264"/>
-            <ac:spMk id="32" creationId="{279491CC-92A2-4D7E-B858-DE9D2B45C3E3}"/>
-          </ac:spMkLst>
-        </pc:spChg>
-        <pc:spChg chg="add mod">
-          <ac:chgData name="Daniel Dan" userId="S::daniel.dan@modul.ac.at::e2a95533-a292-400e-bcf5-c81090ef720f" providerId="AD" clId="Web-{B0536F86-C883-7A67-11FA-EA747C9A93F9}" dt="2022-02-27T11:35:45.420" v="303" actId="14100"/>
-          <ac:spMkLst>
-            <pc:docMk/>
-            <pc:sldMk cId="0" sldId="264"/>
-            <ac:spMk id="33" creationId="{40FF0825-F225-46DC-B574-954EC9D85CDC}"/>
-          </ac:spMkLst>
-        </pc:spChg>
-        <pc:spChg chg="add mod">
-          <ac:chgData name="Daniel Dan" userId="S::daniel.dan@modul.ac.at::e2a95533-a292-400e-bcf5-c81090ef720f" providerId="AD" clId="Web-{B0536F86-C883-7A67-11FA-EA747C9A93F9}" dt="2022-02-27T11:36:49.627" v="332" actId="1076"/>
-          <ac:spMkLst>
-            <pc:docMk/>
-            <pc:sldMk cId="0" sldId="264"/>
-            <ac:spMk id="34" creationId="{AD2A4E70-05A0-482B-8768-0DA6785CE8FC}"/>
-          </ac:spMkLst>
-        </pc:spChg>
-        <pc:spChg chg="mod">
-          <ac:chgData name="Daniel Dan" userId="S::daniel.dan@modul.ac.at::e2a95533-a292-400e-bcf5-c81090ef720f" providerId="AD" clId="Web-{B0536F86-C883-7A67-11FA-EA747C9A93F9}" dt="2022-02-27T11:17:25.947" v="107" actId="20577"/>
-          <ac:spMkLst>
-            <pc:docMk/>
-            <pc:sldMk cId="0" sldId="264"/>
-            <ac:spMk id="141" creationId="{00000000-0000-0000-0000-000000000000}"/>
-          </ac:spMkLst>
-        </pc:spChg>
-        <pc:spChg chg="del">
-          <ac:chgData name="Daniel Dan" userId="S::daniel.dan@modul.ac.at::e2a95533-a292-400e-bcf5-c81090ef720f" providerId="AD" clId="Web-{B0536F86-C883-7A67-11FA-EA747C9A93F9}" dt="2022-02-27T11:17:30.323" v="108"/>
-          <ac:spMkLst>
-            <pc:docMk/>
-            <pc:sldMk cId="0" sldId="264"/>
-            <ac:spMk id="142" creationId="{00000000-0000-0000-0000-000000000000}"/>
-          </ac:spMkLst>
-        </pc:spChg>
-        <pc:picChg chg="del">
-          <ac:chgData name="Daniel Dan" userId="S::daniel.dan@modul.ac.at::e2a95533-a292-400e-bcf5-c81090ef720f" providerId="AD" clId="Web-{B0536F86-C883-7A67-11FA-EA747C9A93F9}" dt="2022-02-27T11:17:31.948" v="109"/>
-          <ac:picMkLst>
-            <pc:docMk/>
-            <pc:sldMk cId="0" sldId="264"/>
-            <ac:picMk id="143" creationId="{00000000-0000-0000-0000-000000000000}"/>
-          </ac:picMkLst>
-        </pc:picChg>
-        <pc:cxnChg chg="add del mod">
-          <ac:chgData name="Daniel Dan" userId="S::daniel.dan@modul.ac.at::e2a95533-a292-400e-bcf5-c81090ef720f" providerId="AD" clId="Web-{B0536F86-C883-7A67-11FA-EA747C9A93F9}" dt="2022-02-27T11:25:24.146" v="154"/>
-          <ac:cxnSpMkLst>
-            <pc:docMk/>
-            <pc:sldMk cId="0" sldId="264"/>
-            <ac:cxnSpMk id="9" creationId="{BF87AA38-1352-47BE-95D5-DF18E06337B9}"/>
-          </ac:cxnSpMkLst>
-        </pc:cxnChg>
-        <pc:cxnChg chg="add mod">
-          <ac:chgData name="Daniel Dan" userId="S::daniel.dan@modul.ac.at::e2a95533-a292-400e-bcf5-c81090ef720f" providerId="AD" clId="Web-{B0536F86-C883-7A67-11FA-EA747C9A93F9}" dt="2022-02-27T11:26:13.368" v="161" actId="14100"/>
-          <ac:cxnSpMkLst>
-            <pc:docMk/>
-            <pc:sldMk cId="0" sldId="264"/>
-            <ac:cxnSpMk id="10" creationId="{70B96866-1296-4A4E-B11F-08DB35F14C8F}"/>
-          </ac:cxnSpMkLst>
-        </pc:cxnChg>
-        <pc:cxnChg chg="add mod">
-          <ac:chgData name="Daniel Dan" userId="S::daniel.dan@modul.ac.at::e2a95533-a292-400e-bcf5-c81090ef720f" providerId="AD" clId="Web-{B0536F86-C883-7A67-11FA-EA747C9A93F9}" dt="2022-02-27T11:27:28.407" v="169" actId="14100"/>
-          <ac:cxnSpMkLst>
-            <pc:docMk/>
-            <pc:sldMk cId="0" sldId="264"/>
-            <ac:cxnSpMk id="11" creationId="{376198DB-1B98-4AED-896D-590311D6D3F6}"/>
-          </ac:cxnSpMkLst>
-        </pc:cxnChg>
-        <pc:cxnChg chg="add mod">
-          <ac:chgData name="Daniel Dan" userId="S::daniel.dan@modul.ac.at::e2a95533-a292-400e-bcf5-c81090ef720f" providerId="AD" clId="Web-{B0536F86-C883-7A67-11FA-EA747C9A93F9}" dt="2022-02-27T11:29:23.039" v="184" actId="14100"/>
-          <ac:cxnSpMkLst>
-            <pc:docMk/>
-            <pc:sldMk cId="0" sldId="264"/>
-            <ac:cxnSpMk id="19" creationId="{9AB9CB49-1ED6-4394-866B-D44B63EDFF4D}"/>
-          </ac:cxnSpMkLst>
-        </pc:cxnChg>
-        <pc:cxnChg chg="add mod">
-          <ac:chgData name="Daniel Dan" userId="S::daniel.dan@modul.ac.at::e2a95533-a292-400e-bcf5-c81090ef720f" providerId="AD" clId="Web-{B0536F86-C883-7A67-11FA-EA747C9A93F9}" dt="2022-02-27T11:29:57.009" v="189" actId="14100"/>
-          <ac:cxnSpMkLst>
-            <pc:docMk/>
-            <pc:sldMk cId="0" sldId="264"/>
-            <ac:cxnSpMk id="23" creationId="{3871D6BC-8253-4619-89DB-FD9BB0355CF4}"/>
-          </ac:cxnSpMkLst>
-        </pc:cxnChg>
-        <pc:cxnChg chg="add mod">
-          <ac:chgData name="Daniel Dan" userId="S::daniel.dan@modul.ac.at::e2a95533-a292-400e-bcf5-c81090ef720f" providerId="AD" clId="Web-{B0536F86-C883-7A67-11FA-EA747C9A93F9}" dt="2022-02-27T11:29:48.540" v="188" actId="14100"/>
-          <ac:cxnSpMkLst>
-            <pc:docMk/>
-            <pc:sldMk cId="0" sldId="264"/>
-            <ac:cxnSpMk id="24" creationId="{E59A18B9-127C-4DF3-9AB0-6FEDE2BADEE4}"/>
-          </ac:cxnSpMkLst>
-        </pc:cxnChg>
-        <pc:cxnChg chg="add mod">
-          <ac:chgData name="Daniel Dan" userId="S::daniel.dan@modul.ac.at::e2a95533-a292-400e-bcf5-c81090ef720f" providerId="AD" clId="Web-{B0536F86-C883-7A67-11FA-EA747C9A93F9}" dt="2022-02-27T11:30:36.918" v="195" actId="14100"/>
-          <ac:cxnSpMkLst>
-            <pc:docMk/>
-            <pc:sldMk cId="0" sldId="264"/>
-            <ac:cxnSpMk id="25" creationId="{7D7AB94C-518D-4577-809B-350181669BF3}"/>
-          </ac:cxnSpMkLst>
-        </pc:cxnChg>
-        <pc:cxnChg chg="add mod">
-          <ac:chgData name="Daniel Dan" userId="S::daniel.dan@modul.ac.at::e2a95533-a292-400e-bcf5-c81090ef720f" providerId="AD" clId="Web-{B0536F86-C883-7A67-11FA-EA747C9A93F9}" dt="2022-02-27T11:30:17.136" v="192" actId="14100"/>
-          <ac:cxnSpMkLst>
-            <pc:docMk/>
-            <pc:sldMk cId="0" sldId="264"/>
-            <ac:cxnSpMk id="26" creationId="{2C51D958-D2C4-4B86-BF14-2AE35FC1DC40}"/>
-          </ac:cxnSpMkLst>
-        </pc:cxnChg>
-      </pc:sldChg>
-      <pc:sldChg chg="delSp modSp">
-        <pc:chgData name="Daniel Dan" userId="S::daniel.dan@modul.ac.at::e2a95533-a292-400e-bcf5-c81090ef720f" providerId="AD" clId="Web-{B0536F86-C883-7A67-11FA-EA747C9A93F9}" dt="2022-02-27T17:52:45.324" v="532" actId="20577"/>
-        <pc:sldMkLst>
-          <pc:docMk/>
-          <pc:sldMk cId="0" sldId="265"/>
-        </pc:sldMkLst>
-        <pc:spChg chg="mod">
-          <ac:chgData name="Daniel Dan" userId="S::daniel.dan@modul.ac.at::e2a95533-a292-400e-bcf5-c81090ef720f" providerId="AD" clId="Web-{B0536F86-C883-7A67-11FA-EA747C9A93F9}" dt="2022-02-27T17:52:00.682" v="525" actId="20577"/>
-          <ac:spMkLst>
-            <pc:docMk/>
-            <pc:sldMk cId="0" sldId="265"/>
-            <ac:spMk id="149" creationId="{00000000-0000-0000-0000-000000000000}"/>
-          </ac:spMkLst>
-        </pc:spChg>
-        <pc:spChg chg="mod">
-          <ac:chgData name="Daniel Dan" userId="S::daniel.dan@modul.ac.at::e2a95533-a292-400e-bcf5-c81090ef720f" providerId="AD" clId="Web-{B0536F86-C883-7A67-11FA-EA747C9A93F9}" dt="2022-02-27T17:52:45.324" v="532" actId="20577"/>
-          <ac:spMkLst>
-            <pc:docMk/>
-            <pc:sldMk cId="0" sldId="265"/>
-            <ac:spMk id="150" creationId="{00000000-0000-0000-0000-000000000000}"/>
-          </ac:spMkLst>
-        </pc:spChg>
-        <pc:picChg chg="del">
-          <ac:chgData name="Daniel Dan" userId="S::daniel.dan@modul.ac.at::e2a95533-a292-400e-bcf5-c81090ef720f" providerId="AD" clId="Web-{B0536F86-C883-7A67-11FA-EA747C9A93F9}" dt="2022-02-27T17:52:03.104" v="526"/>
-          <ac:picMkLst>
-            <pc:docMk/>
-            <pc:sldMk cId="0" sldId="265"/>
-            <ac:picMk id="151" creationId="{00000000-0000-0000-0000-000000000000}"/>
-          </ac:picMkLst>
-        </pc:picChg>
-      </pc:sldChg>
-      <pc:sldChg chg="addSp modSp del">
-        <pc:chgData name="Daniel Dan" userId="S::daniel.dan@modul.ac.at::e2a95533-a292-400e-bcf5-c81090ef720f" providerId="AD" clId="Web-{B0536F86-C883-7A67-11FA-EA747C9A93F9}" dt="2022-02-27T18:13:29.373" v="612"/>
-        <pc:sldMkLst>
-          <pc:docMk/>
-          <pc:sldMk cId="0" sldId="266"/>
-        </pc:sldMkLst>
-        <pc:spChg chg="mod">
-          <ac:chgData name="Daniel Dan" userId="S::daniel.dan@modul.ac.at::e2a95533-a292-400e-bcf5-c81090ef720f" providerId="AD" clId="Web-{B0536F86-C883-7A67-11FA-EA747C9A93F9}" dt="2022-02-27T17:53:52.500" v="549" actId="20577"/>
-          <ac:spMkLst>
-            <pc:docMk/>
-            <pc:sldMk cId="0" sldId="266"/>
-            <ac:spMk id="157" creationId="{00000000-0000-0000-0000-000000000000}"/>
-          </ac:spMkLst>
-        </pc:spChg>
-        <pc:spChg chg="mod">
-          <ac:chgData name="Daniel Dan" userId="S::daniel.dan@modul.ac.at::e2a95533-a292-400e-bcf5-c81090ef720f" providerId="AD" clId="Web-{B0536F86-C883-7A67-11FA-EA747C9A93F9}" dt="2022-02-27T18:05:07.269" v="577" actId="20577"/>
-          <ac:spMkLst>
-            <pc:docMk/>
-            <pc:sldMk cId="0" sldId="266"/>
-            <ac:spMk id="158" creationId="{00000000-0000-0000-0000-000000000000}"/>
-          </ac:spMkLst>
-        </pc:spChg>
-        <pc:picChg chg="add mod">
-          <ac:chgData name="Daniel Dan" userId="S::daniel.dan@modul.ac.at::e2a95533-a292-400e-bcf5-c81090ef720f" providerId="AD" clId="Web-{B0536F86-C883-7A67-11FA-EA747C9A93F9}" dt="2022-02-27T18:03:58.094" v="565" actId="1076"/>
-          <ac:picMkLst>
-            <pc:docMk/>
-            <pc:sldMk cId="0" sldId="266"/>
-            <ac:picMk id="2" creationId="{2A515699-D87A-4013-808B-5A3F43412698}"/>
-          </ac:picMkLst>
-        </pc:picChg>
-      </pc:sldChg>
-      <pc:sldChg chg="del">
-        <pc:chgData name="Daniel Dan" userId="S::daniel.dan@modul.ac.at::e2a95533-a292-400e-bcf5-c81090ef720f" providerId="AD" clId="Web-{B0536F86-C883-7A67-11FA-EA747C9A93F9}" dt="2022-02-27T19:40:30.314" v="1310"/>
-        <pc:sldMkLst>
-          <pc:docMk/>
-          <pc:sldMk cId="0" sldId="267"/>
-        </pc:sldMkLst>
-      </pc:sldChg>
-      <pc:sldChg chg="del">
-        <pc:chgData name="Daniel Dan" userId="S::daniel.dan@modul.ac.at::e2a95533-a292-400e-bcf5-c81090ef720f" providerId="AD" clId="Web-{B0536F86-C883-7A67-11FA-EA747C9A93F9}" dt="2022-02-27T19:40:30.314" v="1309"/>
-        <pc:sldMkLst>
-          <pc:docMk/>
-          <pc:sldMk cId="0" sldId="268"/>
-        </pc:sldMkLst>
-      </pc:sldChg>
-      <pc:sldChg chg="del">
-        <pc:chgData name="Daniel Dan" userId="S::daniel.dan@modul.ac.at::e2a95533-a292-400e-bcf5-c81090ef720f" providerId="AD" clId="Web-{B0536F86-C883-7A67-11FA-EA747C9A93F9}" dt="2022-02-27T19:40:30.314" v="1308"/>
-        <pc:sldMkLst>
-          <pc:docMk/>
-          <pc:sldMk cId="0" sldId="269"/>
-        </pc:sldMkLst>
-      </pc:sldChg>
-      <pc:sldChg chg="del">
-        <pc:chgData name="Daniel Dan" userId="S::daniel.dan@modul.ac.at::e2a95533-a292-400e-bcf5-c81090ef720f" providerId="AD" clId="Web-{B0536F86-C883-7A67-11FA-EA747C9A93F9}" dt="2022-02-27T19:40:30.314" v="1307"/>
-        <pc:sldMkLst>
-          <pc:docMk/>
-          <pc:sldMk cId="0" sldId="270"/>
-        </pc:sldMkLst>
-      </pc:sldChg>
-      <pc:sldChg chg="del">
-        <pc:chgData name="Daniel Dan" userId="S::daniel.dan@modul.ac.at::e2a95533-a292-400e-bcf5-c81090ef720f" providerId="AD" clId="Web-{B0536F86-C883-7A67-11FA-EA747C9A93F9}" dt="2022-02-27T19:40:30.299" v="1306"/>
-        <pc:sldMkLst>
-          <pc:docMk/>
-          <pc:sldMk cId="0" sldId="271"/>
-        </pc:sldMkLst>
-      </pc:sldChg>
-      <pc:sldChg chg="del">
-        <pc:chgData name="Daniel Dan" userId="S::daniel.dan@modul.ac.at::e2a95533-a292-400e-bcf5-c81090ef720f" providerId="AD" clId="Web-{B0536F86-C883-7A67-11FA-EA747C9A93F9}" dt="2022-02-27T19:40:30.299" v="1305"/>
-        <pc:sldMkLst>
-          <pc:docMk/>
-          <pc:sldMk cId="0" sldId="272"/>
-        </pc:sldMkLst>
-      </pc:sldChg>
-      <pc:sldChg chg="del">
-        <pc:chgData name="Daniel Dan" userId="S::daniel.dan@modul.ac.at::e2a95533-a292-400e-bcf5-c81090ef720f" providerId="AD" clId="Web-{B0536F86-C883-7A67-11FA-EA747C9A93F9}" dt="2022-02-27T19:40:30.299" v="1304"/>
-        <pc:sldMkLst>
-          <pc:docMk/>
-          <pc:sldMk cId="0" sldId="273"/>
-        </pc:sldMkLst>
-      </pc:sldChg>
-      <pc:sldChg chg="del">
-        <pc:chgData name="Daniel Dan" userId="S::daniel.dan@modul.ac.at::e2a95533-a292-400e-bcf5-c81090ef720f" providerId="AD" clId="Web-{B0536F86-C883-7A67-11FA-EA747C9A93F9}" dt="2022-02-27T19:40:30.299" v="1303"/>
-        <pc:sldMkLst>
-          <pc:docMk/>
-          <pc:sldMk cId="0" sldId="274"/>
-        </pc:sldMkLst>
-      </pc:sldChg>
-      <pc:sldChg chg="del">
-        <pc:chgData name="Daniel Dan" userId="S::daniel.dan@modul.ac.at::e2a95533-a292-400e-bcf5-c81090ef720f" providerId="AD" clId="Web-{B0536F86-C883-7A67-11FA-EA747C9A93F9}" dt="2022-02-27T19:40:30.299" v="1302"/>
-        <pc:sldMkLst>
-          <pc:docMk/>
-          <pc:sldMk cId="0" sldId="275"/>
-        </pc:sldMkLst>
-      </pc:sldChg>
-      <pc:sldChg chg="del">
-        <pc:chgData name="Daniel Dan" userId="S::daniel.dan@modul.ac.at::e2a95533-a292-400e-bcf5-c81090ef720f" providerId="AD" clId="Web-{B0536F86-C883-7A67-11FA-EA747C9A93F9}" dt="2022-02-27T19:40:30.299" v="1301"/>
-        <pc:sldMkLst>
-          <pc:docMk/>
-          <pc:sldMk cId="0" sldId="276"/>
-        </pc:sldMkLst>
-      </pc:sldChg>
-      <pc:sldChg chg="del">
-        <pc:chgData name="Daniel Dan" userId="S::daniel.dan@modul.ac.at::e2a95533-a292-400e-bcf5-c81090ef720f" providerId="AD" clId="Web-{B0536F86-C883-7A67-11FA-EA747C9A93F9}" dt="2022-02-27T19:40:30.299" v="1300"/>
-        <pc:sldMkLst>
-          <pc:docMk/>
-          <pc:sldMk cId="0" sldId="277"/>
-        </pc:sldMkLst>
-      </pc:sldChg>
-      <pc:sldChg chg="del">
-        <pc:chgData name="Daniel Dan" userId="S::daniel.dan@modul.ac.at::e2a95533-a292-400e-bcf5-c81090ef720f" providerId="AD" clId="Web-{B0536F86-C883-7A67-11FA-EA747C9A93F9}" dt="2022-02-27T19:40:30.299" v="1299"/>
-        <pc:sldMkLst>
-          <pc:docMk/>
-          <pc:sldMk cId="0" sldId="278"/>
-        </pc:sldMkLst>
-      </pc:sldChg>
-      <pc:sldChg chg="del">
-        <pc:chgData name="Daniel Dan" userId="S::daniel.dan@modul.ac.at::e2a95533-a292-400e-bcf5-c81090ef720f" providerId="AD" clId="Web-{B0536F86-C883-7A67-11FA-EA747C9A93F9}" dt="2022-02-27T19:40:30.299" v="1298"/>
-        <pc:sldMkLst>
-          <pc:docMk/>
-          <pc:sldMk cId="0" sldId="279"/>
-        </pc:sldMkLst>
-      </pc:sldChg>
-      <pc:sldChg chg="del">
-        <pc:chgData name="Daniel Dan" userId="S::daniel.dan@modul.ac.at::e2a95533-a292-400e-bcf5-c81090ef720f" providerId="AD" clId="Web-{B0536F86-C883-7A67-11FA-EA747C9A93F9}" dt="2022-02-27T19:40:30.299" v="1297"/>
-        <pc:sldMkLst>
-          <pc:docMk/>
-          <pc:sldMk cId="0" sldId="280"/>
-        </pc:sldMkLst>
-      </pc:sldChg>
-      <pc:sldChg chg="del">
-        <pc:chgData name="Daniel Dan" userId="S::daniel.dan@modul.ac.at::e2a95533-a292-400e-bcf5-c81090ef720f" providerId="AD" clId="Web-{B0536F86-C883-7A67-11FA-EA747C9A93F9}" dt="2022-02-27T19:40:30.299" v="1296"/>
-        <pc:sldMkLst>
-          <pc:docMk/>
-          <pc:sldMk cId="0" sldId="281"/>
-        </pc:sldMkLst>
-      </pc:sldChg>
-      <pc:sldChg chg="del">
-        <pc:chgData name="Daniel Dan" userId="S::daniel.dan@modul.ac.at::e2a95533-a292-400e-bcf5-c81090ef720f" providerId="AD" clId="Web-{B0536F86-C883-7A67-11FA-EA747C9A93F9}" dt="2022-02-27T19:40:30.299" v="1295"/>
-        <pc:sldMkLst>
-          <pc:docMk/>
-          <pc:sldMk cId="0" sldId="282"/>
-        </pc:sldMkLst>
-      </pc:sldChg>
-      <pc:sldChg chg="del">
-        <pc:chgData name="Daniel Dan" userId="S::daniel.dan@modul.ac.at::e2a95533-a292-400e-bcf5-c81090ef720f" providerId="AD" clId="Web-{B0536F86-C883-7A67-11FA-EA747C9A93F9}" dt="2022-02-27T19:40:30.299" v="1294"/>
-        <pc:sldMkLst>
-          <pc:docMk/>
-          <pc:sldMk cId="0" sldId="283"/>
-        </pc:sldMkLst>
-      </pc:sldChg>
-      <pc:sldChg chg="del">
-        <pc:chgData name="Daniel Dan" userId="S::daniel.dan@modul.ac.at::e2a95533-a292-400e-bcf5-c81090ef720f" providerId="AD" clId="Web-{B0536F86-C883-7A67-11FA-EA747C9A93F9}" dt="2022-02-27T19:40:30.299" v="1293"/>
-        <pc:sldMkLst>
-          <pc:docMk/>
-          <pc:sldMk cId="0" sldId="284"/>
-        </pc:sldMkLst>
-      </pc:sldChg>
-      <pc:sldChg chg="del">
-        <pc:chgData name="Daniel Dan" userId="S::daniel.dan@modul.ac.at::e2a95533-a292-400e-bcf5-c81090ef720f" providerId="AD" clId="Web-{B0536F86-C883-7A67-11FA-EA747C9A93F9}" dt="2022-02-27T19:40:30.299" v="1292"/>
-        <pc:sldMkLst>
-          <pc:docMk/>
-          <pc:sldMk cId="0" sldId="285"/>
-        </pc:sldMkLst>
-      </pc:sldChg>
-      <pc:sldChg chg="del">
-        <pc:chgData name="Daniel Dan" userId="S::daniel.dan@modul.ac.at::e2a95533-a292-400e-bcf5-c81090ef720f" providerId="AD" clId="Web-{B0536F86-C883-7A67-11FA-EA747C9A93F9}" dt="2022-02-27T19:40:30.283" v="1291"/>
-        <pc:sldMkLst>
-          <pc:docMk/>
-          <pc:sldMk cId="0" sldId="286"/>
-        </pc:sldMkLst>
-      </pc:sldChg>
-      <pc:sldChg chg="del">
-        <pc:chgData name="Daniel Dan" userId="S::daniel.dan@modul.ac.at::e2a95533-a292-400e-bcf5-c81090ef720f" providerId="AD" clId="Web-{B0536F86-C883-7A67-11FA-EA747C9A93F9}" dt="2022-02-27T19:40:30.283" v="1290"/>
-        <pc:sldMkLst>
-          <pc:docMk/>
-          <pc:sldMk cId="0" sldId="287"/>
-        </pc:sldMkLst>
-      </pc:sldChg>
-      <pc:sldChg chg="del">
-        <pc:chgData name="Daniel Dan" userId="S::daniel.dan@modul.ac.at::e2a95533-a292-400e-bcf5-c81090ef720f" providerId="AD" clId="Web-{B0536F86-C883-7A67-11FA-EA747C9A93F9}" dt="2022-02-27T19:40:30.283" v="1289"/>
-        <pc:sldMkLst>
-          <pc:docMk/>
-          <pc:sldMk cId="0" sldId="288"/>
-        </pc:sldMkLst>
-      </pc:sldChg>
-      <pc:sldChg chg="del">
-        <pc:chgData name="Daniel Dan" userId="S::daniel.dan@modul.ac.at::e2a95533-a292-400e-bcf5-c81090ef720f" providerId="AD" clId="Web-{B0536F86-C883-7A67-11FA-EA747C9A93F9}" dt="2022-02-27T19:40:30.283" v="1288"/>
-        <pc:sldMkLst>
-          <pc:docMk/>
-          <pc:sldMk cId="0" sldId="289"/>
-        </pc:sldMkLst>
-      </pc:sldChg>
-      <pc:sldChg chg="del">
-        <pc:chgData name="Daniel Dan" userId="S::daniel.dan@modul.ac.at::e2a95533-a292-400e-bcf5-c81090ef720f" providerId="AD" clId="Web-{B0536F86-C883-7A67-11FA-EA747C9A93F9}" dt="2022-02-27T19:40:30.283" v="1287"/>
-        <pc:sldMkLst>
-          <pc:docMk/>
-          <pc:sldMk cId="0" sldId="290"/>
-        </pc:sldMkLst>
-      </pc:sldChg>
-      <pc:sldChg chg="del">
-        <pc:chgData name="Daniel Dan" userId="S::daniel.dan@modul.ac.at::e2a95533-a292-400e-bcf5-c81090ef720f" providerId="AD" clId="Web-{B0536F86-C883-7A67-11FA-EA747C9A93F9}" dt="2022-02-27T19:40:30.283" v="1286"/>
-        <pc:sldMkLst>
-          <pc:docMk/>
-          <pc:sldMk cId="0" sldId="291"/>
-        </pc:sldMkLst>
-      </pc:sldChg>
-      <pc:sldChg chg="del">
-        <pc:chgData name="Daniel Dan" userId="S::daniel.dan@modul.ac.at::e2a95533-a292-400e-bcf5-c81090ef720f" providerId="AD" clId="Web-{B0536F86-C883-7A67-11FA-EA747C9A93F9}" dt="2022-02-27T19:40:30.283" v="1285"/>
-        <pc:sldMkLst>
-          <pc:docMk/>
-          <pc:sldMk cId="0" sldId="292"/>
-        </pc:sldMkLst>
-      </pc:sldChg>
-      <pc:sldChg chg="del">
-        <pc:chgData name="Daniel Dan" userId="S::daniel.dan@modul.ac.at::e2a95533-a292-400e-bcf5-c81090ef720f" providerId="AD" clId="Web-{B0536F86-C883-7A67-11FA-EA747C9A93F9}" dt="2022-02-27T19:40:30.283" v="1284"/>
-        <pc:sldMkLst>
-          <pc:docMk/>
-          <pc:sldMk cId="0" sldId="293"/>
-        </pc:sldMkLst>
-      </pc:sldChg>
-      <pc:sldChg chg="del">
-        <pc:chgData name="Daniel Dan" userId="S::daniel.dan@modul.ac.at::e2a95533-a292-400e-bcf5-c81090ef720f" providerId="AD" clId="Web-{B0536F86-C883-7A67-11FA-EA747C9A93F9}" dt="2022-02-27T19:40:30.283" v="1283"/>
-        <pc:sldMkLst>
-          <pc:docMk/>
-          <pc:sldMk cId="0" sldId="294"/>
-        </pc:sldMkLst>
-      </pc:sldChg>
-      <pc:sldChg chg="del">
-        <pc:chgData name="Daniel Dan" userId="S::daniel.dan@modul.ac.at::e2a95533-a292-400e-bcf5-c81090ef720f" providerId="AD" clId="Web-{B0536F86-C883-7A67-11FA-EA747C9A93F9}" dt="2022-02-27T19:40:30.283" v="1282"/>
-        <pc:sldMkLst>
-          <pc:docMk/>
-          <pc:sldMk cId="0" sldId="295"/>
-        </pc:sldMkLst>
-      </pc:sldChg>
-      <pc:sldChg chg="del">
-        <pc:chgData name="Daniel Dan" userId="S::daniel.dan@modul.ac.at::e2a95533-a292-400e-bcf5-c81090ef720f" providerId="AD" clId="Web-{B0536F86-C883-7A67-11FA-EA747C9A93F9}" dt="2022-02-27T19:40:30.283" v="1281"/>
-        <pc:sldMkLst>
-          <pc:docMk/>
-          <pc:sldMk cId="0" sldId="296"/>
-        </pc:sldMkLst>
-      </pc:sldChg>
-      <pc:sldChg chg="del">
-        <pc:chgData name="Daniel Dan" userId="S::daniel.dan@modul.ac.at::e2a95533-a292-400e-bcf5-c81090ef720f" providerId="AD" clId="Web-{B0536F86-C883-7A67-11FA-EA747C9A93F9}" dt="2022-02-27T19:40:30.283" v="1280"/>
-        <pc:sldMkLst>
-          <pc:docMk/>
-          <pc:sldMk cId="0" sldId="297"/>
-        </pc:sldMkLst>
-      </pc:sldChg>
-      <pc:sldChg chg="del">
-        <pc:chgData name="Daniel Dan" userId="S::daniel.dan@modul.ac.at::e2a95533-a292-400e-bcf5-c81090ef720f" providerId="AD" clId="Web-{B0536F86-C883-7A67-11FA-EA747C9A93F9}" dt="2022-02-27T19:40:30.283" v="1279"/>
-        <pc:sldMkLst>
-          <pc:docMk/>
-          <pc:sldMk cId="0" sldId="298"/>
-        </pc:sldMkLst>
-      </pc:sldChg>
-      <pc:sldChg chg="del">
-        <pc:chgData name="Daniel Dan" userId="S::daniel.dan@modul.ac.at::e2a95533-a292-400e-bcf5-c81090ef720f" providerId="AD" clId="Web-{B0536F86-C883-7A67-11FA-EA747C9A93F9}" dt="2022-02-27T19:40:30.283" v="1278"/>
-        <pc:sldMkLst>
-          <pc:docMk/>
-          <pc:sldMk cId="0" sldId="299"/>
-        </pc:sldMkLst>
-      </pc:sldChg>
-      <pc:sldChg chg="del">
-        <pc:chgData name="Daniel Dan" userId="S::daniel.dan@modul.ac.at::e2a95533-a292-400e-bcf5-c81090ef720f" providerId="AD" clId="Web-{B0536F86-C883-7A67-11FA-EA747C9A93F9}" dt="2022-02-27T19:40:30.268" v="1277"/>
-        <pc:sldMkLst>
-          <pc:docMk/>
-          <pc:sldMk cId="0" sldId="300"/>
-        </pc:sldMkLst>
-      </pc:sldChg>
-      <pc:sldChg chg="del">
-        <pc:chgData name="Daniel Dan" userId="S::daniel.dan@modul.ac.at::e2a95533-a292-400e-bcf5-c81090ef720f" providerId="AD" clId="Web-{B0536F86-C883-7A67-11FA-EA747C9A93F9}" dt="2022-02-27T19:40:30.268" v="1276"/>
-        <pc:sldMkLst>
-          <pc:docMk/>
-          <pc:sldMk cId="0" sldId="301"/>
-        </pc:sldMkLst>
-      </pc:sldChg>
-      <pc:sldChg chg="del">
-        <pc:chgData name="Daniel Dan" userId="S::daniel.dan@modul.ac.at::e2a95533-a292-400e-bcf5-c81090ef720f" providerId="AD" clId="Web-{B0536F86-C883-7A67-11FA-EA747C9A93F9}" dt="2022-02-27T19:40:30.268" v="1275"/>
-        <pc:sldMkLst>
-          <pc:docMk/>
-          <pc:sldMk cId="0" sldId="302"/>
-        </pc:sldMkLst>
-      </pc:sldChg>
-      <pc:sldChg chg="del">
-        <pc:chgData name="Daniel Dan" userId="S::daniel.dan@modul.ac.at::e2a95533-a292-400e-bcf5-c81090ef720f" providerId="AD" clId="Web-{B0536F86-C883-7A67-11FA-EA747C9A93F9}" dt="2022-02-27T19:54:03.084" v="2519"/>
-        <pc:sldMkLst>
-          <pc:docMk/>
-          <pc:sldMk cId="0" sldId="303"/>
-        </pc:sldMkLst>
-      </pc:sldChg>
-      <pc:sldChg chg="modSp">
-        <pc:chgData name="Daniel Dan" userId="S::daniel.dan@modul.ac.at::e2a95533-a292-400e-bcf5-c81090ef720f" providerId="AD" clId="Web-{B0536F86-C883-7A67-11FA-EA747C9A93F9}" dt="2022-02-27T19:41:28.847" v="1325" actId="20577"/>
-        <pc:sldMkLst>
-          <pc:docMk/>
-          <pc:sldMk cId="0" sldId="304"/>
-        </pc:sldMkLst>
-        <pc:spChg chg="mod">
-          <ac:chgData name="Daniel Dan" userId="S::daniel.dan@modul.ac.at::e2a95533-a292-400e-bcf5-c81090ef720f" providerId="AD" clId="Web-{B0536F86-C883-7A67-11FA-EA747C9A93F9}" dt="2022-02-27T19:41:28.847" v="1325" actId="20577"/>
-          <ac:spMkLst>
-            <pc:docMk/>
-            <pc:sldMk cId="0" sldId="304"/>
-            <ac:spMk id="433" creationId="{00000000-0000-0000-0000-000000000000}"/>
-          </ac:spMkLst>
-        </pc:spChg>
-      </pc:sldChg>
-      <pc:sldChg chg="modSp">
-        <pc:chgData name="Daniel Dan" userId="S::daniel.dan@modul.ac.at::e2a95533-a292-400e-bcf5-c81090ef720f" providerId="AD" clId="Web-{B0536F86-C883-7A67-11FA-EA747C9A93F9}" dt="2022-02-27T19:43:45.864" v="1482" actId="20577"/>
-        <pc:sldMkLst>
-          <pc:docMk/>
-          <pc:sldMk cId="0" sldId="305"/>
-        </pc:sldMkLst>
-        <pc:spChg chg="mod">
-          <ac:chgData name="Daniel Dan" userId="S::daniel.dan@modul.ac.at::e2a95533-a292-400e-bcf5-c81090ef720f" providerId="AD" clId="Web-{B0536F86-C883-7A67-11FA-EA747C9A93F9}" dt="2022-02-27T19:43:45.864" v="1482" actId="20577"/>
-          <ac:spMkLst>
-            <pc:docMk/>
-            <pc:sldMk cId="0" sldId="305"/>
-            <ac:spMk id="438" creationId="{00000000-0000-0000-0000-000000000000}"/>
-          </ac:spMkLst>
-        </pc:spChg>
-      </pc:sldChg>
-      <pc:sldChg chg="addSp delSp modSp">
-        <pc:chgData name="Daniel Dan" userId="S::daniel.dan@modul.ac.at::e2a95533-a292-400e-bcf5-c81090ef720f" providerId="AD" clId="Web-{B0536F86-C883-7A67-11FA-EA747C9A93F9}" dt="2022-02-27T11:15:56.192" v="91" actId="20577"/>
-        <pc:sldMkLst>
-          <pc:docMk/>
-          <pc:sldMk cId="808992841" sldId="309"/>
-        </pc:sldMkLst>
-        <pc:spChg chg="add mod">
-          <ac:chgData name="Daniel Dan" userId="S::daniel.dan@modul.ac.at::e2a95533-a292-400e-bcf5-c81090ef720f" providerId="AD" clId="Web-{B0536F86-C883-7A67-11FA-EA747C9A93F9}" dt="2022-02-27T11:15:56.192" v="91" actId="20577"/>
-          <ac:spMkLst>
-            <pc:docMk/>
-            <pc:sldMk cId="808992841" sldId="309"/>
-            <ac:spMk id="3" creationId="{3115D5A0-2193-4443-9F84-B0DFAF8F16C7}"/>
-          </ac:spMkLst>
-        </pc:spChg>
-        <pc:spChg chg="mod">
-          <ac:chgData name="Daniel Dan" userId="S::daniel.dan@modul.ac.at::e2a95533-a292-400e-bcf5-c81090ef720f" providerId="AD" clId="Web-{B0536F86-C883-7A67-11FA-EA747C9A93F9}" dt="2022-02-27T10:50:30.164" v="16" actId="20577"/>
-          <ac:spMkLst>
-            <pc:docMk/>
-            <pc:sldMk cId="808992841" sldId="309"/>
-            <ac:spMk id="115" creationId="{00000000-0000-0000-0000-000000000000}"/>
-          </ac:spMkLst>
-        </pc:spChg>
-        <pc:spChg chg="mod">
-          <ac:chgData name="Daniel Dan" userId="S::daniel.dan@modul.ac.at::e2a95533-a292-400e-bcf5-c81090ef720f" providerId="AD" clId="Web-{B0536F86-C883-7A67-11FA-EA747C9A93F9}" dt="2022-02-27T10:51:43.106" v="40" actId="20577"/>
-          <ac:spMkLst>
-            <pc:docMk/>
-            <pc:sldMk cId="808992841" sldId="309"/>
-            <ac:spMk id="116" creationId="{00000000-0000-0000-0000-000000000000}"/>
-          </ac:spMkLst>
-        </pc:spChg>
-        <pc:spChg chg="del">
-          <ac:chgData name="Daniel Dan" userId="S::daniel.dan@modul.ac.at::e2a95533-a292-400e-bcf5-c81090ef720f" providerId="AD" clId="Web-{B0536F86-C883-7A67-11FA-EA747C9A93F9}" dt="2022-02-27T10:50:41.040" v="21"/>
-          <ac:spMkLst>
-            <pc:docMk/>
-            <pc:sldMk cId="808992841" sldId="309"/>
-            <ac:spMk id="117" creationId="{00000000-0000-0000-0000-000000000000}"/>
-          </ac:spMkLst>
-        </pc:spChg>
-        <pc:spChg chg="del">
-          <ac:chgData name="Daniel Dan" userId="S::daniel.dan@modul.ac.at::e2a95533-a292-400e-bcf5-c81090ef720f" providerId="AD" clId="Web-{B0536F86-C883-7A67-11FA-EA747C9A93F9}" dt="2022-02-27T10:50:36.555" v="17"/>
-          <ac:spMkLst>
-            <pc:docMk/>
-            <pc:sldMk cId="808992841" sldId="309"/>
-            <ac:spMk id="118" creationId="{00000000-0000-0000-0000-000000000000}"/>
-          </ac:spMkLst>
-        </pc:spChg>
-        <pc:spChg chg="del">
-          <ac:chgData name="Daniel Dan" userId="S::daniel.dan@modul.ac.at::e2a95533-a292-400e-bcf5-c81090ef720f" providerId="AD" clId="Web-{B0536F86-C883-7A67-11FA-EA747C9A93F9}" dt="2022-02-27T10:50:37.774" v="19"/>
-          <ac:spMkLst>
-            <pc:docMk/>
-            <pc:sldMk cId="808992841" sldId="309"/>
-            <ac:spMk id="119" creationId="{00000000-0000-0000-0000-000000000000}"/>
-          </ac:spMkLst>
-        </pc:spChg>
-        <pc:picChg chg="add mod">
-          <ac:chgData name="Daniel Dan" userId="S::daniel.dan@modul.ac.at::e2a95533-a292-400e-bcf5-c81090ef720f" providerId="AD" clId="Web-{B0536F86-C883-7A67-11FA-EA747C9A93F9}" dt="2022-02-27T11:09:11.107" v="46" actId="14100"/>
-          <ac:picMkLst>
-            <pc:docMk/>
-            <pc:sldMk cId="808992841" sldId="309"/>
-            <ac:picMk id="2" creationId="{695EDC47-AE7F-4460-88BE-3A2873850499}"/>
-          </ac:picMkLst>
-        </pc:picChg>
-        <pc:cxnChg chg="del mod">
-          <ac:chgData name="Daniel Dan" userId="S::daniel.dan@modul.ac.at::e2a95533-a292-400e-bcf5-c81090ef720f" providerId="AD" clId="Web-{B0536F86-C883-7A67-11FA-EA747C9A93F9}" dt="2022-02-27T10:50:39.540" v="20"/>
-          <ac:cxnSpMkLst>
-            <pc:docMk/>
-            <pc:sldMk cId="808992841" sldId="309"/>
-            <ac:cxnSpMk id="120" creationId="{00000000-0000-0000-0000-000000000000}"/>
-          </ac:cxnSpMkLst>
-        </pc:cxnChg>
-        <pc:cxnChg chg="del mod">
-          <ac:chgData name="Daniel Dan" userId="S::daniel.dan@modul.ac.at::e2a95533-a292-400e-bcf5-c81090ef720f" providerId="AD" clId="Web-{B0536F86-C883-7A67-11FA-EA747C9A93F9}" dt="2022-02-27T10:50:36.665" v="18"/>
-          <ac:cxnSpMkLst>
-            <pc:docMk/>
-            <pc:sldMk cId="808992841" sldId="309"/>
-            <ac:cxnSpMk id="121" creationId="{00000000-0000-0000-0000-000000000000}"/>
-          </ac:cxnSpMkLst>
-        </pc:cxnChg>
-      </pc:sldChg>
-      <pc:sldChg chg="addSp delSp modSp add replId">
-        <pc:chgData name="Daniel Dan" userId="S::daniel.dan@modul.ac.at::e2a95533-a292-400e-bcf5-c81090ef720f" providerId="AD" clId="Web-{B0536F86-C883-7A67-11FA-EA747C9A93F9}" dt="2022-02-27T11:42:15.551" v="396" actId="20577"/>
-        <pc:sldMkLst>
-          <pc:docMk/>
-          <pc:sldMk cId="2255279033" sldId="310"/>
-        </pc:sldMkLst>
-        <pc:spChg chg="del">
-          <ac:chgData name="Daniel Dan" userId="S::daniel.dan@modul.ac.at::e2a95533-a292-400e-bcf5-c81090ef720f" providerId="AD" clId="Web-{B0536F86-C883-7A67-11FA-EA747C9A93F9}" dt="2022-02-27T11:38:29.226" v="334"/>
-          <ac:spMkLst>
-            <pc:docMk/>
-            <pc:sldMk cId="2255279033" sldId="310"/>
-            <ac:spMk id="3" creationId="{FA7269B2-5EAC-40A0-BC78-8699C651F14B}"/>
-          </ac:spMkLst>
-        </pc:spChg>
-        <pc:spChg chg="add mod">
-          <ac:chgData name="Daniel Dan" userId="S::daniel.dan@modul.ac.at::e2a95533-a292-400e-bcf5-c81090ef720f" providerId="AD" clId="Web-{B0536F86-C883-7A67-11FA-EA747C9A93F9}" dt="2022-02-27T11:42:15.551" v="396" actId="20577"/>
-          <ac:spMkLst>
-            <pc:docMk/>
-            <pc:sldMk cId="2255279033" sldId="310"/>
-            <ac:spMk id="4" creationId="{E8CB220C-C520-4842-AAF7-BCBE3FD1411D}"/>
-          </ac:spMkLst>
-        </pc:spChg>
-        <pc:spChg chg="del">
-          <ac:chgData name="Daniel Dan" userId="S::daniel.dan@modul.ac.at::e2a95533-a292-400e-bcf5-c81090ef720f" providerId="AD" clId="Web-{B0536F86-C883-7A67-11FA-EA747C9A93F9}" dt="2022-02-27T11:39:13.150" v="384"/>
-          <ac:spMkLst>
-            <pc:docMk/>
-            <pc:sldMk cId="2255279033" sldId="310"/>
-            <ac:spMk id="8" creationId="{12ED535B-6CCF-43FC-81E9-04835CE0D12D}"/>
-          </ac:spMkLst>
-        </pc:spChg>
-        <pc:spChg chg="del">
-          <ac:chgData name="Daniel Dan" userId="S::daniel.dan@modul.ac.at::e2a95533-a292-400e-bcf5-c81090ef720f" providerId="AD" clId="Web-{B0536F86-C883-7A67-11FA-EA747C9A93F9}" dt="2022-02-27T11:39:13.150" v="383"/>
-          <ac:spMkLst>
-            <pc:docMk/>
-            <pc:sldMk cId="2255279033" sldId="310"/>
-            <ac:spMk id="12" creationId="{A73186A8-BEB2-4989-9C4B-6A12C1481E27}"/>
-          </ac:spMkLst>
-        </pc:spChg>
-        <pc:spChg chg="del">
-          <ac:chgData name="Daniel Dan" userId="S::daniel.dan@modul.ac.at::e2a95533-a292-400e-bcf5-c81090ef720f" providerId="AD" clId="Web-{B0536F86-C883-7A67-11FA-EA747C9A93F9}" dt="2022-02-27T11:39:13.150" v="382"/>
-          <ac:spMkLst>
-            <pc:docMk/>
-            <pc:sldMk cId="2255279033" sldId="310"/>
-            <ac:spMk id="13" creationId="{67FE433E-2D4C-4D9A-9E36-4ECF262E5DAA}"/>
-          </ac:spMkLst>
-        </pc:spChg>
-        <pc:spChg chg="del">
-          <ac:chgData name="Daniel Dan" userId="S::daniel.dan@modul.ac.at::e2a95533-a292-400e-bcf5-c81090ef720f" providerId="AD" clId="Web-{B0536F86-C883-7A67-11FA-EA747C9A93F9}" dt="2022-02-27T11:39:15.088" v="385"/>
-          <ac:spMkLst>
-            <pc:docMk/>
-            <pc:sldMk cId="2255279033" sldId="310"/>
-            <ac:spMk id="14" creationId="{7222F7DF-9180-46F4-A269-AA6E4230EE0B}"/>
-          </ac:spMkLst>
-        </pc:spChg>
-        <pc:spChg chg="del">
-          <ac:chgData name="Daniel Dan" userId="S::daniel.dan@modul.ac.at::e2a95533-a292-400e-bcf5-c81090ef720f" providerId="AD" clId="Web-{B0536F86-C883-7A67-11FA-EA747C9A93F9}" dt="2022-02-27T11:39:13.150" v="381"/>
-          <ac:spMkLst>
-            <pc:docMk/>
-            <pc:sldMk cId="2255279033" sldId="310"/>
-            <ac:spMk id="15" creationId="{5BFFB2CD-BB7C-403E-A6ED-0FB8A30D7042}"/>
-          </ac:spMkLst>
-        </pc:spChg>
-        <pc:spChg chg="del">
-          <ac:chgData name="Daniel Dan" userId="S::daniel.dan@modul.ac.at::e2a95533-a292-400e-bcf5-c81090ef720f" providerId="AD" clId="Web-{B0536F86-C883-7A67-11FA-EA747C9A93F9}" dt="2022-02-27T11:39:13.150" v="380"/>
-          <ac:spMkLst>
-            <pc:docMk/>
-            <pc:sldMk cId="2255279033" sldId="310"/>
-            <ac:spMk id="16" creationId="{2C9E1B4A-8E9D-432E-AEFB-8382DAA6AD5F}"/>
-          </ac:spMkLst>
-        </pc:spChg>
-        <pc:spChg chg="del">
-          <ac:chgData name="Daniel Dan" userId="S::daniel.dan@modul.ac.at::e2a95533-a292-400e-bcf5-c81090ef720f" providerId="AD" clId="Web-{B0536F86-C883-7A67-11FA-EA747C9A93F9}" dt="2022-02-27T11:39:13.150" v="379"/>
-          <ac:spMkLst>
-            <pc:docMk/>
-            <pc:sldMk cId="2255279033" sldId="310"/>
-            <ac:spMk id="17" creationId="{AA5ADC1B-F307-4221-9E8B-40A4A8919F57}"/>
-          </ac:spMkLst>
-        </pc:spChg>
-        <pc:spChg chg="del">
-          <ac:chgData name="Daniel Dan" userId="S::daniel.dan@modul.ac.at::e2a95533-a292-400e-bcf5-c81090ef720f" providerId="AD" clId="Web-{B0536F86-C883-7A67-11FA-EA747C9A93F9}" dt="2022-02-27T11:39:13.150" v="378"/>
-          <ac:spMkLst>
-            <pc:docMk/>
-            <pc:sldMk cId="2255279033" sldId="310"/>
-            <ac:spMk id="18" creationId="{5EE5DB66-D0EC-4202-AA15-D7A5337D8222}"/>
-          </ac:spMkLst>
-        </pc:spChg>
-        <pc:spChg chg="del">
-          <ac:chgData name="Daniel Dan" userId="S::daniel.dan@modul.ac.at::e2a95533-a292-400e-bcf5-c81090ef720f" providerId="AD" clId="Web-{B0536F86-C883-7A67-11FA-EA747C9A93F9}" dt="2022-02-27T11:39:13.150" v="370"/>
-          <ac:spMkLst>
-            <pc:docMk/>
-            <pc:sldMk cId="2255279033" sldId="310"/>
-            <ac:spMk id="20" creationId="{294E924A-BA10-4FD7-983B-9E1FB12B6558}"/>
-          </ac:spMkLst>
-        </pc:spChg>
-        <pc:spChg chg="del">
-          <ac:chgData name="Daniel Dan" userId="S::daniel.dan@modul.ac.at::e2a95533-a292-400e-bcf5-c81090ef720f" providerId="AD" clId="Web-{B0536F86-C883-7A67-11FA-EA747C9A93F9}" dt="2022-02-27T11:39:13.135" v="369"/>
-          <ac:spMkLst>
-            <pc:docMk/>
-            <pc:sldMk cId="2255279033" sldId="310"/>
-            <ac:spMk id="28" creationId="{BB30CBD7-0375-4DF7-B0AE-753ED713CE6D}"/>
-          </ac:spMkLst>
-        </pc:spChg>
-        <pc:spChg chg="del">
-          <ac:chgData name="Daniel Dan" userId="S::daniel.dan@modul.ac.at::e2a95533-a292-400e-bcf5-c81090ef720f" providerId="AD" clId="Web-{B0536F86-C883-7A67-11FA-EA747C9A93F9}" dt="2022-02-27T11:39:13.135" v="368"/>
-          <ac:spMkLst>
-            <pc:docMk/>
-            <pc:sldMk cId="2255279033" sldId="310"/>
-            <ac:spMk id="29" creationId="{58EDA8A9-9308-4A04-BC70-F2C750A11B10}"/>
-          </ac:spMkLst>
-        </pc:spChg>
-        <pc:spChg chg="del">
-          <ac:chgData name="Daniel Dan" userId="S::daniel.dan@modul.ac.at::e2a95533-a292-400e-bcf5-c81090ef720f" providerId="AD" clId="Web-{B0536F86-C883-7A67-11FA-EA747C9A93F9}" dt="2022-02-27T11:39:13.135" v="367"/>
-          <ac:spMkLst>
-            <pc:docMk/>
-            <pc:sldMk cId="2255279033" sldId="310"/>
-            <ac:spMk id="30" creationId="{E1491593-CF0A-47E4-95A2-DBC0183F0411}"/>
-          </ac:spMkLst>
-        </pc:spChg>
-        <pc:spChg chg="del">
-          <ac:chgData name="Daniel Dan" userId="S::daniel.dan@modul.ac.at::e2a95533-a292-400e-bcf5-c81090ef720f" providerId="AD" clId="Web-{B0536F86-C883-7A67-11FA-EA747C9A93F9}" dt="2022-02-27T11:39:13.135" v="366"/>
-          <ac:spMkLst>
-            <pc:docMk/>
-            <pc:sldMk cId="2255279033" sldId="310"/>
-            <ac:spMk id="31" creationId="{BB428BE3-86D3-42A5-A89C-3436F402C584}"/>
-          </ac:spMkLst>
-        </pc:spChg>
-        <pc:spChg chg="del">
-          <ac:chgData name="Daniel Dan" userId="S::daniel.dan@modul.ac.at::e2a95533-a292-400e-bcf5-c81090ef720f" providerId="AD" clId="Web-{B0536F86-C883-7A67-11FA-EA747C9A93F9}" dt="2022-02-27T11:39:13.135" v="365"/>
-          <ac:spMkLst>
-            <pc:docMk/>
-            <pc:sldMk cId="2255279033" sldId="310"/>
-            <ac:spMk id="32" creationId="{279491CC-92A2-4D7E-B858-DE9D2B45C3E3}"/>
-          </ac:spMkLst>
-        </pc:spChg>
-        <pc:spChg chg="del">
-          <ac:chgData name="Daniel Dan" userId="S::daniel.dan@modul.ac.at::e2a95533-a292-400e-bcf5-c81090ef720f" providerId="AD" clId="Web-{B0536F86-C883-7A67-11FA-EA747C9A93F9}" dt="2022-02-27T11:39:13.135" v="364"/>
-          <ac:spMkLst>
-            <pc:docMk/>
-            <pc:sldMk cId="2255279033" sldId="310"/>
-            <ac:spMk id="33" creationId="{40FF0825-F225-46DC-B574-954EC9D85CDC}"/>
-          </ac:spMkLst>
-        </pc:spChg>
-        <pc:spChg chg="del">
-          <ac:chgData name="Daniel Dan" userId="S::daniel.dan@modul.ac.at::e2a95533-a292-400e-bcf5-c81090ef720f" providerId="AD" clId="Web-{B0536F86-C883-7A67-11FA-EA747C9A93F9}" dt="2022-02-27T11:39:13.135" v="363"/>
-          <ac:spMkLst>
-            <pc:docMk/>
-            <pc:sldMk cId="2255279033" sldId="310"/>
-            <ac:spMk id="34" creationId="{AD2A4E70-05A0-482B-8768-0DA6785CE8FC}"/>
-          </ac:spMkLst>
-        </pc:spChg>
-        <pc:spChg chg="mod">
-          <ac:chgData name="Daniel Dan" userId="S::daniel.dan@modul.ac.at::e2a95533-a292-400e-bcf5-c81090ef720f" providerId="AD" clId="Web-{B0536F86-C883-7A67-11FA-EA747C9A93F9}" dt="2022-02-27T11:39:05.462" v="362" actId="20577"/>
-          <ac:spMkLst>
-            <pc:docMk/>
-            <pc:sldMk cId="2255279033" sldId="310"/>
-            <ac:spMk id="141" creationId="{00000000-0000-0000-0000-000000000000}"/>
-          </ac:spMkLst>
-        </pc:spChg>
-        <pc:picChg chg="add mod">
-          <ac:chgData name="Daniel Dan" userId="S::daniel.dan@modul.ac.at::e2a95533-a292-400e-bcf5-c81090ef720f" providerId="AD" clId="Web-{B0536F86-C883-7A67-11FA-EA747C9A93F9}" dt="2022-02-27T11:39:37.402" v="391" actId="1076"/>
-          <ac:picMkLst>
-            <pc:docMk/>
-            <pc:sldMk cId="2255279033" sldId="310"/>
-            <ac:picMk id="2" creationId="{00243F75-935B-4A75-934D-972B513C5EF1}"/>
-          </ac:picMkLst>
-        </pc:picChg>
-        <pc:cxnChg chg="del">
-          <ac:chgData name="Daniel Dan" userId="S::daniel.dan@modul.ac.at::e2a95533-a292-400e-bcf5-c81090ef720f" providerId="AD" clId="Web-{B0536F86-C883-7A67-11FA-EA747C9A93F9}" dt="2022-02-27T11:39:13.150" v="377"/>
-          <ac:cxnSpMkLst>
-            <pc:docMk/>
-            <pc:sldMk cId="2255279033" sldId="310"/>
-            <ac:cxnSpMk id="10" creationId="{70B96866-1296-4A4E-B11F-08DB35F14C8F}"/>
-          </ac:cxnSpMkLst>
-        </pc:cxnChg>
-        <pc:cxnChg chg="del">
-          <ac:chgData name="Daniel Dan" userId="S::daniel.dan@modul.ac.at::e2a95533-a292-400e-bcf5-c81090ef720f" providerId="AD" clId="Web-{B0536F86-C883-7A67-11FA-EA747C9A93F9}" dt="2022-02-27T11:39:13.150" v="376"/>
-          <ac:cxnSpMkLst>
-            <pc:docMk/>
-            <pc:sldMk cId="2255279033" sldId="310"/>
-            <ac:cxnSpMk id="11" creationId="{376198DB-1B98-4AED-896D-590311D6D3F6}"/>
-          </ac:cxnSpMkLst>
-        </pc:cxnChg>
-        <pc:cxnChg chg="del">
-          <ac:chgData name="Daniel Dan" userId="S::daniel.dan@modul.ac.at::e2a95533-a292-400e-bcf5-c81090ef720f" providerId="AD" clId="Web-{B0536F86-C883-7A67-11FA-EA747C9A93F9}" dt="2022-02-27T11:39:13.150" v="375"/>
-          <ac:cxnSpMkLst>
-            <pc:docMk/>
-            <pc:sldMk cId="2255279033" sldId="310"/>
-            <ac:cxnSpMk id="19" creationId="{9AB9CB49-1ED6-4394-866B-D44B63EDFF4D}"/>
-          </ac:cxnSpMkLst>
-        </pc:cxnChg>
-        <pc:cxnChg chg="del">
-          <ac:chgData name="Daniel Dan" userId="S::daniel.dan@modul.ac.at::e2a95533-a292-400e-bcf5-c81090ef720f" providerId="AD" clId="Web-{B0536F86-C883-7A67-11FA-EA747C9A93F9}" dt="2022-02-27T11:39:13.150" v="374"/>
-          <ac:cxnSpMkLst>
-            <pc:docMk/>
-            <pc:sldMk cId="2255279033" sldId="310"/>
-            <ac:cxnSpMk id="23" creationId="{3871D6BC-8253-4619-89DB-FD9BB0355CF4}"/>
-          </ac:cxnSpMkLst>
-        </pc:cxnChg>
-        <pc:cxnChg chg="del">
-          <ac:chgData name="Daniel Dan" userId="S::daniel.dan@modul.ac.at::e2a95533-a292-400e-bcf5-c81090ef720f" providerId="AD" clId="Web-{B0536F86-C883-7A67-11FA-EA747C9A93F9}" dt="2022-02-27T11:39:13.150" v="373"/>
-          <ac:cxnSpMkLst>
-            <pc:docMk/>
-            <pc:sldMk cId="2255279033" sldId="310"/>
-            <ac:cxnSpMk id="24" creationId="{E59A18B9-127C-4DF3-9AB0-6FEDE2BADEE4}"/>
-          </ac:cxnSpMkLst>
-        </pc:cxnChg>
-        <pc:cxnChg chg="del">
-          <ac:chgData name="Daniel Dan" userId="S::daniel.dan@modul.ac.at::e2a95533-a292-400e-bcf5-c81090ef720f" providerId="AD" clId="Web-{B0536F86-C883-7A67-11FA-EA747C9A93F9}" dt="2022-02-27T11:39:13.150" v="372"/>
-          <ac:cxnSpMkLst>
-            <pc:docMk/>
-            <pc:sldMk cId="2255279033" sldId="310"/>
-            <ac:cxnSpMk id="25" creationId="{7D7AB94C-518D-4577-809B-350181669BF3}"/>
-          </ac:cxnSpMkLst>
-        </pc:cxnChg>
-        <pc:cxnChg chg="del">
-          <ac:chgData name="Daniel Dan" userId="S::daniel.dan@modul.ac.at::e2a95533-a292-400e-bcf5-c81090ef720f" providerId="AD" clId="Web-{B0536F86-C883-7A67-11FA-EA747C9A93F9}" dt="2022-02-27T11:39:13.150" v="371"/>
-          <ac:cxnSpMkLst>
-            <pc:docMk/>
-            <pc:sldMk cId="2255279033" sldId="310"/>
-            <ac:cxnSpMk id="26" creationId="{2C51D958-D2C4-4B86-BF14-2AE35FC1DC40}"/>
-          </ac:cxnSpMkLst>
-        </pc:cxnChg>
-      </pc:sldChg>
-      <pc:sldChg chg="addSp delSp modSp add replId">
-        <pc:chgData name="Daniel Dan" userId="S::daniel.dan@modul.ac.at::e2a95533-a292-400e-bcf5-c81090ef720f" providerId="AD" clId="Web-{B0536F86-C883-7A67-11FA-EA747C9A93F9}" dt="2022-02-27T11:45:26.031" v="464" actId="20577"/>
-        <pc:sldMkLst>
-          <pc:docMk/>
-          <pc:sldMk cId="3047330159" sldId="311"/>
-        </pc:sldMkLst>
-        <pc:spChg chg="add mod">
-          <ac:chgData name="Daniel Dan" userId="S::daniel.dan@modul.ac.at::e2a95533-a292-400e-bcf5-c81090ef720f" providerId="AD" clId="Web-{B0536F86-C883-7A67-11FA-EA747C9A93F9}" dt="2022-02-27T11:43:29.009" v="446" actId="20577"/>
-          <ac:spMkLst>
-            <pc:docMk/>
-            <pc:sldMk cId="3047330159" sldId="311"/>
-            <ac:spMk id="2" creationId="{89365D37-3590-43F3-850E-038EA4D84B9A}"/>
-          </ac:spMkLst>
-        </pc:spChg>
-        <pc:spChg chg="del">
-          <ac:chgData name="Daniel Dan" userId="S::daniel.dan@modul.ac.at::e2a95533-a292-400e-bcf5-c81090ef720f" providerId="AD" clId="Web-{B0536F86-C883-7A67-11FA-EA747C9A93F9}" dt="2022-02-27T11:45:12.999" v="447"/>
-          <ac:spMkLst>
-            <pc:docMk/>
-            <pc:sldMk cId="3047330159" sldId="311"/>
-            <ac:spMk id="3" creationId="{FA7269B2-5EAC-40A0-BC78-8699C651F14B}"/>
-          </ac:spMkLst>
-        </pc:spChg>
-        <pc:spChg chg="del">
-          <ac:chgData name="Daniel Dan" userId="S::daniel.dan@modul.ac.at::e2a95533-a292-400e-bcf5-c81090ef720f" providerId="AD" clId="Web-{B0536F86-C883-7A67-11FA-EA747C9A93F9}" dt="2022-02-27T11:42:28.240" v="420"/>
-          <ac:spMkLst>
-            <pc:docMk/>
-            <pc:sldMk cId="3047330159" sldId="311"/>
-            <ac:spMk id="8" creationId="{12ED535B-6CCF-43FC-81E9-04835CE0D12D}"/>
-          </ac:spMkLst>
-        </pc:spChg>
-        <pc:spChg chg="del">
-          <ac:chgData name="Daniel Dan" userId="S::daniel.dan@modul.ac.at::e2a95533-a292-400e-bcf5-c81090ef720f" providerId="AD" clId="Web-{B0536F86-C883-7A67-11FA-EA747C9A93F9}" dt="2022-02-27T11:42:28.240" v="419"/>
-          <ac:spMkLst>
-            <pc:docMk/>
-            <pc:sldMk cId="3047330159" sldId="311"/>
-            <ac:spMk id="12" creationId="{A73186A8-BEB2-4989-9C4B-6A12C1481E27}"/>
-          </ac:spMkLst>
-        </pc:spChg>
-        <pc:spChg chg="del">
-          <ac:chgData name="Daniel Dan" userId="S::daniel.dan@modul.ac.at::e2a95533-a292-400e-bcf5-c81090ef720f" providerId="AD" clId="Web-{B0536F86-C883-7A67-11FA-EA747C9A93F9}" dt="2022-02-27T11:42:28.240" v="418"/>
-          <ac:spMkLst>
-            <pc:docMk/>
-            <pc:sldMk cId="3047330159" sldId="311"/>
-            <ac:spMk id="13" creationId="{67FE433E-2D4C-4D9A-9E36-4ECF262E5DAA}"/>
-          </ac:spMkLst>
-        </pc:spChg>
-        <pc:spChg chg="del">
-          <ac:chgData name="Daniel Dan" userId="S::daniel.dan@modul.ac.at::e2a95533-a292-400e-bcf5-c81090ef720f" providerId="AD" clId="Web-{B0536F86-C883-7A67-11FA-EA747C9A93F9}" dt="2022-02-27T11:42:28.240" v="417"/>
-          <ac:spMkLst>
-            <pc:docMk/>
-            <pc:sldMk cId="3047330159" sldId="311"/>
-            <ac:spMk id="14" creationId="{7222F7DF-9180-46F4-A269-AA6E4230EE0B}"/>
-          </ac:spMkLst>
-        </pc:spChg>
-        <pc:spChg chg="del">
-          <ac:chgData name="Daniel Dan" userId="S::daniel.dan@modul.ac.at::e2a95533-a292-400e-bcf5-c81090ef720f" providerId="AD" clId="Web-{B0536F86-C883-7A67-11FA-EA747C9A93F9}" dt="2022-02-27T11:42:28.240" v="416"/>
-          <ac:spMkLst>
-            <pc:docMk/>
-            <pc:sldMk cId="3047330159" sldId="311"/>
-            <ac:spMk id="15" creationId="{5BFFB2CD-BB7C-403E-A6ED-0FB8A30D7042}"/>
-          </ac:spMkLst>
-        </pc:spChg>
-        <pc:spChg chg="del">
-          <ac:chgData name="Daniel Dan" userId="S::daniel.dan@modul.ac.at::e2a95533-a292-400e-bcf5-c81090ef720f" providerId="AD" clId="Web-{B0536F86-C883-7A67-11FA-EA747C9A93F9}" dt="2022-02-27T11:42:28.240" v="415"/>
-          <ac:spMkLst>
-            <pc:docMk/>
-            <pc:sldMk cId="3047330159" sldId="311"/>
-            <ac:spMk id="16" creationId="{2C9E1B4A-8E9D-432E-AEFB-8382DAA6AD5F}"/>
-          </ac:spMkLst>
-        </pc:spChg>
-        <pc:spChg chg="del">
-          <ac:chgData name="Daniel Dan" userId="S::daniel.dan@modul.ac.at::e2a95533-a292-400e-bcf5-c81090ef720f" providerId="AD" clId="Web-{B0536F86-C883-7A67-11FA-EA747C9A93F9}" dt="2022-02-27T11:42:28.240" v="414"/>
-          <ac:spMkLst>
-            <pc:docMk/>
-            <pc:sldMk cId="3047330159" sldId="311"/>
-            <ac:spMk id="17" creationId="{AA5ADC1B-F307-4221-9E8B-40A4A8919F57}"/>
-          </ac:spMkLst>
-        </pc:spChg>
-        <pc:spChg chg="del">
-          <ac:chgData name="Daniel Dan" userId="S::daniel.dan@modul.ac.at::e2a95533-a292-400e-bcf5-c81090ef720f" providerId="AD" clId="Web-{B0536F86-C883-7A67-11FA-EA747C9A93F9}" dt="2022-02-27T11:42:28.240" v="413"/>
-          <ac:spMkLst>
-            <pc:docMk/>
-            <pc:sldMk cId="3047330159" sldId="311"/>
-            <ac:spMk id="18" creationId="{5EE5DB66-D0EC-4202-AA15-D7A5337D8222}"/>
-          </ac:spMkLst>
-        </pc:spChg>
-        <pc:spChg chg="del">
-          <ac:chgData name="Daniel Dan" userId="S::daniel.dan@modul.ac.at::e2a95533-a292-400e-bcf5-c81090ef720f" providerId="AD" clId="Web-{B0536F86-C883-7A67-11FA-EA747C9A93F9}" dt="2022-02-27T11:42:28.240" v="405"/>
-          <ac:spMkLst>
-            <pc:docMk/>
-            <pc:sldMk cId="3047330159" sldId="311"/>
-            <ac:spMk id="20" creationId="{294E924A-BA10-4FD7-983B-9E1FB12B6558}"/>
-          </ac:spMkLst>
-        </pc:spChg>
-        <pc:spChg chg="del">
-          <ac:chgData name="Daniel Dan" userId="S::daniel.dan@modul.ac.at::e2a95533-a292-400e-bcf5-c81090ef720f" providerId="AD" clId="Web-{B0536F86-C883-7A67-11FA-EA747C9A93F9}" dt="2022-02-27T11:42:28.240" v="404"/>
-          <ac:spMkLst>
-            <pc:docMk/>
-            <pc:sldMk cId="3047330159" sldId="311"/>
-            <ac:spMk id="28" creationId="{BB30CBD7-0375-4DF7-B0AE-753ED713CE6D}"/>
-          </ac:spMkLst>
-        </pc:spChg>
-        <pc:spChg chg="del">
-          <ac:chgData name="Daniel Dan" userId="S::daniel.dan@modul.ac.at::e2a95533-a292-400e-bcf5-c81090ef720f" providerId="AD" clId="Web-{B0536F86-C883-7A67-11FA-EA747C9A93F9}" dt="2022-02-27T11:42:28.240" v="403"/>
-          <ac:spMkLst>
-            <pc:docMk/>
-            <pc:sldMk cId="3047330159" sldId="311"/>
-            <ac:spMk id="29" creationId="{58EDA8A9-9308-4A04-BC70-F2C750A11B10}"/>
-          </ac:spMkLst>
-        </pc:spChg>
-        <pc:spChg chg="del">
-          <ac:chgData name="Daniel Dan" userId="S::daniel.dan@modul.ac.at::e2a95533-a292-400e-bcf5-c81090ef720f" providerId="AD" clId="Web-{B0536F86-C883-7A67-11FA-EA747C9A93F9}" dt="2022-02-27T11:42:28.240" v="402"/>
-          <ac:spMkLst>
-            <pc:docMk/>
-            <pc:sldMk cId="3047330159" sldId="311"/>
-            <ac:spMk id="30" creationId="{E1491593-CF0A-47E4-95A2-DBC0183F0411}"/>
-          </ac:spMkLst>
-        </pc:spChg>
-        <pc:spChg chg="del">
-          <ac:chgData name="Daniel Dan" userId="S::daniel.dan@modul.ac.at::e2a95533-a292-400e-bcf5-c81090ef720f" providerId="AD" clId="Web-{B0536F86-C883-7A67-11FA-EA747C9A93F9}" dt="2022-02-27T11:42:28.240" v="401"/>
-          <ac:spMkLst>
-            <pc:docMk/>
-            <pc:sldMk cId="3047330159" sldId="311"/>
-            <ac:spMk id="31" creationId="{BB428BE3-86D3-42A5-A89C-3436F402C584}"/>
-          </ac:spMkLst>
-        </pc:spChg>
-        <pc:spChg chg="del">
-          <ac:chgData name="Daniel Dan" userId="S::daniel.dan@modul.ac.at::e2a95533-a292-400e-bcf5-c81090ef720f" providerId="AD" clId="Web-{B0536F86-C883-7A67-11FA-EA747C9A93F9}" dt="2022-02-27T11:42:28.240" v="400"/>
-          <ac:spMkLst>
-            <pc:docMk/>
-            <pc:sldMk cId="3047330159" sldId="311"/>
-            <ac:spMk id="32" creationId="{279491CC-92A2-4D7E-B858-DE9D2B45C3E3}"/>
-          </ac:spMkLst>
-        </pc:spChg>
-        <pc:spChg chg="del">
-          <ac:chgData name="Daniel Dan" userId="S::daniel.dan@modul.ac.at::e2a95533-a292-400e-bcf5-c81090ef720f" providerId="AD" clId="Web-{B0536F86-C883-7A67-11FA-EA747C9A93F9}" dt="2022-02-27T11:42:28.240" v="399"/>
-          <ac:spMkLst>
-            <pc:docMk/>
-            <pc:sldMk cId="3047330159" sldId="311"/>
-            <ac:spMk id="33" creationId="{40FF0825-F225-46DC-B574-954EC9D85CDC}"/>
-          </ac:spMkLst>
-        </pc:spChg>
-        <pc:spChg chg="del">
-          <ac:chgData name="Daniel Dan" userId="S::daniel.dan@modul.ac.at::e2a95533-a292-400e-bcf5-c81090ef720f" providerId="AD" clId="Web-{B0536F86-C883-7A67-11FA-EA747C9A93F9}" dt="2022-02-27T11:42:28.240" v="398"/>
-          <ac:spMkLst>
-            <pc:docMk/>
-            <pc:sldMk cId="3047330159" sldId="311"/>
-            <ac:spMk id="34" creationId="{AD2A4E70-05A0-482B-8768-0DA6785CE8FC}"/>
-          </ac:spMkLst>
-        </pc:spChg>
-        <pc:spChg chg="mod">
-          <ac:chgData name="Daniel Dan" userId="S::daniel.dan@modul.ac.at::e2a95533-a292-400e-bcf5-c81090ef720f" providerId="AD" clId="Web-{B0536F86-C883-7A67-11FA-EA747C9A93F9}" dt="2022-02-27T11:45:26.031" v="464" actId="20577"/>
-          <ac:spMkLst>
-            <pc:docMk/>
-            <pc:sldMk cId="3047330159" sldId="311"/>
-            <ac:spMk id="141" creationId="{00000000-0000-0000-0000-000000000000}"/>
-          </ac:spMkLst>
-        </pc:spChg>
-        <pc:cxnChg chg="del">
-          <ac:chgData name="Daniel Dan" userId="S::daniel.dan@modul.ac.at::e2a95533-a292-400e-bcf5-c81090ef720f" providerId="AD" clId="Web-{B0536F86-C883-7A67-11FA-EA747C9A93F9}" dt="2022-02-27T11:42:28.240" v="412"/>
-          <ac:cxnSpMkLst>
-            <pc:docMk/>
-            <pc:sldMk cId="3047330159" sldId="311"/>
-            <ac:cxnSpMk id="10" creationId="{70B96866-1296-4A4E-B11F-08DB35F14C8F}"/>
-          </ac:cxnSpMkLst>
-        </pc:cxnChg>
-        <pc:cxnChg chg="del">
-          <ac:chgData name="Daniel Dan" userId="S::daniel.dan@modul.ac.at::e2a95533-a292-400e-bcf5-c81090ef720f" providerId="AD" clId="Web-{B0536F86-C883-7A67-11FA-EA747C9A93F9}" dt="2022-02-27T11:42:28.240" v="411"/>
-          <ac:cxnSpMkLst>
-            <pc:docMk/>
-            <pc:sldMk cId="3047330159" sldId="311"/>
-            <ac:cxnSpMk id="11" creationId="{376198DB-1B98-4AED-896D-590311D6D3F6}"/>
-          </ac:cxnSpMkLst>
-        </pc:cxnChg>
-        <pc:cxnChg chg="del">
-          <ac:chgData name="Daniel Dan" userId="S::daniel.dan@modul.ac.at::e2a95533-a292-400e-bcf5-c81090ef720f" providerId="AD" clId="Web-{B0536F86-C883-7A67-11FA-EA747C9A93F9}" dt="2022-02-27T11:42:28.240" v="410"/>
-          <ac:cxnSpMkLst>
-            <pc:docMk/>
-            <pc:sldMk cId="3047330159" sldId="311"/>
-            <ac:cxnSpMk id="19" creationId="{9AB9CB49-1ED6-4394-866B-D44B63EDFF4D}"/>
-          </ac:cxnSpMkLst>
-        </pc:cxnChg>
-        <pc:cxnChg chg="del">
-          <ac:chgData name="Daniel Dan" userId="S::daniel.dan@modul.ac.at::e2a95533-a292-400e-bcf5-c81090ef720f" providerId="AD" clId="Web-{B0536F86-C883-7A67-11FA-EA747C9A93F9}" dt="2022-02-27T11:42:28.240" v="409"/>
-          <ac:cxnSpMkLst>
-            <pc:docMk/>
-            <pc:sldMk cId="3047330159" sldId="311"/>
-            <ac:cxnSpMk id="23" creationId="{3871D6BC-8253-4619-89DB-FD9BB0355CF4}"/>
-          </ac:cxnSpMkLst>
-        </pc:cxnChg>
-        <pc:cxnChg chg="del">
-          <ac:chgData name="Daniel Dan" userId="S::daniel.dan@modul.ac.at::e2a95533-a292-400e-bcf5-c81090ef720f" providerId="AD" clId="Web-{B0536F86-C883-7A67-11FA-EA747C9A93F9}" dt="2022-02-27T11:42:28.240" v="408"/>
-          <ac:cxnSpMkLst>
-            <pc:docMk/>
-            <pc:sldMk cId="3047330159" sldId="311"/>
-            <ac:cxnSpMk id="24" creationId="{E59A18B9-127C-4DF3-9AB0-6FEDE2BADEE4}"/>
-          </ac:cxnSpMkLst>
-        </pc:cxnChg>
-        <pc:cxnChg chg="del">
-          <ac:chgData name="Daniel Dan" userId="S::daniel.dan@modul.ac.at::e2a95533-a292-400e-bcf5-c81090ef720f" providerId="AD" clId="Web-{B0536F86-C883-7A67-11FA-EA747C9A93F9}" dt="2022-02-27T11:42:28.240" v="407"/>
-          <ac:cxnSpMkLst>
-            <pc:docMk/>
-            <pc:sldMk cId="3047330159" sldId="311"/>
-            <ac:cxnSpMk id="25" creationId="{7D7AB94C-518D-4577-809B-350181669BF3}"/>
-          </ac:cxnSpMkLst>
-        </pc:cxnChg>
-        <pc:cxnChg chg="del">
-          <ac:chgData name="Daniel Dan" userId="S::daniel.dan@modul.ac.at::e2a95533-a292-400e-bcf5-c81090ef720f" providerId="AD" clId="Web-{B0536F86-C883-7A67-11FA-EA747C9A93F9}" dt="2022-02-27T11:42:28.240" v="406"/>
-          <ac:cxnSpMkLst>
-            <pc:docMk/>
-            <pc:sldMk cId="3047330159" sldId="311"/>
-            <ac:cxnSpMk id="26" creationId="{2C51D958-D2C4-4B86-BF14-2AE35FC1DC40}"/>
-          </ac:cxnSpMkLst>
-        </pc:cxnChg>
-      </pc:sldChg>
-      <pc:sldChg chg="addSp delSp modSp add replId">
-        <pc:chgData name="Daniel Dan" userId="S::daniel.dan@modul.ac.at::e2a95533-a292-400e-bcf5-c81090ef720f" providerId="AD" clId="Web-{B0536F86-C883-7A67-11FA-EA747C9A93F9}" dt="2022-02-27T17:51:38.852" v="518" actId="20577"/>
-        <pc:sldMkLst>
-          <pc:docMk/>
-          <pc:sldMk cId="3962950277" sldId="312"/>
-        </pc:sldMkLst>
-        <pc:spChg chg="add mod">
-          <ac:chgData name="Daniel Dan" userId="S::daniel.dan@modul.ac.at::e2a95533-a292-400e-bcf5-c81090ef720f" providerId="AD" clId="Web-{B0536F86-C883-7A67-11FA-EA747C9A93F9}" dt="2022-02-27T11:46:33.847" v="494" actId="20577"/>
-          <ac:spMkLst>
-            <pc:docMk/>
-            <pc:sldMk cId="3962950277" sldId="312"/>
-            <ac:spMk id="3" creationId="{F7BAE381-3B77-4D2E-80C7-AFE28DDF32F8}"/>
-          </ac:spMkLst>
-        </pc:spChg>
-        <pc:spChg chg="mod">
-          <ac:chgData name="Daniel Dan" userId="S::daniel.dan@modul.ac.at::e2a95533-a292-400e-bcf5-c81090ef720f" providerId="AD" clId="Web-{B0536F86-C883-7A67-11FA-EA747C9A93F9}" dt="2022-02-27T17:51:38.852" v="518" actId="20577"/>
-          <ac:spMkLst>
-            <pc:docMk/>
-            <pc:sldMk cId="3962950277" sldId="312"/>
-            <ac:spMk id="4" creationId="{E8CB220C-C520-4842-AAF7-BCBE3FD1411D}"/>
-          </ac:spMkLst>
-        </pc:spChg>
-        <pc:spChg chg="mod">
-          <ac:chgData name="Daniel Dan" userId="S::daniel.dan@modul.ac.at::e2a95533-a292-400e-bcf5-c81090ef720f" providerId="AD" clId="Web-{B0536F86-C883-7A67-11FA-EA747C9A93F9}" dt="2022-02-27T17:49:17.970" v="510" actId="20577"/>
-          <ac:spMkLst>
-            <pc:docMk/>
-            <pc:sldMk cId="3962950277" sldId="312"/>
-            <ac:spMk id="141" creationId="{00000000-0000-0000-0000-000000000000}"/>
-          </ac:spMkLst>
-        </pc:spChg>
-        <pc:picChg chg="del">
-          <ac:chgData name="Daniel Dan" userId="S::daniel.dan@modul.ac.at::e2a95533-a292-400e-bcf5-c81090ef720f" providerId="AD" clId="Web-{B0536F86-C883-7A67-11FA-EA747C9A93F9}" dt="2022-02-27T11:45:38.172" v="466"/>
-          <ac:picMkLst>
-            <pc:docMk/>
-            <pc:sldMk cId="3962950277" sldId="312"/>
-            <ac:picMk id="2" creationId="{00243F75-935B-4A75-934D-972B513C5EF1}"/>
-          </ac:picMkLst>
-        </pc:picChg>
-        <pc:picChg chg="add del mod">
-          <ac:chgData name="Daniel Dan" userId="S::daniel.dan@modul.ac.at::e2a95533-a292-400e-bcf5-c81090ef720f" providerId="AD" clId="Web-{B0536F86-C883-7A67-11FA-EA747C9A93F9}" dt="2022-02-27T17:51:10.867" v="513"/>
-          <ac:picMkLst>
-            <pc:docMk/>
-            <pc:sldMk cId="3962950277" sldId="312"/>
-            <ac:picMk id="2" creationId="{F3990193-43DE-4DF3-9CF1-B07BD86D4848}"/>
-          </ac:picMkLst>
-        </pc:picChg>
-        <pc:picChg chg="add mod">
-          <ac:chgData name="Daniel Dan" userId="S::daniel.dan@modul.ac.at::e2a95533-a292-400e-bcf5-c81090ef720f" providerId="AD" clId="Web-{B0536F86-C883-7A67-11FA-EA747C9A93F9}" dt="2022-02-27T17:51:24.961" v="515" actId="1076"/>
-          <ac:picMkLst>
-            <pc:docMk/>
-            <pc:sldMk cId="3962950277" sldId="312"/>
-            <ac:picMk id="5" creationId="{CB7C1570-F39B-4FBB-8212-21BA64259AB2}"/>
-          </ac:picMkLst>
-        </pc:picChg>
-      </pc:sldChg>
-      <pc:sldChg chg="modSp add replId">
-        <pc:chgData name="Daniel Dan" userId="S::daniel.dan@modul.ac.at::e2a95533-a292-400e-bcf5-c81090ef720f" providerId="AD" clId="Web-{B0536F86-C883-7A67-11FA-EA747C9A93F9}" dt="2022-02-27T17:53:43.593" v="540" actId="20577"/>
-        <pc:sldMkLst>
-          <pc:docMk/>
-          <pc:sldMk cId="883025682" sldId="313"/>
-        </pc:sldMkLst>
-        <pc:spChg chg="mod">
-          <ac:chgData name="Daniel Dan" userId="S::daniel.dan@modul.ac.at::e2a95533-a292-400e-bcf5-c81090ef720f" providerId="AD" clId="Web-{B0536F86-C883-7A67-11FA-EA747C9A93F9}" dt="2022-02-27T17:53:43.593" v="540" actId="20577"/>
-          <ac:spMkLst>
-            <pc:docMk/>
-            <pc:sldMk cId="883025682" sldId="313"/>
-            <ac:spMk id="150" creationId="{00000000-0000-0000-0000-000000000000}"/>
-          </ac:spMkLst>
-        </pc:spChg>
-      </pc:sldChg>
-      <pc:sldChg chg="addSp modSp add ord replId">
-        <pc:chgData name="Daniel Dan" userId="S::daniel.dan@modul.ac.at::e2a95533-a292-400e-bcf5-c81090ef720f" providerId="AD" clId="Web-{B0536F86-C883-7A67-11FA-EA747C9A93F9}" dt="2022-02-27T18:15:00.596" v="614" actId="20577"/>
-        <pc:sldMkLst>
-          <pc:docMk/>
-          <pc:sldMk cId="61331412" sldId="314"/>
-        </pc:sldMkLst>
-        <pc:spChg chg="add mod">
-          <ac:chgData name="Daniel Dan" userId="S::daniel.dan@modul.ac.at::e2a95533-a292-400e-bcf5-c81090ef720f" providerId="AD" clId="Web-{B0536F86-C883-7A67-11FA-EA747C9A93F9}" dt="2022-02-27T18:15:00.596" v="614" actId="20577"/>
-          <ac:spMkLst>
-            <pc:docMk/>
-            <pc:sldMk cId="61331412" sldId="314"/>
-            <ac:spMk id="3" creationId="{B6A28984-A9FA-4B39-B437-69AA110E10AB}"/>
-          </ac:spMkLst>
-        </pc:spChg>
-        <pc:spChg chg="mod">
-          <ac:chgData name="Daniel Dan" userId="S::daniel.dan@modul.ac.at::e2a95533-a292-400e-bcf5-c81090ef720f" providerId="AD" clId="Web-{B0536F86-C883-7A67-11FA-EA747C9A93F9}" dt="2022-02-27T18:06:15.319" v="579" actId="20577"/>
-          <ac:spMkLst>
-            <pc:docMk/>
-            <pc:sldMk cId="61331412" sldId="314"/>
-            <ac:spMk id="158" creationId="{00000000-0000-0000-0000-000000000000}"/>
-          </ac:spMkLst>
-        </pc:spChg>
-        <pc:picChg chg="mod">
-          <ac:chgData name="Daniel Dan" userId="S::daniel.dan@modul.ac.at::e2a95533-a292-400e-bcf5-c81090ef720f" providerId="AD" clId="Web-{B0536F86-C883-7A67-11FA-EA747C9A93F9}" dt="2022-02-27T18:06:53.337" v="586" actId="14100"/>
-          <ac:picMkLst>
-            <pc:docMk/>
-            <pc:sldMk cId="61331412" sldId="314"/>
-            <ac:picMk id="2" creationId="{2A515699-D87A-4013-808B-5A3F43412698}"/>
-          </ac:picMkLst>
-        </pc:picChg>
-      </pc:sldChg>
-      <pc:sldChg chg="addSp delSp modSp add del ord replId">
-        <pc:chgData name="Daniel Dan" userId="S::daniel.dan@modul.ac.at::e2a95533-a292-400e-bcf5-c81090ef720f" providerId="AD" clId="Web-{B0536F86-C883-7A67-11FA-EA747C9A93F9}" dt="2022-02-27T18:13:26.888" v="611"/>
-        <pc:sldMkLst>
-          <pc:docMk/>
-          <pc:sldMk cId="2370974219" sldId="315"/>
-        </pc:sldMkLst>
-        <pc:spChg chg="mod">
-          <ac:chgData name="Daniel Dan" userId="S::daniel.dan@modul.ac.at::e2a95533-a292-400e-bcf5-c81090ef720f" providerId="AD" clId="Web-{B0536F86-C883-7A67-11FA-EA747C9A93F9}" dt="2022-02-27T18:04:57.940" v="575" actId="20577"/>
-          <ac:spMkLst>
-            <pc:docMk/>
-            <pc:sldMk cId="2370974219" sldId="315"/>
-            <ac:spMk id="158" creationId="{00000000-0000-0000-0000-000000000000}"/>
-          </ac:spMkLst>
-        </pc:spChg>
-        <pc:picChg chg="add del">
-          <ac:chgData name="Daniel Dan" userId="S::daniel.dan@modul.ac.at::e2a95533-a292-400e-bcf5-c81090ef720f" providerId="AD" clId="Web-{B0536F86-C883-7A67-11FA-EA747C9A93F9}" dt="2022-02-27T18:12:38.245" v="604"/>
-          <ac:picMkLst>
-            <pc:docMk/>
-            <pc:sldMk cId="2370974219" sldId="315"/>
-            <ac:picMk id="2" creationId="{2A515699-D87A-4013-808B-5A3F43412698}"/>
-          </ac:picMkLst>
-        </pc:picChg>
-      </pc:sldChg>
-      <pc:sldChg chg="addSp delSp modSp add replId">
-        <pc:chgData name="Daniel Dan" userId="S::daniel.dan@modul.ac.at::e2a95533-a292-400e-bcf5-c81090ef720f" providerId="AD" clId="Web-{B0536F86-C883-7A67-11FA-EA747C9A93F9}" dt="2022-02-27T18:15:13.347" v="623" actId="20577"/>
-        <pc:sldMkLst>
-          <pc:docMk/>
-          <pc:sldMk cId="4220365655" sldId="316"/>
-        </pc:sldMkLst>
-        <pc:spChg chg="add mod">
-          <ac:chgData name="Daniel Dan" userId="S::daniel.dan@modul.ac.at::e2a95533-a292-400e-bcf5-c81090ef720f" providerId="AD" clId="Web-{B0536F86-C883-7A67-11FA-EA747C9A93F9}" dt="2022-02-27T18:15:13.347" v="623" actId="20577"/>
-          <ac:spMkLst>
-            <pc:docMk/>
-            <pc:sldMk cId="4220365655" sldId="316"/>
-            <ac:spMk id="4" creationId="{568FDDE6-0377-49A5-B3E9-DC84DB2B09DF}"/>
-          </ac:spMkLst>
-        </pc:spChg>
-        <pc:spChg chg="mod">
-          <ac:chgData name="Daniel Dan" userId="S::daniel.dan@modul.ac.at::e2a95533-a292-400e-bcf5-c81090ef720f" providerId="AD" clId="Web-{B0536F86-C883-7A67-11FA-EA747C9A93F9}" dt="2022-02-27T18:12:57.324" v="607" actId="20577"/>
-          <ac:spMkLst>
-            <pc:docMk/>
-            <pc:sldMk cId="4220365655" sldId="316"/>
-            <ac:spMk id="158" creationId="{00000000-0000-0000-0000-000000000000}"/>
-          </ac:spMkLst>
-        </pc:spChg>
-        <pc:picChg chg="del">
-          <ac:chgData name="Daniel Dan" userId="S::daniel.dan@modul.ac.at::e2a95533-a292-400e-bcf5-c81090ef720f" providerId="AD" clId="Web-{B0536F86-C883-7A67-11FA-EA747C9A93F9}" dt="2022-02-27T18:06:31.086" v="580"/>
-          <ac:picMkLst>
-            <pc:docMk/>
-            <pc:sldMk cId="4220365655" sldId="316"/>
-            <ac:picMk id="2" creationId="{2A515699-D87A-4013-808B-5A3F43412698}"/>
-          </ac:picMkLst>
-        </pc:picChg>
-        <pc:picChg chg="add mod">
-          <ac:chgData name="Daniel Dan" userId="S::daniel.dan@modul.ac.at::e2a95533-a292-400e-bcf5-c81090ef720f" providerId="AD" clId="Web-{B0536F86-C883-7A67-11FA-EA747C9A93F9}" dt="2022-02-27T18:06:44.008" v="584" actId="1076"/>
-          <ac:picMkLst>
-            <pc:docMk/>
-            <pc:sldMk cId="4220365655" sldId="316"/>
-            <ac:picMk id="3" creationId="{55592C39-C9C6-4ABC-A848-C32C60C55AC1}"/>
-          </ac:picMkLst>
-        </pc:picChg>
-      </pc:sldChg>
-      <pc:sldChg chg="addSp delSp modSp add replId">
-        <pc:chgData name="Daniel Dan" userId="S::daniel.dan@modul.ac.at::e2a95533-a292-400e-bcf5-c81090ef720f" providerId="AD" clId="Web-{B0536F86-C883-7A67-11FA-EA747C9A93F9}" dt="2022-02-27T18:16:35.476" v="632" actId="20577"/>
-        <pc:sldMkLst>
-          <pc:docMk/>
-          <pc:sldMk cId="1750328212" sldId="317"/>
-        </pc:sldMkLst>
-        <pc:spChg chg="add mod">
-          <ac:chgData name="Daniel Dan" userId="S::daniel.dan@modul.ac.at::e2a95533-a292-400e-bcf5-c81090ef720f" providerId="AD" clId="Web-{B0536F86-C883-7A67-11FA-EA747C9A93F9}" dt="2022-02-27T18:16:35.476" v="632" actId="20577"/>
-          <ac:spMkLst>
-            <pc:docMk/>
-            <pc:sldMk cId="1750328212" sldId="317"/>
-            <ac:spMk id="4" creationId="{EAC4C751-6916-4D9C-8E51-5A3C944A2D18}"/>
-          </ac:spMkLst>
-        </pc:spChg>
-        <pc:spChg chg="mod">
-          <ac:chgData name="Daniel Dan" userId="S::daniel.dan@modul.ac.at::e2a95533-a292-400e-bcf5-c81090ef720f" providerId="AD" clId="Web-{B0536F86-C883-7A67-11FA-EA747C9A93F9}" dt="2022-02-27T18:13:23.591" v="610" actId="20577"/>
-          <ac:spMkLst>
-            <pc:docMk/>
-            <pc:sldMk cId="1750328212" sldId="317"/>
-            <ac:spMk id="158" creationId="{00000000-0000-0000-0000-000000000000}"/>
-          </ac:spMkLst>
-        </pc:spChg>
-        <pc:picChg chg="add mod">
-          <ac:chgData name="Daniel Dan" userId="S::daniel.dan@modul.ac.at::e2a95533-a292-400e-bcf5-c81090ef720f" providerId="AD" clId="Web-{B0536F86-C883-7A67-11FA-EA747C9A93F9}" dt="2022-02-27T18:11:57.383" v="599" actId="1076"/>
-          <ac:picMkLst>
-            <pc:docMk/>
-            <pc:sldMk cId="1750328212" sldId="317"/>
-            <ac:picMk id="2" creationId="{3354AAC9-0A2C-4988-9DF7-89018407934A}"/>
-          </ac:picMkLst>
-        </pc:picChg>
-        <pc:picChg chg="del">
-          <ac:chgData name="Daniel Dan" userId="S::daniel.dan@modul.ac.at::e2a95533-a292-400e-bcf5-c81090ef720f" providerId="AD" clId="Web-{B0536F86-C883-7A67-11FA-EA747C9A93F9}" dt="2022-02-27T18:10:41.661" v="595"/>
-          <ac:picMkLst>
-            <pc:docMk/>
-            <pc:sldMk cId="1750328212" sldId="317"/>
-            <ac:picMk id="3" creationId="{55592C39-C9C6-4ABC-A848-C32C60C55AC1}"/>
-          </ac:picMkLst>
-        </pc:picChg>
-      </pc:sldChg>
-      <pc:sldChg chg="addSp delSp modSp add replId">
-        <pc:chgData name="Daniel Dan" userId="S::daniel.dan@modul.ac.at::e2a95533-a292-400e-bcf5-c81090ef720f" providerId="AD" clId="Web-{B0536F86-C883-7A67-11FA-EA747C9A93F9}" dt="2022-02-27T18:37:03.091" v="951" actId="1076"/>
-        <pc:sldMkLst>
-          <pc:docMk/>
-          <pc:sldMk cId="3435117287" sldId="318"/>
-        </pc:sldMkLst>
-        <pc:spChg chg="add del">
-          <ac:chgData name="Daniel Dan" userId="S::daniel.dan@modul.ac.at::e2a95533-a292-400e-bcf5-c81090ef720f" providerId="AD" clId="Web-{B0536F86-C883-7A67-11FA-EA747C9A93F9}" dt="2022-02-27T18:28:11.935" v="747"/>
-          <ac:spMkLst>
-            <pc:docMk/>
-            <pc:sldMk cId="3435117287" sldId="318"/>
-            <ac:spMk id="3" creationId="{3AF0F248-872A-4B44-96EB-EBAA07041213}"/>
-          </ac:spMkLst>
-        </pc:spChg>
-        <pc:spChg chg="add mod">
-          <ac:chgData name="Daniel Dan" userId="S::daniel.dan@modul.ac.at::e2a95533-a292-400e-bcf5-c81090ef720f" providerId="AD" clId="Web-{B0536F86-C883-7A67-11FA-EA747C9A93F9}" dt="2022-02-27T18:33:29.173" v="901" actId="14100"/>
-          <ac:spMkLst>
-            <pc:docMk/>
-            <pc:sldMk cId="3435117287" sldId="318"/>
-            <ac:spMk id="5" creationId="{639C04D4-9C4E-43DB-B3BD-4A741A4B36C0}"/>
-          </ac:spMkLst>
-        </pc:spChg>
-        <pc:spChg chg="add del mod">
-          <ac:chgData name="Daniel Dan" userId="S::daniel.dan@modul.ac.at::e2a95533-a292-400e-bcf5-c81090ef720f" providerId="AD" clId="Web-{B0536F86-C883-7A67-11FA-EA747C9A93F9}" dt="2022-02-27T18:30:14.617" v="813"/>
-          <ac:spMkLst>
-            <pc:docMk/>
-            <pc:sldMk cId="3435117287" sldId="318"/>
-            <ac:spMk id="6" creationId="{2C537286-233C-4796-9091-E68D3E1064D8}"/>
-          </ac:spMkLst>
-        </pc:spChg>
-        <pc:spChg chg="add mod">
-          <ac:chgData name="Daniel Dan" userId="S::daniel.dan@modul.ac.at::e2a95533-a292-400e-bcf5-c81090ef720f" providerId="AD" clId="Web-{B0536F86-C883-7A67-11FA-EA747C9A93F9}" dt="2022-02-27T18:34:41.708" v="930" actId="20577"/>
-          <ac:spMkLst>
-            <pc:docMk/>
-            <pc:sldMk cId="3435117287" sldId="318"/>
-            <ac:spMk id="7" creationId="{877D5788-EFA2-455C-8462-5136F1C6D7A5}"/>
-          </ac:spMkLst>
-        </pc:spChg>
-        <pc:spChg chg="add mod">
-          <ac:chgData name="Daniel Dan" userId="S::daniel.dan@modul.ac.at::e2a95533-a292-400e-bcf5-c81090ef720f" providerId="AD" clId="Web-{B0536F86-C883-7A67-11FA-EA747C9A93F9}" dt="2022-02-27T18:28:49.609" v="754" actId="1076"/>
-          <ac:spMkLst>
-            <pc:docMk/>
-            <pc:sldMk cId="3435117287" sldId="318"/>
-            <ac:spMk id="8" creationId="{042DB9B9-2AFB-4890-A18C-CDAAE43AF153}"/>
-          </ac:spMkLst>
-        </pc:spChg>
-        <pc:spChg chg="add mod">
-          <ac:chgData name="Daniel Dan" userId="S::daniel.dan@modul.ac.at::e2a95533-a292-400e-bcf5-c81090ef720f" providerId="AD" clId="Web-{B0536F86-C883-7A67-11FA-EA747C9A93F9}" dt="2022-02-27T18:36:30.198" v="943" actId="20577"/>
-          <ac:spMkLst>
-            <pc:docMk/>
-            <pc:sldMk cId="3435117287" sldId="318"/>
-            <ac:spMk id="9" creationId="{DDC27FBF-E02E-4BCB-A831-2B8522B2A17D}"/>
-          </ac:spMkLst>
-        </pc:spChg>
-        <pc:spChg chg="add mod">
-          <ac:chgData name="Daniel Dan" userId="S::daniel.dan@modul.ac.at::e2a95533-a292-400e-bcf5-c81090ef720f" providerId="AD" clId="Web-{B0536F86-C883-7A67-11FA-EA747C9A93F9}" dt="2022-02-27T18:34:36.458" v="923" actId="20577"/>
-          <ac:spMkLst>
-            <pc:docMk/>
-            <pc:sldMk cId="3435117287" sldId="318"/>
-            <ac:spMk id="10" creationId="{A0790012-41B0-4479-83E2-9E565AB0BF58}"/>
-          </ac:spMkLst>
-        </pc:spChg>
-        <pc:spChg chg="add del">
-          <ac:chgData name="Daniel Dan" userId="S::daniel.dan@modul.ac.at::e2a95533-a292-400e-bcf5-c81090ef720f" providerId="AD" clId="Web-{B0536F86-C883-7A67-11FA-EA747C9A93F9}" dt="2022-02-27T18:35:32.867" v="934"/>
-          <ac:spMkLst>
-            <pc:docMk/>
-            <pc:sldMk cId="3435117287" sldId="318"/>
-            <ac:spMk id="11" creationId="{41D6AEB8-77D6-44A4-B1FE-36377EA4E896}"/>
-          </ac:spMkLst>
-        </pc:spChg>
-        <pc:spChg chg="add mod">
-          <ac:chgData name="Daniel Dan" userId="S::daniel.dan@modul.ac.at::e2a95533-a292-400e-bcf5-c81090ef720f" providerId="AD" clId="Web-{B0536F86-C883-7A67-11FA-EA747C9A93F9}" dt="2022-02-27T18:36:12.791" v="938" actId="1076"/>
-          <ac:spMkLst>
-            <pc:docMk/>
-            <pc:sldMk cId="3435117287" sldId="318"/>
-            <ac:spMk id="12" creationId="{972F3C98-09DE-40DC-9458-044B098DBB68}"/>
-          </ac:spMkLst>
-        </pc:spChg>
-        <pc:spChg chg="add mod">
-          <ac:chgData name="Daniel Dan" userId="S::daniel.dan@modul.ac.at::e2a95533-a292-400e-bcf5-c81090ef720f" providerId="AD" clId="Web-{B0536F86-C883-7A67-11FA-EA747C9A93F9}" dt="2022-02-27T18:37:03.091" v="951" actId="1076"/>
-          <ac:spMkLst>
-            <pc:docMk/>
-            <pc:sldMk cId="3435117287" sldId="318"/>
-            <ac:spMk id="13" creationId="{4E9FED30-55C5-49AD-A89A-9611F261A3D4}"/>
-          </ac:spMkLst>
-        </pc:spChg>
-        <pc:spChg chg="add mod">
-          <ac:chgData name="Daniel Dan" userId="S::daniel.dan@modul.ac.at::e2a95533-a292-400e-bcf5-c81090ef720f" providerId="AD" clId="Web-{B0536F86-C883-7A67-11FA-EA747C9A93F9}" dt="2022-02-27T18:36:23.557" v="940" actId="1076"/>
-          <ac:spMkLst>
-            <pc:docMk/>
-            <pc:sldMk cId="3435117287" sldId="318"/>
-            <ac:spMk id="15" creationId="{8A72A438-28F4-4D55-95A4-88716E444225}"/>
-          </ac:spMkLst>
-        </pc:spChg>
-        <pc:spChg chg="mod">
-          <ac:chgData name="Daniel Dan" userId="S::daniel.dan@modul.ac.at::e2a95533-a292-400e-bcf5-c81090ef720f" providerId="AD" clId="Web-{B0536F86-C883-7A67-11FA-EA747C9A93F9}" dt="2022-02-27T18:35:44.180" v="936"/>
-          <ac:spMkLst>
-            <pc:docMk/>
-            <pc:sldMk cId="3435117287" sldId="318"/>
-            <ac:spMk id="158" creationId="{00000000-0000-0000-0000-000000000000}"/>
-          </ac:spMkLst>
-        </pc:spChg>
-        <pc:picChg chg="del">
-          <ac:chgData name="Daniel Dan" userId="S::daniel.dan@modul.ac.at::e2a95533-a292-400e-bcf5-c81090ef720f" providerId="AD" clId="Web-{B0536F86-C883-7A67-11FA-EA747C9A93F9}" dt="2022-02-27T18:17:03.243" v="635"/>
-          <ac:picMkLst>
-            <pc:docMk/>
-            <pc:sldMk cId="3435117287" sldId="318"/>
-            <ac:picMk id="2" creationId="{3354AAC9-0A2C-4988-9DF7-89018407934A}"/>
-          </ac:picMkLst>
-        </pc:picChg>
-      </pc:sldChg>
-      <pc:sldChg chg="addSp delSp modSp add replId">
-        <pc:chgData name="Daniel Dan" userId="S::daniel.dan@modul.ac.at::e2a95533-a292-400e-bcf5-c81090ef720f" providerId="AD" clId="Web-{B0536F86-C883-7A67-11FA-EA747C9A93F9}" dt="2022-02-27T18:25:58.912" v="716" actId="20577"/>
-        <pc:sldMkLst>
-          <pc:docMk/>
-          <pc:sldMk cId="1930231165" sldId="319"/>
-        </pc:sldMkLst>
-        <pc:spChg chg="mod">
-          <ac:chgData name="Daniel Dan" userId="S::daniel.dan@modul.ac.at::e2a95533-a292-400e-bcf5-c81090ef720f" providerId="AD" clId="Web-{B0536F86-C883-7A67-11FA-EA747C9A93F9}" dt="2022-02-27T18:25:58.912" v="716" actId="20577"/>
-          <ac:spMkLst>
-            <pc:docMk/>
-            <pc:sldMk cId="1930231165" sldId="319"/>
-            <ac:spMk id="4" creationId="{EAC4C751-6916-4D9C-8E51-5A3C944A2D18}"/>
-          </ac:spMkLst>
-        </pc:spChg>
-        <pc:spChg chg="add del mod">
-          <ac:chgData name="Daniel Dan" userId="S::daniel.dan@modul.ac.at::e2a95533-a292-400e-bcf5-c81090ef720f" providerId="AD" clId="Web-{B0536F86-C883-7A67-11FA-EA747C9A93F9}" dt="2022-02-27T18:25:07.863" v="702"/>
-          <ac:spMkLst>
-            <pc:docMk/>
-            <pc:sldMk cId="1930231165" sldId="319"/>
-            <ac:spMk id="6" creationId="{0DD5799A-DF6B-417D-BCC3-B77B7C0FFB82}"/>
-          </ac:spMkLst>
-        </pc:spChg>
-        <pc:spChg chg="del">
-          <ac:chgData name="Daniel Dan" userId="S::daniel.dan@modul.ac.at::e2a95533-a292-400e-bcf5-c81090ef720f" providerId="AD" clId="Web-{B0536F86-C883-7A67-11FA-EA747C9A93F9}" dt="2022-02-27T18:25:02.363" v="701"/>
-          <ac:spMkLst>
-            <pc:docMk/>
-            <pc:sldMk cId="1930231165" sldId="319"/>
-            <ac:spMk id="158" creationId="{00000000-0000-0000-0000-000000000000}"/>
-          </ac:spMkLst>
-        </pc:spChg>
-        <pc:picChg chg="del">
-          <ac:chgData name="Daniel Dan" userId="S::daniel.dan@modul.ac.at::e2a95533-a292-400e-bcf5-c81090ef720f" providerId="AD" clId="Web-{B0536F86-C883-7A67-11FA-EA747C9A93F9}" dt="2022-02-27T18:24:43.799" v="697"/>
-          <ac:picMkLst>
-            <pc:docMk/>
-            <pc:sldMk cId="1930231165" sldId="319"/>
-            <ac:picMk id="2" creationId="{3354AAC9-0A2C-4988-9DF7-89018407934A}"/>
-          </ac:picMkLst>
-        </pc:picChg>
-        <pc:picChg chg="add mod">
-          <ac:chgData name="Daniel Dan" userId="S::daniel.dan@modul.ac.at::e2a95533-a292-400e-bcf5-c81090ef720f" providerId="AD" clId="Web-{B0536F86-C883-7A67-11FA-EA747C9A93F9}" dt="2022-02-27T18:24:59.831" v="700" actId="14100"/>
-          <ac:picMkLst>
-            <pc:docMk/>
-            <pc:sldMk cId="1930231165" sldId="319"/>
-            <ac:picMk id="3" creationId="{750D9348-B158-4932-B485-4BC2BDD9E9E2}"/>
-          </ac:picMkLst>
-        </pc:picChg>
-      </pc:sldChg>
-      <pc:sldChg chg="addSp delSp modSp add replId">
-        <pc:chgData name="Daniel Dan" userId="S::daniel.dan@modul.ac.at::e2a95533-a292-400e-bcf5-c81090ef720f" providerId="AD" clId="Web-{B0536F86-C883-7A67-11FA-EA747C9A93F9}" dt="2022-02-27T18:59:20.432" v="1021" actId="20577"/>
-        <pc:sldMkLst>
-          <pc:docMk/>
-          <pc:sldMk cId="705339712" sldId="320"/>
-        </pc:sldMkLst>
-        <pc:spChg chg="add del mod">
-          <ac:chgData name="Daniel Dan" userId="S::daniel.dan@modul.ac.at::e2a95533-a292-400e-bcf5-c81090ef720f" providerId="AD" clId="Web-{B0536F86-C883-7A67-11FA-EA747C9A93F9}" dt="2022-02-27T18:43:10.114" v="962"/>
-          <ac:spMkLst>
-            <pc:docMk/>
-            <pc:sldMk cId="705339712" sldId="320"/>
-            <ac:spMk id="3" creationId="{A6055272-5DD7-434C-B5A8-73F27B07C224}"/>
-          </ac:spMkLst>
-        </pc:spChg>
-        <pc:spChg chg="del">
-          <ac:chgData name="Daniel Dan" userId="S::daniel.dan@modul.ac.at::e2a95533-a292-400e-bcf5-c81090ef720f" providerId="AD" clId="Web-{B0536F86-C883-7A67-11FA-EA747C9A93F9}" dt="2022-02-27T18:42:55.457" v="954"/>
-          <ac:spMkLst>
-            <pc:docMk/>
-            <pc:sldMk cId="705339712" sldId="320"/>
-            <ac:spMk id="5" creationId="{639C04D4-9C4E-43DB-B3BD-4A741A4B36C0}"/>
-          </ac:spMkLst>
-        </pc:spChg>
-        <pc:spChg chg="add mod">
-          <ac:chgData name="Daniel Dan" userId="S::daniel.dan@modul.ac.at::e2a95533-a292-400e-bcf5-c81090ef720f" providerId="AD" clId="Web-{B0536F86-C883-7A67-11FA-EA747C9A93F9}" dt="2022-02-27T18:48:48.428" v="1011" actId="20577"/>
-          <ac:spMkLst>
-            <pc:docMk/>
-            <pc:sldMk cId="705339712" sldId="320"/>
-            <ac:spMk id="6" creationId="{4384693D-6919-4B86-A2AF-93F6D8421A68}"/>
-          </ac:spMkLst>
-        </pc:spChg>
-        <pc:spChg chg="del">
-          <ac:chgData name="Daniel Dan" userId="S::daniel.dan@modul.ac.at::e2a95533-a292-400e-bcf5-c81090ef720f" providerId="AD" clId="Web-{B0536F86-C883-7A67-11FA-EA747C9A93F9}" dt="2022-02-27T18:42:59.707" v="958"/>
-          <ac:spMkLst>
-            <pc:docMk/>
-            <pc:sldMk cId="705339712" sldId="320"/>
-            <ac:spMk id="7" creationId="{877D5788-EFA2-455C-8462-5136F1C6D7A5}"/>
-          </ac:spMkLst>
-        </pc:spChg>
-        <pc:spChg chg="del">
-          <ac:chgData name="Daniel Dan" userId="S::daniel.dan@modul.ac.at::e2a95533-a292-400e-bcf5-c81090ef720f" providerId="AD" clId="Web-{B0536F86-C883-7A67-11FA-EA747C9A93F9}" dt="2022-02-27T18:42:59.707" v="960"/>
-          <ac:spMkLst>
-            <pc:docMk/>
-            <pc:sldMk cId="705339712" sldId="320"/>
-            <ac:spMk id="8" creationId="{042DB9B9-2AFB-4890-A18C-CDAAE43AF153}"/>
-          </ac:spMkLst>
-        </pc:spChg>
-        <pc:spChg chg="del">
-          <ac:chgData name="Daniel Dan" userId="S::daniel.dan@modul.ac.at::e2a95533-a292-400e-bcf5-c81090ef720f" providerId="AD" clId="Web-{B0536F86-C883-7A67-11FA-EA747C9A93F9}" dt="2022-02-27T18:42:59.707" v="959"/>
-          <ac:spMkLst>
-            <pc:docMk/>
-            <pc:sldMk cId="705339712" sldId="320"/>
-            <ac:spMk id="9" creationId="{DDC27FBF-E02E-4BCB-A831-2B8522B2A17D}"/>
-          </ac:spMkLst>
-        </pc:spChg>
-        <pc:spChg chg="del">
-          <ac:chgData name="Daniel Dan" userId="S::daniel.dan@modul.ac.at::e2a95533-a292-400e-bcf5-c81090ef720f" providerId="AD" clId="Web-{B0536F86-C883-7A67-11FA-EA747C9A93F9}" dt="2022-02-27T18:43:05.473" v="961"/>
-          <ac:spMkLst>
-            <pc:docMk/>
-            <pc:sldMk cId="705339712" sldId="320"/>
-            <ac:spMk id="10" creationId="{A0790012-41B0-4479-83E2-9E565AB0BF58}"/>
-          </ac:spMkLst>
-        </pc:spChg>
-        <pc:spChg chg="del">
-          <ac:chgData name="Daniel Dan" userId="S::daniel.dan@modul.ac.at::e2a95533-a292-400e-bcf5-c81090ef720f" providerId="AD" clId="Web-{B0536F86-C883-7A67-11FA-EA747C9A93F9}" dt="2022-02-27T18:42:59.707" v="957"/>
-          <ac:spMkLst>
-            <pc:docMk/>
-            <pc:sldMk cId="705339712" sldId="320"/>
-            <ac:spMk id="12" creationId="{972F3C98-09DE-40DC-9458-044B098DBB68}"/>
-          </ac:spMkLst>
-        </pc:spChg>
-        <pc:spChg chg="del">
-          <ac:chgData name="Daniel Dan" userId="S::daniel.dan@modul.ac.at::e2a95533-a292-400e-bcf5-c81090ef720f" providerId="AD" clId="Web-{B0536F86-C883-7A67-11FA-EA747C9A93F9}" dt="2022-02-27T18:42:59.707" v="955"/>
-          <ac:spMkLst>
-            <pc:docMk/>
-            <pc:sldMk cId="705339712" sldId="320"/>
-            <ac:spMk id="13" creationId="{4E9FED30-55C5-49AD-A89A-9611F261A3D4}"/>
-          </ac:spMkLst>
-        </pc:spChg>
-        <pc:spChg chg="del">
-          <ac:chgData name="Daniel Dan" userId="S::daniel.dan@modul.ac.at::e2a95533-a292-400e-bcf5-c81090ef720f" providerId="AD" clId="Web-{B0536F86-C883-7A67-11FA-EA747C9A93F9}" dt="2022-02-27T18:42:59.707" v="956"/>
-          <ac:spMkLst>
-            <pc:docMk/>
-            <pc:sldMk cId="705339712" sldId="320"/>
-            <ac:spMk id="15" creationId="{8A72A438-28F4-4D55-95A4-88716E444225}"/>
-          </ac:spMkLst>
-        </pc:spChg>
-        <pc:spChg chg="mod">
-          <ac:chgData name="Daniel Dan" userId="S::daniel.dan@modul.ac.at::e2a95533-a292-400e-bcf5-c81090ef720f" providerId="AD" clId="Web-{B0536F86-C883-7A67-11FA-EA747C9A93F9}" dt="2022-02-27T18:59:20.432" v="1021" actId="20577"/>
-          <ac:spMkLst>
-            <pc:docMk/>
-            <pc:sldMk cId="705339712" sldId="320"/>
-            <ac:spMk id="157" creationId="{00000000-0000-0000-0000-000000000000}"/>
-          </ac:spMkLst>
-        </pc:spChg>
-        <pc:spChg chg="del">
-          <ac:chgData name="Daniel Dan" userId="S::daniel.dan@modul.ac.at::e2a95533-a292-400e-bcf5-c81090ef720f" providerId="AD" clId="Web-{B0536F86-C883-7A67-11FA-EA747C9A93F9}" dt="2022-02-27T18:42:53.613" v="953"/>
-          <ac:spMkLst>
-            <pc:docMk/>
-            <pc:sldMk cId="705339712" sldId="320"/>
-            <ac:spMk id="158" creationId="{00000000-0000-0000-0000-000000000000}"/>
-          </ac:spMkLst>
-        </pc:spChg>
-      </pc:sldChg>
-      <pc:sldChg chg="addSp delSp modSp add replId">
-        <pc:chgData name="Daniel Dan" userId="S::daniel.dan@modul.ac.at::e2a95533-a292-400e-bcf5-c81090ef720f" providerId="AD" clId="Web-{B0536F86-C883-7A67-11FA-EA747C9A93F9}" dt="2022-02-27T19:39:52.236" v="1267" actId="20577"/>
-        <pc:sldMkLst>
-          <pc:docMk/>
-          <pc:sldMk cId="3771323663" sldId="321"/>
-        </pc:sldMkLst>
-        <pc:spChg chg="add mod">
-          <ac:chgData name="Daniel Dan" userId="S::daniel.dan@modul.ac.at::e2a95533-a292-400e-bcf5-c81090ef720f" providerId="AD" clId="Web-{B0536F86-C883-7A67-11FA-EA747C9A93F9}" dt="2022-02-27T19:11:46.173" v="1232" actId="20577"/>
-          <ac:spMkLst>
-            <pc:docMk/>
-            <pc:sldMk cId="3771323663" sldId="321"/>
-            <ac:spMk id="2" creationId="{2C8E9D9B-0A9B-430B-8E73-1FD89A2AD545}"/>
-          </ac:spMkLst>
-        </pc:spChg>
-        <pc:spChg chg="add">
-          <ac:chgData name="Daniel Dan" userId="S::daniel.dan@modul.ac.at::e2a95533-a292-400e-bcf5-c81090ef720f" providerId="AD" clId="Web-{B0536F86-C883-7A67-11FA-EA747C9A93F9}" dt="2022-02-27T19:01:08.046" v="1079"/>
-          <ac:spMkLst>
-            <pc:docMk/>
-            <pc:sldMk cId="3771323663" sldId="321"/>
-            <ac:spMk id="3" creationId="{60F5FB00-4525-44CB-9653-DC87B0C1B19B}"/>
-          </ac:spMkLst>
-        </pc:spChg>
-        <pc:spChg chg="add">
-          <ac:chgData name="Daniel Dan" userId="S::daniel.dan@modul.ac.at::e2a95533-a292-400e-bcf5-c81090ef720f" providerId="AD" clId="Web-{B0536F86-C883-7A67-11FA-EA747C9A93F9}" dt="2022-02-27T19:01:08.062" v="1080"/>
-          <ac:spMkLst>
-            <pc:docMk/>
-            <pc:sldMk cId="3771323663" sldId="321"/>
-            <ac:spMk id="5" creationId="{31E6133C-DC43-4AA8-AFEC-81D03EE5E589}"/>
-          </ac:spMkLst>
-        </pc:spChg>
-        <pc:spChg chg="del mod">
-          <ac:chgData name="Daniel Dan" userId="S::daniel.dan@modul.ac.at::e2a95533-a292-400e-bcf5-c81090ef720f" providerId="AD" clId="Web-{B0536F86-C883-7A67-11FA-EA747C9A93F9}" dt="2022-02-27T18:59:50.542" v="1028"/>
-          <ac:spMkLst>
-            <pc:docMk/>
-            <pc:sldMk cId="3771323663" sldId="321"/>
-            <ac:spMk id="6" creationId="{4384693D-6919-4B86-A2AF-93F6D8421A68}"/>
-          </ac:spMkLst>
-        </pc:spChg>
-        <pc:spChg chg="add">
-          <ac:chgData name="Daniel Dan" userId="S::daniel.dan@modul.ac.at::e2a95533-a292-400e-bcf5-c81090ef720f" providerId="AD" clId="Web-{B0536F86-C883-7A67-11FA-EA747C9A93F9}" dt="2022-02-27T19:01:08.062" v="1081"/>
-          <ac:spMkLst>
-            <pc:docMk/>
-            <pc:sldMk cId="3771323663" sldId="321"/>
-            <ac:spMk id="9" creationId="{F8E0876B-00DB-432C-A8E6-3EDB7FCE2242}"/>
-          </ac:spMkLst>
-        </pc:spChg>
-        <pc:spChg chg="add mod">
-          <ac:chgData name="Daniel Dan" userId="S::daniel.dan@modul.ac.at::e2a95533-a292-400e-bcf5-c81090ef720f" providerId="AD" clId="Web-{B0536F86-C883-7A67-11FA-EA747C9A93F9}" dt="2022-02-27T19:02:05.252" v="1108" actId="20577"/>
-          <ac:spMkLst>
-            <pc:docMk/>
-            <pc:sldMk cId="3771323663" sldId="321"/>
-            <ac:spMk id="11" creationId="{3C4D02FA-1CE8-472A-9175-7CEEFF0422CF}"/>
-          </ac:spMkLst>
-        </pc:spChg>
-        <pc:spChg chg="add">
-          <ac:chgData name="Daniel Dan" userId="S::daniel.dan@modul.ac.at::e2a95533-a292-400e-bcf5-c81090ef720f" providerId="AD" clId="Web-{B0536F86-C883-7A67-11FA-EA747C9A93F9}" dt="2022-02-27T19:01:08.078" v="1083"/>
-          <ac:spMkLst>
-            <pc:docMk/>
-            <pc:sldMk cId="3771323663" sldId="321"/>
-            <ac:spMk id="13" creationId="{2913E011-2738-45D2-A9F8-44FABE537C55}"/>
-          </ac:spMkLst>
-        </pc:spChg>
-        <pc:spChg chg="add">
-          <ac:chgData name="Daniel Dan" userId="S::daniel.dan@modul.ac.at::e2a95533-a292-400e-bcf5-c81090ef720f" providerId="AD" clId="Web-{B0536F86-C883-7A67-11FA-EA747C9A93F9}" dt="2022-02-27T19:01:08.093" v="1084"/>
-          <ac:spMkLst>
-            <pc:docMk/>
-            <pc:sldMk cId="3771323663" sldId="321"/>
-            <ac:spMk id="15" creationId="{0EB08093-8619-4222-A05D-D7B5DDA244E7}"/>
-          </ac:spMkLst>
-        </pc:spChg>
-        <pc:spChg chg="add mod">
-          <ac:chgData name="Daniel Dan" userId="S::daniel.dan@modul.ac.at::e2a95533-a292-400e-bcf5-c81090ef720f" providerId="AD" clId="Web-{B0536F86-C883-7A67-11FA-EA747C9A93F9}" dt="2022-02-27T19:02:12.331" v="1111" actId="20577"/>
-          <ac:spMkLst>
-            <pc:docMk/>
-            <pc:sldMk cId="3771323663" sldId="321"/>
-            <ac:spMk id="17" creationId="{63BC5BE6-2497-4219-B3E2-1175FBAC95E1}"/>
-          </ac:spMkLst>
-        </pc:spChg>
-        <pc:spChg chg="add mod">
-          <ac:chgData name="Daniel Dan" userId="S::daniel.dan@modul.ac.at::e2a95533-a292-400e-bcf5-c81090ef720f" providerId="AD" clId="Web-{B0536F86-C883-7A67-11FA-EA747C9A93F9}" dt="2022-02-27T19:39:52.236" v="1267" actId="20577"/>
-          <ac:spMkLst>
-            <pc:docMk/>
-            <pc:sldMk cId="3771323663" sldId="321"/>
-            <ac:spMk id="19" creationId="{16B51973-F20E-4200-BB19-5F8EB3E2960F}"/>
-          </ac:spMkLst>
-        </pc:spChg>
-      </pc:sldChg>
-      <pc:sldChg chg="modSp add replId">
-        <pc:chgData name="Daniel Dan" userId="S::daniel.dan@modul.ac.at::e2a95533-a292-400e-bcf5-c81090ef720f" providerId="AD" clId="Web-{B0536F86-C883-7A67-11FA-EA747C9A93F9}" dt="2022-02-27T19:53:58.162" v="2518" actId="20577"/>
-        <pc:sldMkLst>
-          <pc:docMk/>
-          <pc:sldMk cId="3370229835" sldId="322"/>
-        </pc:sldMkLst>
-        <pc:spChg chg="mod">
-          <ac:chgData name="Daniel Dan" userId="S::daniel.dan@modul.ac.at::e2a95533-a292-400e-bcf5-c81090ef720f" providerId="AD" clId="Web-{B0536F86-C883-7A67-11FA-EA747C9A93F9}" dt="2022-02-27T19:53:58.162" v="2518" actId="20577"/>
-          <ac:spMkLst>
-            <pc:docMk/>
-            <pc:sldMk cId="3370229835" sldId="322"/>
-            <ac:spMk id="2" creationId="{2C8E9D9B-0A9B-430B-8E73-1FD89A2AD545}"/>
-          </ac:spMkLst>
-        </pc:spChg>
-        <pc:spChg chg="mod">
-          <ac:chgData name="Daniel Dan" userId="S::daniel.dan@modul.ac.at::e2a95533-a292-400e-bcf5-c81090ef720f" providerId="AD" clId="Web-{B0536F86-C883-7A67-11FA-EA747C9A93F9}" dt="2022-02-27T19:12:40.597" v="1241" actId="20577"/>
-          <ac:spMkLst>
-            <pc:docMk/>
-            <pc:sldMk cId="3370229835" sldId="322"/>
-            <ac:spMk id="11" creationId="{3C4D02FA-1CE8-472A-9175-7CEEFF0422CF}"/>
-          </ac:spMkLst>
-        </pc:spChg>
-        <pc:spChg chg="mod">
-          <ac:chgData name="Daniel Dan" userId="S::daniel.dan@modul.ac.at::e2a95533-a292-400e-bcf5-c81090ef720f" providerId="AD" clId="Web-{B0536F86-C883-7A67-11FA-EA747C9A93F9}" dt="2022-02-27T19:39:42.611" v="1254" actId="20577"/>
-          <ac:spMkLst>
-            <pc:docMk/>
-            <pc:sldMk cId="3370229835" sldId="322"/>
-            <ac:spMk id="17" creationId="{63BC5BE6-2497-4219-B3E2-1175FBAC95E1}"/>
-          </ac:spMkLst>
-        </pc:spChg>
-        <pc:spChg chg="mod">
-          <ac:chgData name="Daniel Dan" userId="S::daniel.dan@modul.ac.at::e2a95533-a292-400e-bcf5-c81090ef720f" providerId="AD" clId="Web-{B0536F86-C883-7A67-11FA-EA747C9A93F9}" dt="2022-02-27T19:40:07.642" v="1274" actId="20577"/>
-          <ac:spMkLst>
-            <pc:docMk/>
-            <pc:sldMk cId="3370229835" sldId="322"/>
-            <ac:spMk id="19" creationId="{16B51973-F20E-4200-BB19-5F8EB3E2960F}"/>
-          </ac:spMkLst>
-        </pc:spChg>
-      </pc:sldChg>
-      <pc:sldChg chg="addSp delSp modSp add replId">
-        <pc:chgData name="Daniel Dan" userId="S::daniel.dan@modul.ac.at::e2a95533-a292-400e-bcf5-c81090ef720f" providerId="AD" clId="Web-{B0536F86-C883-7A67-11FA-EA747C9A93F9}" dt="2022-02-27T19:51:55.236" v="2459"/>
-        <pc:sldMkLst>
-          <pc:docMk/>
-          <pc:sldMk cId="3219428231" sldId="323"/>
-        </pc:sldMkLst>
-        <pc:spChg chg="del">
-          <ac:chgData name="Daniel Dan" userId="S::daniel.dan@modul.ac.at::e2a95533-a292-400e-bcf5-c81090ef720f" providerId="AD" clId="Web-{B0536F86-C883-7A67-11FA-EA747C9A93F9}" dt="2022-02-27T19:44:48.272" v="1485"/>
-          <ac:spMkLst>
-            <pc:docMk/>
-            <pc:sldMk cId="3219428231" sldId="323"/>
-            <ac:spMk id="2" creationId="{2C8E9D9B-0A9B-430B-8E73-1FD89A2AD545}"/>
-          </ac:spMkLst>
-        </pc:spChg>
-        <pc:spChg chg="del">
-          <ac:chgData name="Daniel Dan" userId="S::daniel.dan@modul.ac.at::e2a95533-a292-400e-bcf5-c81090ef720f" providerId="AD" clId="Web-{B0536F86-C883-7A67-11FA-EA747C9A93F9}" dt="2022-02-27T19:44:52.334" v="1493"/>
-          <ac:spMkLst>
-            <pc:docMk/>
-            <pc:sldMk cId="3219428231" sldId="323"/>
-            <ac:spMk id="3" creationId="{60F5FB00-4525-44CB-9653-DC87B0C1B19B}"/>
-          </ac:spMkLst>
-        </pc:spChg>
-        <pc:spChg chg="del">
-          <ac:chgData name="Daniel Dan" userId="S::daniel.dan@modul.ac.at::e2a95533-a292-400e-bcf5-c81090ef720f" providerId="AD" clId="Web-{B0536F86-C883-7A67-11FA-EA747C9A93F9}" dt="2022-02-27T19:44:52.334" v="1492"/>
-          <ac:spMkLst>
-            <pc:docMk/>
-            <pc:sldMk cId="3219428231" sldId="323"/>
-            <ac:spMk id="5" creationId="{31E6133C-DC43-4AA8-AFEC-81D03EE5E589}"/>
-          </ac:spMkLst>
-        </pc:spChg>
-        <pc:spChg chg="del">
-          <ac:chgData name="Daniel Dan" userId="S::daniel.dan@modul.ac.at::e2a95533-a292-400e-bcf5-c81090ef720f" providerId="AD" clId="Web-{B0536F86-C883-7A67-11FA-EA747C9A93F9}" dt="2022-02-27T19:44:52.334" v="1491"/>
-          <ac:spMkLst>
-            <pc:docMk/>
-            <pc:sldMk cId="3219428231" sldId="323"/>
-            <ac:spMk id="9" creationId="{F8E0876B-00DB-432C-A8E6-3EDB7FCE2242}"/>
-          </ac:spMkLst>
-        </pc:spChg>
-        <pc:spChg chg="del">
-          <ac:chgData name="Daniel Dan" userId="S::daniel.dan@modul.ac.at::e2a95533-a292-400e-bcf5-c81090ef720f" providerId="AD" clId="Web-{B0536F86-C883-7A67-11FA-EA747C9A93F9}" dt="2022-02-27T19:44:52.334" v="1490"/>
-          <ac:spMkLst>
-            <pc:docMk/>
-            <pc:sldMk cId="3219428231" sldId="323"/>
-            <ac:spMk id="11" creationId="{3C4D02FA-1CE8-472A-9175-7CEEFF0422CF}"/>
-          </ac:spMkLst>
-        </pc:spChg>
-        <pc:spChg chg="del">
-          <ac:chgData name="Daniel Dan" userId="S::daniel.dan@modul.ac.at::e2a95533-a292-400e-bcf5-c81090ef720f" providerId="AD" clId="Web-{B0536F86-C883-7A67-11FA-EA747C9A93F9}" dt="2022-02-27T19:44:52.334" v="1489"/>
-          <ac:spMkLst>
-            <pc:docMk/>
-            <pc:sldMk cId="3219428231" sldId="323"/>
-            <ac:spMk id="13" creationId="{2913E011-2738-45D2-A9F8-44FABE537C55}"/>
-          </ac:spMkLst>
-        </pc:spChg>
-        <pc:spChg chg="del">
-          <ac:chgData name="Daniel Dan" userId="S::daniel.dan@modul.ac.at::e2a95533-a292-400e-bcf5-c81090ef720f" providerId="AD" clId="Web-{B0536F86-C883-7A67-11FA-EA747C9A93F9}" dt="2022-02-27T19:44:52.334" v="1488"/>
-          <ac:spMkLst>
-            <pc:docMk/>
-            <pc:sldMk cId="3219428231" sldId="323"/>
-            <ac:spMk id="15" creationId="{0EB08093-8619-4222-A05D-D7B5DDA244E7}"/>
-          </ac:spMkLst>
-        </pc:spChg>
-        <pc:spChg chg="del">
-          <ac:chgData name="Daniel Dan" userId="S::daniel.dan@modul.ac.at::e2a95533-a292-400e-bcf5-c81090ef720f" providerId="AD" clId="Web-{B0536F86-C883-7A67-11FA-EA747C9A93F9}" dt="2022-02-27T19:44:52.334" v="1487"/>
-          <ac:spMkLst>
-            <pc:docMk/>
-            <pc:sldMk cId="3219428231" sldId="323"/>
-            <ac:spMk id="17" creationId="{63BC5BE6-2497-4219-B3E2-1175FBAC95E1}"/>
-          </ac:spMkLst>
-        </pc:spChg>
-        <pc:spChg chg="del">
-          <ac:chgData name="Daniel Dan" userId="S::daniel.dan@modul.ac.at::e2a95533-a292-400e-bcf5-c81090ef720f" providerId="AD" clId="Web-{B0536F86-C883-7A67-11FA-EA747C9A93F9}" dt="2022-02-27T19:44:52.334" v="1486"/>
-          <ac:spMkLst>
-            <pc:docMk/>
-            <pc:sldMk cId="3219428231" sldId="323"/>
-            <ac:spMk id="19" creationId="{16B51973-F20E-4200-BB19-5F8EB3E2960F}"/>
-          </ac:spMkLst>
-        </pc:spChg>
-        <pc:spChg chg="mod">
-          <ac:chgData name="Daniel Dan" userId="S::daniel.dan@modul.ac.at::e2a95533-a292-400e-bcf5-c81090ef720f" providerId="AD" clId="Web-{B0536F86-C883-7A67-11FA-EA747C9A93F9}" dt="2022-02-27T19:44:42.162" v="1484" actId="20577"/>
-          <ac:spMkLst>
-            <pc:docMk/>
-            <pc:sldMk cId="3219428231" sldId="323"/>
-            <ac:spMk id="157" creationId="{00000000-0000-0000-0000-000000000000}"/>
-          </ac:spMkLst>
-        </pc:spChg>
-        <pc:graphicFrameChg chg="add mod modGraphic">
-          <ac:chgData name="Daniel Dan" userId="S::daniel.dan@modul.ac.at::e2a95533-a292-400e-bcf5-c81090ef720f" providerId="AD" clId="Web-{B0536F86-C883-7A67-11FA-EA747C9A93F9}" dt="2022-02-27T19:51:55.236" v="2459"/>
-          <ac:graphicFrameMkLst>
-            <pc:docMk/>
-            <pc:sldMk cId="3219428231" sldId="323"/>
-            <ac:graphicFrameMk id="6" creationId="{6B2D2C6F-2BD6-4075-8B5C-4562248A9DEB}"/>
-          </ac:graphicFrameMkLst>
-        </pc:graphicFrameChg>
-      </pc:sldChg>
-    </pc:docChg>
-  </pc:docChgLst>
-  <pc:docChgLst>
-    <pc:chgData name="Daniel Dan" userId="S::daniel.dan@modul.ac.at::e2a95533-a292-400e-bcf5-c81090ef720f" providerId="AD" clId="Web-{690A8561-0462-61C5-122F-B37E0D33A249}"/>
-    <pc:docChg chg="addSld modSld">
-      <pc:chgData name="Daniel Dan" userId="S::daniel.dan@modul.ac.at::e2a95533-a292-400e-bcf5-c81090ef720f" providerId="AD" clId="Web-{690A8561-0462-61C5-122F-B37E0D33A249}" dt="2022-02-25T18:00:25.011" v="398" actId="20577"/>
-      <pc:docMkLst>
-        <pc:docMk/>
-      </pc:docMkLst>
-      <pc:sldChg chg="modSp">
-        <pc:chgData name="Daniel Dan" userId="S::daniel.dan@modul.ac.at::e2a95533-a292-400e-bcf5-c81090ef720f" providerId="AD" clId="Web-{690A8561-0462-61C5-122F-B37E0D33A249}" dt="2022-02-25T17:10:40.821" v="7" actId="20577"/>
+      <pc:sldChg chg="modSp mod">
+        <pc:chgData name="Ingo Frommholz" userId="ee3b4549-206f-4e4f-93a1-b7ff676f0af7" providerId="ADAL" clId="{5F8971C4-3D52-5FAB-A951-9912A46CDBB0}" dt="2025-11-05T22:03:26.936" v="0" actId="1038"/>
         <pc:sldMkLst>
           <pc:docMk/>
           <pc:sldMk cId="0" sldId="256"/>
         </pc:sldMkLst>
+        <pc:picChg chg="mod">
+          <ac:chgData name="Ingo Frommholz" userId="ee3b4549-206f-4e4f-93a1-b7ff676f0af7" providerId="ADAL" clId="{5F8971C4-3D52-5FAB-A951-9912A46CDBB0}" dt="2025-11-05T22:03:26.936" v="0" actId="1038"/>
+          <ac:picMkLst>
+            <pc:docMk/>
+            <pc:sldMk cId="0" sldId="256"/>
+            <ac:picMk id="78" creationId="{00000000-0000-0000-0000-000000000000}"/>
+          </ac:picMkLst>
+        </pc:picChg>
+      </pc:sldChg>
+      <pc:sldChg chg="modSp mod">
+        <pc:chgData name="Ingo Frommholz" userId="ee3b4549-206f-4e4f-93a1-b7ff676f0af7" providerId="ADAL" clId="{5F8971C4-3D52-5FAB-A951-9912A46CDBB0}" dt="2025-11-05T22:14:28.771" v="111" actId="20577"/>
+        <pc:sldMkLst>
+          <pc:docMk/>
+          <pc:sldMk cId="0" sldId="408"/>
+        </pc:sldMkLst>
         <pc:spChg chg="mod">
-          <ac:chgData name="Daniel Dan" userId="S::daniel.dan@modul.ac.at::e2a95533-a292-400e-bcf5-c81090ef720f" providerId="AD" clId="Web-{690A8561-0462-61C5-122F-B37E0D33A249}" dt="2022-02-25T17:10:40.821" v="7" actId="20577"/>
+          <ac:chgData name="Ingo Frommholz" userId="ee3b4549-206f-4e4f-93a1-b7ff676f0af7" providerId="ADAL" clId="{5F8971C4-3D52-5FAB-A951-9912A46CDBB0}" dt="2025-11-05T22:14:28.771" v="111" actId="20577"/>
           <ac:spMkLst>
             <pc:docMk/>
-            <pc:sldMk cId="0" sldId="256"/>
-            <ac:spMk id="80" creationId="{00000000-0000-0000-0000-000000000000}"/>
+            <pc:sldMk cId="0" sldId="408"/>
+            <ac:spMk id="6" creationId="{D7707901-CF88-4DD5-92F9-27B080708D9F}"/>
           </ac:spMkLst>
         </pc:spChg>
       </pc:sldChg>
-      <pc:sldChg chg="modSp">
-        <pc:chgData name="Daniel Dan" userId="S::daniel.dan@modul.ac.at::e2a95533-a292-400e-bcf5-c81090ef720f" providerId="AD" clId="Web-{690A8561-0462-61C5-122F-B37E0D33A249}" dt="2022-02-25T17:30:54.181" v="146" actId="20577"/>
+      <pc:sldChg chg="modSp mod">
+        <pc:chgData name="Ingo Frommholz" userId="ee3b4549-206f-4e4f-93a1-b7ff676f0af7" providerId="ADAL" clId="{5F8971C4-3D52-5FAB-A951-9912A46CDBB0}" dt="2025-11-05T23:34:24.367" v="364" actId="20577"/>
         <pc:sldMkLst>
           <pc:docMk/>
-          <pc:sldMk cId="0" sldId="257"/>
+          <pc:sldMk cId="2688265821" sldId="461"/>
         </pc:sldMkLst>
         <pc:spChg chg="mod">
-          <ac:chgData name="Daniel Dan" userId="S::daniel.dan@modul.ac.at::e2a95533-a292-400e-bcf5-c81090ef720f" providerId="AD" clId="Web-{690A8561-0462-61C5-122F-B37E0D33A249}" dt="2022-02-25T17:19:28.820" v="83" actId="20577"/>
+          <ac:chgData name="Ingo Frommholz" userId="ee3b4549-206f-4e4f-93a1-b7ff676f0af7" providerId="ADAL" clId="{5F8971C4-3D52-5FAB-A951-9912A46CDBB0}" dt="2025-11-05T23:34:24.367" v="364" actId="20577"/>
           <ac:spMkLst>
             <pc:docMk/>
-            <pc:sldMk cId="0" sldId="257"/>
-            <ac:spMk id="86" creationId="{00000000-0000-0000-0000-000000000000}"/>
+            <pc:sldMk cId="2688265821" sldId="461"/>
+            <ac:spMk id="4" creationId="{B1AB2DE2-BFB4-403B-9976-58C0812A00AF}"/>
+          </ac:spMkLst>
+        </pc:spChg>
+      </pc:sldChg>
+      <pc:sldChg chg="modSp mod">
+        <pc:chgData name="Ingo Frommholz" userId="ee3b4549-206f-4e4f-93a1-b7ff676f0af7" providerId="ADAL" clId="{5F8971C4-3D52-5FAB-A951-9912A46CDBB0}" dt="2025-11-05T23:34:46.491" v="368" actId="20577"/>
+        <pc:sldMkLst>
+          <pc:docMk/>
+          <pc:sldMk cId="409898843" sldId="539"/>
+        </pc:sldMkLst>
+        <pc:spChg chg="mod">
+          <ac:chgData name="Ingo Frommholz" userId="ee3b4549-206f-4e4f-93a1-b7ff676f0af7" providerId="ADAL" clId="{5F8971C4-3D52-5FAB-A951-9912A46CDBB0}" dt="2025-11-05T23:34:46.491" v="368" actId="20577"/>
+          <ac:spMkLst>
+            <pc:docMk/>
+            <pc:sldMk cId="409898843" sldId="539"/>
+            <ac:spMk id="4" creationId="{B1AB2DE2-BFB4-403B-9976-58C0812A00AF}"/>
+          </ac:spMkLst>
+        </pc:spChg>
+      </pc:sldChg>
+      <pc:sldChg chg="modSp mod">
+        <pc:chgData name="Ingo Frommholz" userId="ee3b4549-206f-4e4f-93a1-b7ff676f0af7" providerId="ADAL" clId="{5F8971C4-3D52-5FAB-A951-9912A46CDBB0}" dt="2025-11-05T22:36:40.021" v="198"/>
+        <pc:sldMkLst>
+          <pc:docMk/>
+          <pc:sldMk cId="3466252940" sldId="544"/>
+        </pc:sldMkLst>
+        <pc:spChg chg="mod">
+          <ac:chgData name="Ingo Frommholz" userId="ee3b4549-206f-4e4f-93a1-b7ff676f0af7" providerId="ADAL" clId="{5F8971C4-3D52-5FAB-A951-9912A46CDBB0}" dt="2025-11-05T22:36:40.021" v="198"/>
+          <ac:spMkLst>
+            <pc:docMk/>
+            <pc:sldMk cId="3466252940" sldId="544"/>
+            <ac:spMk id="4" creationId="{2EF7CA25-84A0-4821-9D4D-BD17F39439DB}"/>
+          </ac:spMkLst>
+        </pc:spChg>
+      </pc:sldChg>
+      <pc:sldChg chg="modSp mod">
+        <pc:chgData name="Ingo Frommholz" userId="ee3b4549-206f-4e4f-93a1-b7ff676f0af7" providerId="ADAL" clId="{5F8971C4-3D52-5FAB-A951-9912A46CDBB0}" dt="2025-11-05T22:46:08.800" v="200" actId="5793"/>
+        <pc:sldMkLst>
+          <pc:docMk/>
+          <pc:sldMk cId="3480101231" sldId="551"/>
+        </pc:sldMkLst>
+        <pc:spChg chg="mod">
+          <ac:chgData name="Ingo Frommholz" userId="ee3b4549-206f-4e4f-93a1-b7ff676f0af7" providerId="ADAL" clId="{5F8971C4-3D52-5FAB-A951-9912A46CDBB0}" dt="2025-11-05T22:46:08.800" v="200" actId="5793"/>
+          <ac:spMkLst>
+            <pc:docMk/>
+            <pc:sldMk cId="3480101231" sldId="551"/>
+            <ac:spMk id="4" creationId="{2C43D9F7-F150-4BAE-8E02-6FEFC3BF421C}"/>
+          </ac:spMkLst>
+        </pc:spChg>
+      </pc:sldChg>
+      <pc:sldChg chg="modSp mod">
+        <pc:chgData name="Ingo Frommholz" userId="ee3b4549-206f-4e4f-93a1-b7ff676f0af7" providerId="ADAL" clId="{5F8971C4-3D52-5FAB-A951-9912A46CDBB0}" dt="2025-11-05T22:15:26.831" v="116" actId="404"/>
+        <pc:sldMkLst>
+          <pc:docMk/>
+          <pc:sldMk cId="2869594375" sldId="559"/>
+        </pc:sldMkLst>
+        <pc:spChg chg="mod">
+          <ac:chgData name="Ingo Frommholz" userId="ee3b4549-206f-4e4f-93a1-b7ff676f0af7" providerId="ADAL" clId="{5F8971C4-3D52-5FAB-A951-9912A46CDBB0}" dt="2025-11-05T22:15:26.831" v="116" actId="404"/>
+          <ac:spMkLst>
+            <pc:docMk/>
+            <pc:sldMk cId="2869594375" sldId="559"/>
+            <ac:spMk id="4" creationId="{139FE531-0789-4F62-ACBA-68FF1E83033B}"/>
           </ac:spMkLst>
         </pc:spChg>
         <pc:spChg chg="mod">
-          <ac:chgData name="Daniel Dan" userId="S::daniel.dan@modul.ac.at::e2a95533-a292-400e-bcf5-c81090ef720f" providerId="AD" clId="Web-{690A8561-0462-61C5-122F-B37E0D33A249}" dt="2022-02-25T17:30:54.181" v="146" actId="20577"/>
+          <ac:chgData name="Ingo Frommholz" userId="ee3b4549-206f-4e4f-93a1-b7ff676f0af7" providerId="ADAL" clId="{5F8971C4-3D52-5FAB-A951-9912A46CDBB0}" dt="2025-11-05T22:15:18.211" v="115" actId="113"/>
           <ac:spMkLst>
             <pc:docMk/>
-            <pc:sldMk cId="0" sldId="257"/>
-            <ac:spMk id="87" creationId="{00000000-0000-0000-0000-000000000000}"/>
+            <pc:sldMk cId="2869594375" sldId="559"/>
+            <ac:spMk id="8" creationId="{21A8D102-1C16-49D0-9B80-8EAB675A9A7B}"/>
           </ac:spMkLst>
         </pc:spChg>
       </pc:sldChg>
-      <pc:sldChg chg="addSp delSp modSp">
-        <pc:chgData name="Daniel Dan" userId="S::daniel.dan@modul.ac.at::e2a95533-a292-400e-bcf5-c81090ef720f" providerId="AD" clId="Web-{690A8561-0462-61C5-122F-B37E0D33A249}" dt="2022-02-25T17:41:53.037" v="288" actId="20577"/>
+      <pc:sldChg chg="modSp mod">
+        <pc:chgData name="Ingo Frommholz" userId="ee3b4549-206f-4e4f-93a1-b7ff676f0af7" providerId="ADAL" clId="{5F8971C4-3D52-5FAB-A951-9912A46CDBB0}" dt="2025-11-05T22:24:58.338" v="127" actId="1038"/>
         <pc:sldMkLst>
           <pc:docMk/>
-          <pc:sldMk cId="0" sldId="258"/>
+          <pc:sldMk cId="3771250368" sldId="560"/>
         </pc:sldMkLst>
-        <pc:spChg chg="add mod">
-          <ac:chgData name="Daniel Dan" userId="S::daniel.dan@modul.ac.at::e2a95533-a292-400e-bcf5-c81090ef720f" providerId="AD" clId="Web-{690A8561-0462-61C5-122F-B37E0D33A249}" dt="2022-02-25T17:41:53.037" v="288" actId="20577"/>
+        <pc:spChg chg="mod">
+          <ac:chgData name="Ingo Frommholz" userId="ee3b4549-206f-4e4f-93a1-b7ff676f0af7" providerId="ADAL" clId="{5F8971C4-3D52-5FAB-A951-9912A46CDBB0}" dt="2025-11-05T22:24:58.338" v="127" actId="1038"/>
           <ac:spMkLst>
             <pc:docMk/>
-            <pc:sldMk cId="0" sldId="258"/>
-            <ac:spMk id="2" creationId="{2AC6E17C-95F6-43A8-9683-8D544AABF34F}"/>
+            <pc:sldMk cId="3771250368" sldId="560"/>
+            <ac:spMk id="8" creationId="{21A8D102-1C16-49D0-9B80-8EAB675A9A7B}"/>
+          </ac:spMkLst>
+        </pc:spChg>
+      </pc:sldChg>
+      <pc:sldChg chg="modSp mod">
+        <pc:chgData name="Ingo Frommholz" userId="ee3b4549-206f-4e4f-93a1-b7ff676f0af7" providerId="ADAL" clId="{5F8971C4-3D52-5FAB-A951-9912A46CDBB0}" dt="2025-11-05T22:27:53.633" v="196" actId="13926"/>
+        <pc:sldMkLst>
+          <pc:docMk/>
+          <pc:sldMk cId="616702037" sldId="564"/>
+        </pc:sldMkLst>
+        <pc:spChg chg="mod">
+          <ac:chgData name="Ingo Frommholz" userId="ee3b4549-206f-4e4f-93a1-b7ff676f0af7" providerId="ADAL" clId="{5F8971C4-3D52-5FAB-A951-9912A46CDBB0}" dt="2025-11-05T22:27:53.633" v="196" actId="13926"/>
+          <ac:spMkLst>
+            <pc:docMk/>
+            <pc:sldMk cId="616702037" sldId="564"/>
+            <ac:spMk id="8" creationId="{21A8D102-1C16-49D0-9B80-8EAB675A9A7B}"/>
+          </ac:spMkLst>
+        </pc:spChg>
+      </pc:sldChg>
+      <pc:sldChg chg="addSp delSp modSp mod">
+        <pc:chgData name="Ingo Frommholz" userId="ee3b4549-206f-4e4f-93a1-b7ff676f0af7" providerId="ADAL" clId="{5F8971C4-3D52-5FAB-A951-9912A46CDBB0}" dt="2025-11-05T23:21:55.047" v="334"/>
+        <pc:sldMkLst>
+          <pc:docMk/>
+          <pc:sldMk cId="1270159388" sldId="565"/>
+        </pc:sldMkLst>
+        <pc:spChg chg="add del mod">
+          <ac:chgData name="Ingo Frommholz" userId="ee3b4549-206f-4e4f-93a1-b7ff676f0af7" providerId="ADAL" clId="{5F8971C4-3D52-5FAB-A951-9912A46CDBB0}" dt="2025-11-05T23:16:19.884" v="325"/>
+          <ac:spMkLst>
+            <pc:docMk/>
+            <pc:sldMk cId="1270159388" sldId="565"/>
+            <ac:spMk id="2" creationId="{991DB83A-58E0-A1B4-5D66-D061F62F1DE9}"/>
+          </ac:spMkLst>
+        </pc:spChg>
+        <pc:spChg chg="add del mod">
+          <ac:chgData name="Ingo Frommholz" userId="ee3b4549-206f-4e4f-93a1-b7ff676f0af7" providerId="ADAL" clId="{5F8971C4-3D52-5FAB-A951-9912A46CDBB0}" dt="2025-11-05T23:21:55.047" v="334"/>
+          <ac:spMkLst>
+            <pc:docMk/>
+            <pc:sldMk cId="1270159388" sldId="565"/>
+            <ac:spMk id="3" creationId="{F39563EE-A7B2-92C6-07EA-63F976C108E2}"/>
           </ac:spMkLst>
         </pc:spChg>
         <pc:spChg chg="mod">
-          <ac:chgData name="Daniel Dan" userId="S::daniel.dan@modul.ac.at::e2a95533-a292-400e-bcf5-c81090ef720f" providerId="AD" clId="Web-{690A8561-0462-61C5-122F-B37E0D33A249}" dt="2022-02-25T17:36:07.680" v="211" actId="20577"/>
+          <ac:chgData name="Ingo Frommholz" userId="ee3b4549-206f-4e4f-93a1-b7ff676f0af7" providerId="ADAL" clId="{5F8971C4-3D52-5FAB-A951-9912A46CDBB0}" dt="2025-11-05T23:18:38.672" v="331" actId="20577"/>
           <ac:spMkLst>
             <pc:docMk/>
-            <pc:sldMk cId="0" sldId="258"/>
-            <ac:spMk id="93" creationId="{00000000-0000-0000-0000-000000000000}"/>
+            <pc:sldMk cId="1270159388" sldId="565"/>
+            <ac:spMk id="5" creationId="{32638457-2D9F-4863-99CD-F828C4C1BC3C}"/>
           </ac:spMkLst>
         </pc:spChg>
-        <pc:spChg chg="del mod">
-          <ac:chgData name="Daniel Dan" userId="S::daniel.dan@modul.ac.at::e2a95533-a292-400e-bcf5-c81090ef720f" providerId="AD" clId="Web-{690A8561-0462-61C5-122F-B37E0D33A249}" dt="2022-02-25T17:40:22.956" v="257"/>
+        <pc:spChg chg="mod">
+          <ac:chgData name="Ingo Frommholz" userId="ee3b4549-206f-4e4f-93a1-b7ff676f0af7" providerId="ADAL" clId="{5F8971C4-3D52-5FAB-A951-9912A46CDBB0}" dt="2025-11-05T23:16:15.470" v="323" actId="20577"/>
           <ac:spMkLst>
             <pc:docMk/>
-            <pc:sldMk cId="0" sldId="258"/>
-            <ac:spMk id="94" creationId="{00000000-0000-0000-0000-000000000000}"/>
+            <pc:sldMk cId="1270159388" sldId="565"/>
+            <ac:spMk id="6" creationId="{E702544F-B557-4280-BAC4-9E0BD0616E05}"/>
           </ac:spMkLst>
         </pc:spChg>
       </pc:sldChg>
-      <pc:sldChg chg="addSp delSp modSp">
-        <pc:chgData name="Daniel Dan" userId="S::daniel.dan@modul.ac.at::e2a95533-a292-400e-bcf5-c81090ef720f" providerId="AD" clId="Web-{690A8561-0462-61C5-122F-B37E0D33A249}" dt="2022-02-25T17:47:17.330" v="346" actId="20577"/>
+      <pc:sldChg chg="modSp mod">
+        <pc:chgData name="Ingo Frommholz" userId="ee3b4549-206f-4e4f-93a1-b7ff676f0af7" providerId="ADAL" clId="{5F8971C4-3D52-5FAB-A951-9912A46CDBB0}" dt="2025-11-05T22:59:43.002" v="248" actId="20577"/>
         <pc:sldMkLst>
           <pc:docMk/>
-          <pc:sldMk cId="0" sldId="259"/>
+          <pc:sldMk cId="1431514371" sldId="569"/>
         </pc:sldMkLst>
-        <pc:spChg chg="add mod">
-          <ac:chgData name="Daniel Dan" userId="S::daniel.dan@modul.ac.at::e2a95533-a292-400e-bcf5-c81090ef720f" providerId="AD" clId="Web-{690A8561-0462-61C5-122F-B37E0D33A249}" dt="2022-02-25T17:47:17.330" v="346" actId="20577"/>
+        <pc:spChg chg="mod">
+          <ac:chgData name="Ingo Frommholz" userId="ee3b4549-206f-4e4f-93a1-b7ff676f0af7" providerId="ADAL" clId="{5F8971C4-3D52-5FAB-A951-9912A46CDBB0}" dt="2025-11-05T22:59:43.002" v="248" actId="20577"/>
           <ac:spMkLst>
             <pc:docMk/>
-            <pc:sldMk cId="0" sldId="259"/>
-            <ac:spMk id="2" creationId="{13DC73B7-25F9-40B5-97EA-554C45F92658}"/>
-          </ac:spMkLst>
-        </pc:spChg>
-        <pc:spChg chg="add mod">
-          <ac:chgData name="Daniel Dan" userId="S::daniel.dan@modul.ac.at::e2a95533-a292-400e-bcf5-c81090ef720f" providerId="AD" clId="Web-{690A8561-0462-61C5-122F-B37E0D33A249}" dt="2022-02-25T17:45:55.172" v="331" actId="1076"/>
-          <ac:spMkLst>
-            <pc:docMk/>
-            <pc:sldMk cId="0" sldId="259"/>
-            <ac:spMk id="4" creationId="{B92A72C2-7B1A-4D69-BD9E-0A6D944717BF}"/>
-          </ac:spMkLst>
-        </pc:spChg>
-        <pc:spChg chg="mod">
-          <ac:chgData name="Daniel Dan" userId="S::daniel.dan@modul.ac.at::e2a95533-a292-400e-bcf5-c81090ef720f" providerId="AD" clId="Web-{690A8561-0462-61C5-122F-B37E0D33A249}" dt="2022-02-25T17:42:39.651" v="293" actId="20577"/>
-          <ac:spMkLst>
-            <pc:docMk/>
-            <pc:sldMk cId="0" sldId="259"/>
-            <ac:spMk id="100" creationId="{00000000-0000-0000-0000-000000000000}"/>
-          </ac:spMkLst>
-        </pc:spChg>
-        <pc:spChg chg="del">
-          <ac:chgData name="Daniel Dan" userId="S::daniel.dan@modul.ac.at::e2a95533-a292-400e-bcf5-c81090ef720f" providerId="AD" clId="Web-{690A8561-0462-61C5-122F-B37E0D33A249}" dt="2022-02-25T17:42:42.698" v="294"/>
-          <ac:spMkLst>
-            <pc:docMk/>
-            <pc:sldMk cId="0" sldId="259"/>
-            <ac:spMk id="101" creationId="{00000000-0000-0000-0000-000000000000}"/>
-          </ac:spMkLst>
-        </pc:spChg>
-        <pc:picChg chg="add mod">
-          <ac:chgData name="Daniel Dan" userId="S::daniel.dan@modul.ac.at::e2a95533-a292-400e-bcf5-c81090ef720f" providerId="AD" clId="Web-{690A8561-0462-61C5-122F-B37E0D33A249}" dt="2022-02-25T17:45:04.280" v="313" actId="14100"/>
-          <ac:picMkLst>
-            <pc:docMk/>
-            <pc:sldMk cId="0" sldId="259"/>
-            <ac:picMk id="3" creationId="{6FF03AE6-7DA7-41B3-9B0E-2709BF48736A}"/>
-          </ac:picMkLst>
-        </pc:picChg>
-        <pc:picChg chg="del">
-          <ac:chgData name="Daniel Dan" userId="S::daniel.dan@modul.ac.at::e2a95533-a292-400e-bcf5-c81090ef720f" providerId="AD" clId="Web-{690A8561-0462-61C5-122F-B37E0D33A249}" dt="2022-02-25T17:42:44.401" v="295"/>
-          <ac:picMkLst>
-            <pc:docMk/>
-            <pc:sldMk cId="0" sldId="259"/>
-            <ac:picMk id="102" creationId="{00000000-0000-0000-0000-000000000000}"/>
-          </ac:picMkLst>
-        </pc:picChg>
-      </pc:sldChg>
-      <pc:sldChg chg="addSp delSp modSp">
-        <pc:chgData name="Daniel Dan" userId="S::daniel.dan@modul.ac.at::e2a95533-a292-400e-bcf5-c81090ef720f" providerId="AD" clId="Web-{690A8561-0462-61C5-122F-B37E0D33A249}" dt="2022-02-25T17:47:42.550" v="350" actId="20577"/>
-        <pc:sldMkLst>
-          <pc:docMk/>
-          <pc:sldMk cId="0" sldId="260"/>
-        </pc:sldMkLst>
-        <pc:spChg chg="add mod">
-          <ac:chgData name="Daniel Dan" userId="S::daniel.dan@modul.ac.at::e2a95533-a292-400e-bcf5-c81090ef720f" providerId="AD" clId="Web-{690A8561-0462-61C5-122F-B37E0D33A249}" dt="2022-02-25T17:47:42.550" v="350" actId="20577"/>
-          <ac:spMkLst>
-            <pc:docMk/>
-            <pc:sldMk cId="0" sldId="260"/>
-            <ac:spMk id="2" creationId="{32FF7F9F-5BD7-43AB-9D11-FCEAC2F92173}"/>
-          </ac:spMkLst>
-        </pc:spChg>
-        <pc:spChg chg="mod">
-          <ac:chgData name="Daniel Dan" userId="S::daniel.dan@modul.ac.at::e2a95533-a292-400e-bcf5-c81090ef720f" providerId="AD" clId="Web-{690A8561-0462-61C5-122F-B37E0D33A249}" dt="2022-02-25T17:46:31.313" v="333" actId="20577"/>
-          <ac:spMkLst>
-            <pc:docMk/>
-            <pc:sldMk cId="0" sldId="260"/>
-            <ac:spMk id="108" creationId="{00000000-0000-0000-0000-000000000000}"/>
-          </ac:spMkLst>
-        </pc:spChg>
-        <pc:spChg chg="del mod">
-          <ac:chgData name="Daniel Dan" userId="S::daniel.dan@modul.ac.at::e2a95533-a292-400e-bcf5-c81090ef720f" providerId="AD" clId="Web-{690A8561-0462-61C5-122F-B37E0D33A249}" dt="2022-02-25T17:46:37.986" v="336"/>
-          <ac:spMkLst>
-            <pc:docMk/>
-            <pc:sldMk cId="0" sldId="260"/>
-            <ac:spMk id="109" creationId="{00000000-0000-0000-0000-000000000000}"/>
+            <pc:sldMk cId="1431514371" sldId="569"/>
+            <ac:spMk id="4" creationId="{2C43D9F7-F150-4BAE-8E02-6FEFC3BF421C}"/>
           </ac:spMkLst>
         </pc:spChg>
       </pc:sldChg>
-      <pc:sldChg chg="addSp delSp modSp">
-        <pc:chgData name="Daniel Dan" userId="S::daniel.dan@modul.ac.at::e2a95533-a292-400e-bcf5-c81090ef720f" providerId="AD" clId="Web-{690A8561-0462-61C5-122F-B37E0D33A249}" dt="2022-02-25T18:00:25.011" v="398" actId="20577"/>
+      <pc:sldChg chg="modSp mod">
+        <pc:chgData name="Ingo Frommholz" userId="ee3b4549-206f-4e4f-93a1-b7ff676f0af7" providerId="ADAL" clId="{5F8971C4-3D52-5FAB-A951-9912A46CDBB0}" dt="2025-11-05T23:10:57.714" v="291" actId="20577"/>
         <pc:sldMkLst>
           <pc:docMk/>
-          <pc:sldMk cId="0" sldId="261"/>
+          <pc:sldMk cId="2678581083" sldId="574"/>
         </pc:sldMkLst>
-        <pc:spChg chg="add mod">
-          <ac:chgData name="Daniel Dan" userId="S::daniel.dan@modul.ac.at::e2a95533-a292-400e-bcf5-c81090ef720f" providerId="AD" clId="Web-{690A8561-0462-61C5-122F-B37E0D33A249}" dt="2022-02-25T17:57:13.850" v="387" actId="20577"/>
+        <pc:spChg chg="mod">
+          <ac:chgData name="Ingo Frommholz" userId="ee3b4549-206f-4e4f-93a1-b7ff676f0af7" providerId="ADAL" clId="{5F8971C4-3D52-5FAB-A951-9912A46CDBB0}" dt="2025-11-05T23:10:57.714" v="291" actId="20577"/>
           <ac:spMkLst>
             <pc:docMk/>
-            <pc:sldMk cId="0" sldId="261"/>
-            <ac:spMk id="2" creationId="{AA3D26AF-68C0-4D87-BDD7-C716EA8FEE9B}"/>
-          </ac:spMkLst>
-        </pc:spChg>
-        <pc:spChg chg="add del mod">
-          <ac:chgData name="Daniel Dan" userId="S::daniel.dan@modul.ac.at::e2a95533-a292-400e-bcf5-c81090ef720f" providerId="AD" clId="Web-{690A8561-0462-61C5-122F-B37E0D33A249}" dt="2022-02-25T18:00:05.198" v="394"/>
-          <ac:spMkLst>
-            <pc:docMk/>
-            <pc:sldMk cId="0" sldId="261"/>
-            <ac:spMk id="4" creationId="{29309802-49C4-4EEF-B1FB-6A6B45A396AF}"/>
-          </ac:spMkLst>
-        </pc:spChg>
-        <pc:spChg chg="add mod">
-          <ac:chgData name="Daniel Dan" userId="S::daniel.dan@modul.ac.at::e2a95533-a292-400e-bcf5-c81090ef720f" providerId="AD" clId="Web-{690A8561-0462-61C5-122F-B37E0D33A249}" dt="2022-02-25T18:00:25.011" v="398" actId="20577"/>
-          <ac:spMkLst>
-            <pc:docMk/>
-            <pc:sldMk cId="0" sldId="261"/>
-            <ac:spMk id="5" creationId="{22FF756C-13B0-4326-B416-4DE81110253F}"/>
-          </ac:spMkLst>
-        </pc:spChg>
-        <pc:spChg chg="mod">
-          <ac:chgData name="Daniel Dan" userId="S::daniel.dan@modul.ac.at::e2a95533-a292-400e-bcf5-c81090ef720f" providerId="AD" clId="Web-{690A8561-0462-61C5-122F-B37E0D33A249}" dt="2022-02-25T17:55:53.332" v="370" actId="20577"/>
-          <ac:spMkLst>
-            <pc:docMk/>
-            <pc:sldMk cId="0" sldId="261"/>
-            <ac:spMk id="115" creationId="{00000000-0000-0000-0000-000000000000}"/>
-          </ac:spMkLst>
-        </pc:spChg>
-        <pc:spChg chg="mod">
-          <ac:chgData name="Daniel Dan" userId="S::daniel.dan@modul.ac.at::e2a95533-a292-400e-bcf5-c81090ef720f" providerId="AD" clId="Web-{690A8561-0462-61C5-122F-B37E0D33A249}" dt="2022-02-25T17:56:12.395" v="373" actId="20577"/>
-          <ac:spMkLst>
-            <pc:docMk/>
-            <pc:sldMk cId="0" sldId="261"/>
-            <ac:spMk id="116" creationId="{00000000-0000-0000-0000-000000000000}"/>
-          </ac:spMkLst>
-        </pc:spChg>
-        <pc:spChg chg="del">
-          <ac:chgData name="Daniel Dan" userId="S::daniel.dan@modul.ac.at::e2a95533-a292-400e-bcf5-c81090ef720f" providerId="AD" clId="Web-{690A8561-0462-61C5-122F-B37E0D33A249}" dt="2022-02-25T17:56:20.739" v="377"/>
-          <ac:spMkLst>
-            <pc:docMk/>
-            <pc:sldMk cId="0" sldId="261"/>
-            <ac:spMk id="117" creationId="{00000000-0000-0000-0000-000000000000}"/>
-          </ac:spMkLst>
-        </pc:spChg>
-        <pc:spChg chg="del">
-          <ac:chgData name="Daniel Dan" userId="S::daniel.dan@modul.ac.at::e2a95533-a292-400e-bcf5-c81090ef720f" providerId="AD" clId="Web-{690A8561-0462-61C5-122F-B37E0D33A249}" dt="2022-02-25T17:56:20.739" v="376"/>
-          <ac:spMkLst>
-            <pc:docMk/>
-            <pc:sldMk cId="0" sldId="261"/>
-            <ac:spMk id="118" creationId="{00000000-0000-0000-0000-000000000000}"/>
-          </ac:spMkLst>
-        </pc:spChg>
-        <pc:spChg chg="del">
-          <ac:chgData name="Daniel Dan" userId="S::daniel.dan@modul.ac.at::e2a95533-a292-400e-bcf5-c81090ef720f" providerId="AD" clId="Web-{690A8561-0462-61C5-122F-B37E0D33A249}" dt="2022-02-25T17:56:39.833" v="378"/>
-          <ac:spMkLst>
-            <pc:docMk/>
-            <pc:sldMk cId="0" sldId="261"/>
-            <ac:spMk id="119" creationId="{00000000-0000-0000-0000-000000000000}"/>
-          </ac:spMkLst>
-        </pc:spChg>
-        <pc:picChg chg="add mod">
-          <ac:chgData name="Daniel Dan" userId="S::daniel.dan@modul.ac.at::e2a95533-a292-400e-bcf5-c81090ef720f" providerId="AD" clId="Web-{690A8561-0462-61C5-122F-B37E0D33A249}" dt="2022-02-25T17:58:50.102" v="390" actId="14100"/>
-          <ac:picMkLst>
-            <pc:docMk/>
-            <pc:sldMk cId="0" sldId="261"/>
-            <ac:picMk id="3" creationId="{4BE485D4-BF09-47D2-A8B4-13ABA91EAB8C}"/>
-          </ac:picMkLst>
-        </pc:picChg>
-        <pc:cxnChg chg="del mod">
-          <ac:chgData name="Daniel Dan" userId="S::daniel.dan@modul.ac.at::e2a95533-a292-400e-bcf5-c81090ef720f" providerId="AD" clId="Web-{690A8561-0462-61C5-122F-B37E0D33A249}" dt="2022-02-25T17:56:20.739" v="375"/>
-          <ac:cxnSpMkLst>
-            <pc:docMk/>
-            <pc:sldMk cId="0" sldId="261"/>
-            <ac:cxnSpMk id="120" creationId="{00000000-0000-0000-0000-000000000000}"/>
-          </ac:cxnSpMkLst>
-        </pc:cxnChg>
-        <pc:cxnChg chg="del mod">
-          <ac:chgData name="Daniel Dan" userId="S::daniel.dan@modul.ac.at::e2a95533-a292-400e-bcf5-c81090ef720f" providerId="AD" clId="Web-{690A8561-0462-61C5-122F-B37E0D33A249}" dt="2022-02-25T17:56:20.739" v="374"/>
-          <ac:cxnSpMkLst>
-            <pc:docMk/>
-            <pc:sldMk cId="0" sldId="261"/>
-            <ac:cxnSpMk id="121" creationId="{00000000-0000-0000-0000-000000000000}"/>
-          </ac:cxnSpMkLst>
-        </pc:cxnChg>
-      </pc:sldChg>
-      <pc:sldChg chg="modSp add replId">
-        <pc:chgData name="Daniel Dan" userId="S::daniel.dan@modul.ac.at::e2a95533-a292-400e-bcf5-c81090ef720f" providerId="AD" clId="Web-{690A8561-0462-61C5-122F-B37E0D33A249}" dt="2022-02-25T17:35:33.085" v="202" actId="20577"/>
-        <pc:sldMkLst>
-          <pc:docMk/>
-          <pc:sldMk cId="862618233" sldId="307"/>
-        </pc:sldMkLst>
-        <pc:spChg chg="mod">
-          <ac:chgData name="Daniel Dan" userId="S::daniel.dan@modul.ac.at::e2a95533-a292-400e-bcf5-c81090ef720f" providerId="AD" clId="Web-{690A8561-0462-61C5-122F-B37E0D33A249}" dt="2022-02-25T17:33:00.638" v="153" actId="20577"/>
-          <ac:spMkLst>
-            <pc:docMk/>
-            <pc:sldMk cId="862618233" sldId="307"/>
-            <ac:spMk id="86" creationId="{00000000-0000-0000-0000-000000000000}"/>
-          </ac:spMkLst>
-        </pc:spChg>
-        <pc:spChg chg="mod">
-          <ac:chgData name="Daniel Dan" userId="S::daniel.dan@modul.ac.at::e2a95533-a292-400e-bcf5-c81090ef720f" providerId="AD" clId="Web-{690A8561-0462-61C5-122F-B37E0D33A249}" dt="2022-02-25T17:35:33.085" v="202" actId="20577"/>
-          <ac:spMkLst>
-            <pc:docMk/>
-            <pc:sldMk cId="862618233" sldId="307"/>
-            <ac:spMk id="87" creationId="{00000000-0000-0000-0000-000000000000}"/>
-          </ac:spMkLst>
-        </pc:spChg>
-      </pc:sldChg>
-      <pc:sldChg chg="addSp delSp modSp add replId">
-        <pc:chgData name="Daniel Dan" userId="S::daniel.dan@modul.ac.at::e2a95533-a292-400e-bcf5-c81090ef720f" providerId="AD" clId="Web-{690A8561-0462-61C5-122F-B37E0D33A249}" dt="2022-02-25T17:54:56.545" v="366" actId="20577"/>
-        <pc:sldMkLst>
-          <pc:docMk/>
-          <pc:sldMk cId="1635341884" sldId="308"/>
-        </pc:sldMkLst>
-        <pc:spChg chg="del mod">
-          <ac:chgData name="Daniel Dan" userId="S::daniel.dan@modul.ac.at::e2a95533-a292-400e-bcf5-c81090ef720f" providerId="AD" clId="Web-{690A8561-0462-61C5-122F-B37E0D33A249}" dt="2022-02-25T17:54:17.091" v="354"/>
-          <ac:spMkLst>
-            <pc:docMk/>
-            <pc:sldMk cId="1635341884" sldId="308"/>
-            <ac:spMk id="2" creationId="{32FF7F9F-5BD7-43AB-9D11-FCEAC2F92173}"/>
-          </ac:spMkLst>
-        </pc:spChg>
-        <pc:spChg chg="add mod">
-          <ac:chgData name="Daniel Dan" userId="S::daniel.dan@modul.ac.at::e2a95533-a292-400e-bcf5-c81090ef720f" providerId="AD" clId="Web-{690A8561-0462-61C5-122F-B37E0D33A249}" dt="2022-02-25T17:54:56.545" v="366" actId="20577"/>
-          <ac:spMkLst>
-            <pc:docMk/>
-            <pc:sldMk cId="1635341884" sldId="308"/>
-            <ac:spMk id="4" creationId="{7BC43673-A9E5-465D-B16A-6019983F8373}"/>
-          </ac:spMkLst>
-        </pc:spChg>
-        <pc:picChg chg="add mod">
-          <ac:chgData name="Daniel Dan" userId="S::daniel.dan@modul.ac.at::e2a95533-a292-400e-bcf5-c81090ef720f" providerId="AD" clId="Web-{690A8561-0462-61C5-122F-B37E0D33A249}" dt="2022-02-25T17:54:32.216" v="358" actId="1076"/>
-          <ac:picMkLst>
-            <pc:docMk/>
-            <pc:sldMk cId="1635341884" sldId="308"/>
-            <ac:picMk id="3" creationId="{7F2C4DF4-3636-442D-8BA9-40DC8304D35B}"/>
-          </ac:picMkLst>
-        </pc:picChg>
-      </pc:sldChg>
-      <pc:sldChg chg="add replId">
-        <pc:chgData name="Daniel Dan" userId="S::daniel.dan@modul.ac.at::e2a95533-a292-400e-bcf5-c81090ef720f" providerId="AD" clId="Web-{690A8561-0462-61C5-122F-B37E0D33A249}" dt="2022-02-25T17:56:05.645" v="371"/>
-        <pc:sldMkLst>
-          <pc:docMk/>
-          <pc:sldMk cId="808992841" sldId="309"/>
-        </pc:sldMkLst>
-      </pc:sldChg>
-    </pc:docChg>
-  </pc:docChgLst>
-  <pc:docChgLst>
-    <pc:chgData name="Daniel Dan" userId="S::daniel.dan@modul.ac.at::e2a95533-a292-400e-bcf5-c81090ef720f" providerId="AD" clId="Web-{6650C529-5FF6-DF91-408E-CA6877BEA450}"/>
-    <pc:docChg chg="modSld">
-      <pc:chgData name="Daniel Dan" userId="S::daniel.dan@modul.ac.at::e2a95533-a292-400e-bcf5-c81090ef720f" providerId="AD" clId="Web-{6650C529-5FF6-DF91-408E-CA6877BEA450}" dt="2022-02-28T12:12:33.858" v="9" actId="20577"/>
-      <pc:docMkLst>
-        <pc:docMk/>
-      </pc:docMkLst>
-      <pc:sldChg chg="modSp">
-        <pc:chgData name="Daniel Dan" userId="S::daniel.dan@modul.ac.at::e2a95533-a292-400e-bcf5-c81090ef720f" providerId="AD" clId="Web-{6650C529-5FF6-DF91-408E-CA6877BEA450}" dt="2022-02-28T12:12:33.858" v="9" actId="20577"/>
-        <pc:sldMkLst>
-          <pc:docMk/>
-          <pc:sldMk cId="0" sldId="305"/>
-        </pc:sldMkLst>
-        <pc:spChg chg="mod">
-          <ac:chgData name="Daniel Dan" userId="S::daniel.dan@modul.ac.at::e2a95533-a292-400e-bcf5-c81090ef720f" providerId="AD" clId="Web-{6650C529-5FF6-DF91-408E-CA6877BEA450}" dt="2022-02-28T12:12:33.858" v="9" actId="20577"/>
-          <ac:spMkLst>
-            <pc:docMk/>
-            <pc:sldMk cId="0" sldId="305"/>
-            <ac:spMk id="438" creationId="{00000000-0000-0000-0000-000000000000}"/>
+            <pc:sldMk cId="2678581083" sldId="574"/>
+            <ac:spMk id="27" creationId="{AF7F6C8C-CA61-401B-AA06-2F9CB1BC5322}"/>
           </ac:spMkLst>
         </pc:spChg>
       </pc:sldChg>
@@ -13235,7 +11175,7 @@
                   <a:schemeClr val="bg1"/>
                 </a:solidFill>
               </a:rPr>
-              <a:t>‹Nr.›</a:t>
+              <a:t>‹#›</a:t>
             </a:fld>
             <a:r>
               <a:rPr lang="de-AT" dirty="0">
@@ -14126,7 +12066,7 @@
         </p:blipFill>
         <p:spPr>
           <a:xfrm>
-            <a:off x="22" y="19050"/>
+            <a:off x="11897" y="19050"/>
             <a:ext cx="9144000" cy="6858046"/>
           </a:xfrm>
           <a:prstGeom prst="rect">
@@ -14714,20 +12654,40 @@
               <a:buChar char="v"/>
             </a:pPr>
             <a:r>
-              <a:rPr lang="en-US" sz="1800" dirty="0">
-                <a:latin typeface="Calibri" panose="020F0502020204030204" pitchFamily="34" charset="0"/>
-                <a:ea typeface="Cambria Math" panose="02040503050406030204" pitchFamily="18" charset="0"/>
-                <a:cs typeface="Calibri" panose="020F0502020204030204" pitchFamily="34" charset="0"/>
-                <a:hlinkClick r:id="rId3"/>
-              </a:rPr>
-              <a:t>Notebook examples</a:t>
-            </a:r>
-            <a:endParaRPr lang="de-DE" sz="1800" dirty="0">
-              <a:highlight>
-                <a:srgbClr val="DAE3F3"/>
-              </a:highlight>
+              <a:rPr lang="de-DE" sz="1800" dirty="0">
+                <a:latin typeface="Calibri" panose="020F0502020204030204" pitchFamily="34" charset="0"/>
+                <a:ea typeface="Cambria Math" panose="02040503050406030204" pitchFamily="18" charset="0"/>
+                <a:cs typeface="Calibri" panose="020F0502020204030204" pitchFamily="34" charset="0"/>
+              </a:rPr>
+              <a:t>See </a:t>
+            </a:r>
+            <a:r>
+              <a:rPr lang="de-DE" sz="1800" dirty="0" err="1">
+                <a:latin typeface="Calibri" panose="020F0502020204030204" pitchFamily="34" charset="0"/>
+                <a:ea typeface="Cambria Math" panose="02040503050406030204" pitchFamily="18" charset="0"/>
+                <a:cs typeface="Calibri" panose="020F0502020204030204" pitchFamily="34" charset="0"/>
+              </a:rPr>
+              <a:t>notebook</a:t>
+            </a:r>
+            <a:r>
+              <a:rPr lang="de-DE" sz="1800" dirty="0">
+                <a:latin typeface="Calibri" panose="020F0502020204030204" pitchFamily="34" charset="0"/>
+                <a:ea typeface="Cambria Math" panose="02040503050406030204" pitchFamily="18" charset="0"/>
+                <a:cs typeface="Calibri" panose="020F0502020204030204" pitchFamily="34" charset="0"/>
+              </a:rPr>
+              <a:t> </a:t>
+            </a:r>
+            <a:r>
+              <a:rPr lang="de-DE" sz="1800" dirty="0" err="1">
+                <a:latin typeface="Calibri" panose="020F0502020204030204" pitchFamily="34" charset="0"/>
+                <a:ea typeface="Cambria Math" panose="02040503050406030204" pitchFamily="18" charset="0"/>
+                <a:cs typeface="Calibri" panose="020F0502020204030204" pitchFamily="34" charset="0"/>
+              </a:rPr>
+              <a:t>example</a:t>
+            </a:r>
+            <a:endParaRPr lang="en-US" sz="1800" dirty="0">
               <a:latin typeface="Calibri" panose="020F0502020204030204" pitchFamily="34" charset="0"/>
-              <a:ea typeface="Calibri" panose="020F0502020204030204" pitchFamily="34" charset="0"/>
+              <a:ea typeface="Cambria Math" panose="02040503050406030204" pitchFamily="18" charset="0"/>
               <a:cs typeface="Calibri" panose="020F0502020204030204" pitchFamily="34" charset="0"/>
             </a:endParaRPr>
           </a:p>
@@ -16552,6 +14512,13 @@
           </a:effectRef>
           <a:fontRef idx="minor"/>
         </p:style>
+        <p:txBody>
+          <a:bodyPr/>
+          <a:lstStyle/>
+          <a:p>
+            <a:endParaRPr lang="en-AT"/>
+          </a:p>
+        </p:txBody>
       </p:sp>
       <p:sp>
         <p:nvSpPr>
@@ -16637,6 +14604,13 @@
           </a:effectRef>
           <a:fontRef idx="minor"/>
         </p:style>
+        <p:txBody>
+          <a:bodyPr/>
+          <a:lstStyle/>
+          <a:p>
+            <a:endParaRPr lang="en-AT"/>
+          </a:p>
+        </p:txBody>
       </p:sp>
       <p:sp>
         <p:nvSpPr>
@@ -16722,6 +14696,13 @@
           </a:effectRef>
           <a:fontRef idx="minor"/>
         </p:style>
+        <p:txBody>
+          <a:bodyPr/>
+          <a:lstStyle/>
+          <a:p>
+            <a:endParaRPr lang="en-AT"/>
+          </a:p>
+        </p:txBody>
       </p:sp>
     </p:spTree>
     <p:extLst>
@@ -18580,41 +16561,44 @@
           </a:bodyPr>
           <a:lstStyle/>
           <a:p>
-            <a:pPr marL="285750" indent="-285750">
+            <a:pPr marL="0" indent="0">
               <a:spcBef>
                 <a:spcPts val="640"/>
               </a:spcBef>
-              <a:buFont typeface="Wingdings" panose="05000000000000000000" pitchFamily="2" charset="2"/>
-              <a:buChar char="v"/>
             </a:pPr>
             <a:r>
               <a:rPr lang="de-DE" sz="1800" dirty="0">
-                <a:solidFill>
-                  <a:schemeClr val="tx1"/>
-                </a:solidFill>
-                <a:latin typeface="Calibri" panose="020F0502020204030204" pitchFamily="34" charset="0"/>
-                <a:ea typeface="Cambria Math" panose="02040503050406030204" pitchFamily="18" charset="0"/>
-                <a:cs typeface="Calibri" panose="020F0502020204030204" pitchFamily="34" charset="0"/>
-                <a:hlinkClick r:id="rId3"/>
-              </a:rPr>
-              <a:t>Notebook </a:t>
+                <a:latin typeface="Calibri" panose="020F0502020204030204" pitchFamily="34" charset="0"/>
+                <a:ea typeface="Cambria Math" panose="02040503050406030204" pitchFamily="18" charset="0"/>
+                <a:cs typeface="Calibri" panose="020F0502020204030204" pitchFamily="34" charset="0"/>
+              </a:rPr>
+              <a:t>See </a:t>
             </a:r>
             <a:r>
               <a:rPr lang="de-DE" sz="1800" dirty="0" err="1">
-                <a:solidFill>
-                  <a:schemeClr val="tx1"/>
-                </a:solidFill>
-                <a:latin typeface="Calibri" panose="020F0502020204030204" pitchFamily="34" charset="0"/>
-                <a:ea typeface="Cambria Math" panose="02040503050406030204" pitchFamily="18" charset="0"/>
-                <a:cs typeface="Calibri" panose="020F0502020204030204" pitchFamily="34" charset="0"/>
-                <a:hlinkClick r:id="rId3"/>
-              </a:rPr>
-              <a:t>examples</a:t>
-            </a:r>
-            <a:endParaRPr lang="de-DE" sz="1800" dirty="0">
-              <a:solidFill>
-                <a:schemeClr val="tx1"/>
-              </a:solidFill>
+                <a:latin typeface="Calibri" panose="020F0502020204030204" pitchFamily="34" charset="0"/>
+                <a:ea typeface="Cambria Math" panose="02040503050406030204" pitchFamily="18" charset="0"/>
+                <a:cs typeface="Calibri" panose="020F0502020204030204" pitchFamily="34" charset="0"/>
+              </a:rPr>
+              <a:t>notebook</a:t>
+            </a:r>
+            <a:r>
+              <a:rPr lang="de-DE" sz="1800" dirty="0">
+                <a:latin typeface="Calibri" panose="020F0502020204030204" pitchFamily="34" charset="0"/>
+                <a:ea typeface="Cambria Math" panose="02040503050406030204" pitchFamily="18" charset="0"/>
+                <a:cs typeface="Calibri" panose="020F0502020204030204" pitchFamily="34" charset="0"/>
+              </a:rPr>
+              <a:t> </a:t>
+            </a:r>
+            <a:r>
+              <a:rPr lang="de-DE" sz="1800" dirty="0" err="1">
+                <a:latin typeface="Calibri" panose="020F0502020204030204" pitchFamily="34" charset="0"/>
+                <a:ea typeface="Cambria Math" panose="02040503050406030204" pitchFamily="18" charset="0"/>
+                <a:cs typeface="Calibri" panose="020F0502020204030204" pitchFamily="34" charset="0"/>
+              </a:rPr>
+              <a:t>example</a:t>
+            </a:r>
+            <a:endParaRPr lang="en-US" sz="1800" dirty="0">
               <a:latin typeface="Calibri" panose="020F0502020204030204" pitchFamily="34" charset="0"/>
               <a:ea typeface="Cambria Math" panose="02040503050406030204" pitchFamily="18" charset="0"/>
               <a:cs typeface="Calibri" panose="020F0502020204030204" pitchFamily="34" charset="0"/>
@@ -19925,7 +17909,7 @@
         <p:spPr>
           <a:xfrm>
             <a:off x="457200" y="1701579"/>
-            <a:ext cx="7533861" cy="2031325"/>
+            <a:ext cx="7533861" cy="3139321"/>
           </a:xfrm>
           <a:prstGeom prst="rect">
             <a:avLst/>
@@ -20062,6 +18046,59 @@
               <a:latin typeface="Calibri" panose="020F0502020204030204" pitchFamily="34" charset="0"/>
               <a:cs typeface="Calibri" panose="020F0502020204030204" pitchFamily="34" charset="0"/>
             </a:endParaRPr>
+          </a:p>
+          <a:p>
+            <a:pPr marL="342900" indent="-342900">
+              <a:buFont typeface="+mj-lt"/>
+              <a:buAutoNum type="arabicPeriod"/>
+            </a:pPr>
+            <a:endParaRPr lang="en-US" sz="1800" dirty="0">
+              <a:latin typeface="Calibri" panose="020F0502020204030204" pitchFamily="34" charset="0"/>
+              <a:cs typeface="Calibri" panose="020F0502020204030204" pitchFamily="34" charset="0"/>
+            </a:endParaRPr>
+          </a:p>
+          <a:p>
+            <a:pPr marL="342900" indent="-342900">
+              <a:buFont typeface="+mj-lt"/>
+              <a:buAutoNum type="arabicPeriod"/>
+            </a:pPr>
+            <a:endParaRPr lang="en-US" sz="1800" dirty="0">
+              <a:latin typeface="Calibri" panose="020F0502020204030204" pitchFamily="34" charset="0"/>
+              <a:cs typeface="Calibri" panose="020F0502020204030204" pitchFamily="34" charset="0"/>
+            </a:endParaRPr>
+          </a:p>
+          <a:p>
+            <a:pPr marL="342900" indent="-342900">
+              <a:buFont typeface="+mj-lt"/>
+              <a:buAutoNum type="arabicPeriod"/>
+            </a:pPr>
+            <a:endParaRPr lang="en-US" sz="1800" dirty="0">
+              <a:latin typeface="Calibri" panose="020F0502020204030204" pitchFamily="34" charset="0"/>
+              <a:cs typeface="Calibri" panose="020F0502020204030204" pitchFamily="34" charset="0"/>
+            </a:endParaRPr>
+          </a:p>
+          <a:p>
+            <a:r>
+              <a:rPr lang="en-US" sz="1800" dirty="0">
+                <a:latin typeface="Calibri" panose="020F0502020204030204" pitchFamily="34" charset="0"/>
+                <a:cs typeface="Calibri" panose="020F0502020204030204" pitchFamily="34" charset="0"/>
+              </a:rPr>
+              <a:t>Please consult this week’s </a:t>
+            </a:r>
+            <a:r>
+              <a:rPr lang="en-US" sz="1800" dirty="0" err="1">
+                <a:latin typeface="Calibri" panose="020F0502020204030204" pitchFamily="34" charset="0"/>
+                <a:cs typeface="Calibri" panose="020F0502020204030204" pitchFamily="34" charset="0"/>
+              </a:rPr>
+              <a:t>Jupyter</a:t>
+            </a:r>
+            <a:r>
+              <a:rPr lang="en-US" sz="1800" dirty="0">
+                <a:latin typeface="Calibri" panose="020F0502020204030204" pitchFamily="34" charset="0"/>
+                <a:cs typeface="Calibri" panose="020F0502020204030204" pitchFamily="34" charset="0"/>
+              </a:rPr>
+              <a:t> Notebook for further examples!</a:t>
+            </a:r>
           </a:p>
         </p:txBody>
       </p:sp>
@@ -24187,44 +22224,10 @@
             </a:endParaRPr>
           </a:p>
           <a:p>
-            <a:pPr marL="285750" indent="-285750">
+            <a:pPr marL="0" indent="0">
               <a:spcBef>
                 <a:spcPts val="640"/>
               </a:spcBef>
-              <a:buFont typeface="Wingdings" panose="05000000000000000000" pitchFamily="2" charset="2"/>
-              <a:buChar char="v"/>
-            </a:pPr>
-            <a:r>
-              <a:rPr lang="de-DE" sz="1800" dirty="0">
-                <a:latin typeface="Calibri" panose="020F0502020204030204" pitchFamily="34" charset="0"/>
-                <a:ea typeface="Calibri" panose="020F0502020204030204" pitchFamily="34" charset="0"/>
-                <a:cs typeface="Calibri" panose="020F0502020204030204" pitchFamily="34" charset="0"/>
-                <a:hlinkClick r:id="rId3"/>
-              </a:rPr>
-              <a:t>Notebook </a:t>
-            </a:r>
-            <a:r>
-              <a:rPr lang="de-DE" sz="1800" dirty="0" err="1">
-                <a:latin typeface="Calibri" panose="020F0502020204030204" pitchFamily="34" charset="0"/>
-                <a:ea typeface="Calibri" panose="020F0502020204030204" pitchFamily="34" charset="0"/>
-                <a:cs typeface="Calibri" panose="020F0502020204030204" pitchFamily="34" charset="0"/>
-                <a:hlinkClick r:id="rId3"/>
-              </a:rPr>
-              <a:t>examples</a:t>
-            </a:r>
-            <a:endParaRPr lang="de-DE" sz="1800" dirty="0">
-              <a:latin typeface="Calibri" panose="020F0502020204030204" pitchFamily="34" charset="0"/>
-              <a:ea typeface="Calibri" panose="020F0502020204030204" pitchFamily="34" charset="0"/>
-              <a:cs typeface="Calibri" panose="020F0502020204030204" pitchFamily="34" charset="0"/>
-            </a:endParaRPr>
-          </a:p>
-          <a:p>
-            <a:pPr marL="285750" indent="-285750">
-              <a:spcBef>
-                <a:spcPts val="640"/>
-              </a:spcBef>
-              <a:buFont typeface="Wingdings" panose="05000000000000000000" pitchFamily="2" charset="2"/>
-              <a:buChar char="v"/>
             </a:pPr>
             <a:endParaRPr lang="de-DE" sz="1800" dirty="0">
               <a:highlight>
@@ -24508,6 +22511,13 @@
           </a:effectRef>
           <a:fontRef idx="minor"/>
         </p:style>
+        <p:txBody>
+          <a:bodyPr/>
+          <a:lstStyle/>
+          <a:p>
+            <a:endParaRPr lang="en-AT"/>
+          </a:p>
+        </p:txBody>
       </p:sp>
       <p:sp>
         <p:nvSpPr>
@@ -24549,6 +22559,13 @@
           </a:effectRef>
           <a:fontRef idx="minor"/>
         </p:style>
+        <p:txBody>
+          <a:bodyPr/>
+          <a:lstStyle/>
+          <a:p>
+            <a:endParaRPr lang="en-AT"/>
+          </a:p>
+        </p:txBody>
       </p:sp>
       <p:sp>
         <p:nvSpPr>
@@ -24592,6 +22609,13 @@
           </a:effectRef>
           <a:fontRef idx="minor"/>
         </p:style>
+        <p:txBody>
+          <a:bodyPr/>
+          <a:lstStyle/>
+          <a:p>
+            <a:endParaRPr lang="en-AT"/>
+          </a:p>
+        </p:txBody>
       </p:sp>
       <p:sp>
         <p:nvSpPr>
@@ -24700,6 +22724,13 @@
           </a:effectRef>
           <a:fontRef idx="minor"/>
         </p:style>
+        <p:txBody>
+          <a:bodyPr/>
+          <a:lstStyle/>
+          <a:p>
+            <a:endParaRPr lang="en-AT"/>
+          </a:p>
+        </p:txBody>
       </p:sp>
       <p:sp>
         <p:nvSpPr>
@@ -24743,6 +22774,13 @@
             <a:tailEnd type="triangle" w="med" len="med"/>
           </a:ln>
         </p:spPr>
+        <p:txBody>
+          <a:bodyPr/>
+          <a:lstStyle/>
+          <a:p>
+            <a:endParaRPr lang="en-AT"/>
+          </a:p>
+        </p:txBody>
       </p:sp>
       <p:sp>
         <p:nvSpPr>
@@ -24784,6 +22822,13 @@
           </a:effectRef>
           <a:fontRef idx="minor"/>
         </p:style>
+        <p:txBody>
+          <a:bodyPr/>
+          <a:lstStyle/>
+          <a:p>
+            <a:endParaRPr lang="en-AT"/>
+          </a:p>
+        </p:txBody>
       </p:sp>
       <p:sp>
         <p:nvSpPr>
@@ -24825,6 +22870,13 @@
           </a:effectRef>
           <a:fontRef idx="minor"/>
         </p:style>
+        <p:txBody>
+          <a:bodyPr/>
+          <a:lstStyle/>
+          <a:p>
+            <a:endParaRPr lang="en-AT"/>
+          </a:p>
+        </p:txBody>
       </p:sp>
       <p:sp>
         <p:nvSpPr>
@@ -24922,6 +22974,13 @@
           </a:effectRef>
           <a:fontRef idx="minor"/>
         </p:style>
+        <p:txBody>
+          <a:bodyPr/>
+          <a:lstStyle/>
+          <a:p>
+            <a:endParaRPr lang="en-AT"/>
+          </a:p>
+        </p:txBody>
       </p:sp>
       <p:sp>
         <p:nvSpPr>
@@ -24963,6 +23022,13 @@
           </a:effectRef>
           <a:fontRef idx="minor"/>
         </p:style>
+        <p:txBody>
+          <a:bodyPr/>
+          <a:lstStyle/>
+          <a:p>
+            <a:endParaRPr lang="en-AT"/>
+          </a:p>
+        </p:txBody>
       </p:sp>
       <p:sp>
         <p:nvSpPr>
@@ -25004,6 +23070,13 @@
           </a:effectRef>
           <a:fontRef idx="minor"/>
         </p:style>
+        <p:txBody>
+          <a:bodyPr/>
+          <a:lstStyle/>
+          <a:p>
+            <a:endParaRPr lang="en-AT"/>
+          </a:p>
+        </p:txBody>
       </p:sp>
       <p:sp>
         <p:nvSpPr>
@@ -25195,6 +23268,13 @@
             </a:effectRef>
             <a:fontRef idx="minor"/>
           </p:style>
+          <p:txBody>
+            <a:bodyPr/>
+            <a:lstStyle/>
+            <a:p>
+              <a:endParaRPr lang="en-AT"/>
+            </a:p>
+          </p:txBody>
         </p:sp>
         <p:sp>
           <p:nvSpPr>
@@ -25235,6 +23315,13 @@
             </a:effectRef>
             <a:fontRef idx="minor"/>
           </p:style>
+          <p:txBody>
+            <a:bodyPr/>
+            <a:lstStyle/>
+            <a:p>
+              <a:endParaRPr lang="en-AT"/>
+            </a:p>
+          </p:txBody>
         </p:sp>
         <p:sp>
           <p:nvSpPr>
@@ -25275,6 +23362,13 @@
             </a:effectRef>
             <a:fontRef idx="minor"/>
           </p:style>
+          <p:txBody>
+            <a:bodyPr/>
+            <a:lstStyle/>
+            <a:p>
+              <a:endParaRPr lang="en-AT"/>
+            </a:p>
+          </p:txBody>
         </p:sp>
       </p:grpSp>
     </p:spTree>
@@ -26290,6 +24384,13 @@
           </a:effectRef>
           <a:fontRef idx="minor"/>
         </p:style>
+        <p:txBody>
+          <a:bodyPr/>
+          <a:lstStyle/>
+          <a:p>
+            <a:endParaRPr lang="en-AT"/>
+          </a:p>
+        </p:txBody>
       </p:sp>
       <p:sp>
         <p:nvSpPr>
@@ -26331,6 +24432,13 @@
           </a:effectRef>
           <a:fontRef idx="minor"/>
         </p:style>
+        <p:txBody>
+          <a:bodyPr/>
+          <a:lstStyle/>
+          <a:p>
+            <a:endParaRPr lang="en-AT"/>
+          </a:p>
+        </p:txBody>
       </p:sp>
       <p:sp>
         <p:nvSpPr>
@@ -26372,6 +24480,13 @@
           </a:effectRef>
           <a:fontRef idx="minor"/>
         </p:style>
+        <p:txBody>
+          <a:bodyPr/>
+          <a:lstStyle/>
+          <a:p>
+            <a:endParaRPr lang="en-AT"/>
+          </a:p>
+        </p:txBody>
       </p:sp>
       <p:sp>
         <p:nvSpPr>
@@ -26413,6 +24528,13 @@
           </a:effectRef>
           <a:fontRef idx="minor"/>
         </p:style>
+        <p:txBody>
+          <a:bodyPr/>
+          <a:lstStyle/>
+          <a:p>
+            <a:endParaRPr lang="en-AT"/>
+          </a:p>
+        </p:txBody>
       </p:sp>
       <p:sp>
         <p:nvSpPr>
@@ -26454,6 +24576,13 @@
           </a:effectRef>
           <a:fontRef idx="minor"/>
         </p:style>
+        <p:txBody>
+          <a:bodyPr/>
+          <a:lstStyle/>
+          <a:p>
+            <a:endParaRPr lang="en-AT"/>
+          </a:p>
+        </p:txBody>
       </p:sp>
       <p:sp>
         <p:nvSpPr>
@@ -26495,6 +24624,13 @@
           </a:effectRef>
           <a:fontRef idx="minor"/>
         </p:style>
+        <p:txBody>
+          <a:bodyPr/>
+          <a:lstStyle/>
+          <a:p>
+            <a:endParaRPr lang="en-AT"/>
+          </a:p>
+        </p:txBody>
       </p:sp>
       <p:sp>
         <p:nvSpPr>
@@ -26536,6 +24672,13 @@
           </a:effectRef>
           <a:fontRef idx="minor"/>
         </p:style>
+        <p:txBody>
+          <a:bodyPr/>
+          <a:lstStyle/>
+          <a:p>
+            <a:endParaRPr lang="en-AT"/>
+          </a:p>
+        </p:txBody>
       </p:sp>
       <p:sp>
         <p:nvSpPr>
@@ -26642,6 +24785,13 @@
             <a:tailEnd type="triangle" w="med" len="med"/>
           </a:ln>
         </p:spPr>
+        <p:txBody>
+          <a:bodyPr/>
+          <a:lstStyle/>
+          <a:p>
+            <a:endParaRPr lang="en-AT"/>
+          </a:p>
+        </p:txBody>
       </p:sp>
     </p:spTree>
     <p:extLst>
@@ -26798,6 +24948,13 @@
           </a:effectRef>
           <a:fontRef idx="minor"/>
         </p:style>
+        <p:txBody>
+          <a:bodyPr/>
+          <a:lstStyle/>
+          <a:p>
+            <a:endParaRPr lang="en-AT"/>
+          </a:p>
+        </p:txBody>
       </p:sp>
       <p:sp>
         <p:nvSpPr>
@@ -26839,6 +24996,13 @@
           </a:effectRef>
           <a:fontRef idx="minor"/>
         </p:style>
+        <p:txBody>
+          <a:bodyPr/>
+          <a:lstStyle/>
+          <a:p>
+            <a:endParaRPr lang="en-AT"/>
+          </a:p>
+        </p:txBody>
       </p:sp>
       <p:sp>
         <p:nvSpPr>
@@ -26880,6 +25044,13 @@
           </a:effectRef>
           <a:fontRef idx="minor"/>
         </p:style>
+        <p:txBody>
+          <a:bodyPr/>
+          <a:lstStyle/>
+          <a:p>
+            <a:endParaRPr lang="en-AT"/>
+          </a:p>
+        </p:txBody>
       </p:sp>
       <p:sp>
         <p:nvSpPr>
@@ -26921,6 +25092,13 @@
           </a:effectRef>
           <a:fontRef idx="minor"/>
         </p:style>
+        <p:txBody>
+          <a:bodyPr/>
+          <a:lstStyle/>
+          <a:p>
+            <a:endParaRPr lang="en-AT"/>
+          </a:p>
+        </p:txBody>
       </p:sp>
       <p:sp>
         <p:nvSpPr>
@@ -26962,6 +25140,13 @@
           </a:effectRef>
           <a:fontRef idx="minor"/>
         </p:style>
+        <p:txBody>
+          <a:bodyPr/>
+          <a:lstStyle/>
+          <a:p>
+            <a:endParaRPr lang="en-AT"/>
+          </a:p>
+        </p:txBody>
       </p:sp>
       <p:sp>
         <p:nvSpPr>
@@ -27003,6 +25188,13 @@
           </a:effectRef>
           <a:fontRef idx="minor"/>
         </p:style>
+        <p:txBody>
+          <a:bodyPr/>
+          <a:lstStyle/>
+          <a:p>
+            <a:endParaRPr lang="en-AT"/>
+          </a:p>
+        </p:txBody>
       </p:sp>
       <p:sp>
         <p:nvSpPr>
@@ -27044,6 +25236,13 @@
           </a:effectRef>
           <a:fontRef idx="minor"/>
         </p:style>
+        <p:txBody>
+          <a:bodyPr/>
+          <a:lstStyle/>
+          <a:p>
+            <a:endParaRPr lang="en-AT"/>
+          </a:p>
+        </p:txBody>
       </p:sp>
       <p:sp>
         <p:nvSpPr>
@@ -27150,6 +25349,13 @@
             <a:tailEnd type="triangle" w="med" len="med"/>
           </a:ln>
         </p:spPr>
+        <p:txBody>
+          <a:bodyPr/>
+          <a:lstStyle/>
+          <a:p>
+            <a:endParaRPr lang="en-AT"/>
+          </a:p>
+        </p:txBody>
       </p:sp>
     </p:spTree>
     <p:extLst>
@@ -28237,16 +26443,40 @@
                 <a:cs typeface="Calibri" panose="020F0502020204030204" pitchFamily="34" charset="0"/>
                 <a:hlinkClick r:id="rId3"/>
               </a:rPr>
-              <a:t>Notebook </a:t>
+              <a:t>Python Tutor Example 1</a:t>
+            </a:r>
+            <a:r>
+              <a:rPr lang="de-DE" sz="1800" dirty="0">
+                <a:latin typeface="Calibri" panose="020F0502020204030204" pitchFamily="34" charset="0"/>
+                <a:ea typeface="Calibri" panose="020F0502020204030204" pitchFamily="34" charset="0"/>
+                <a:cs typeface="Calibri" panose="020F0502020204030204" pitchFamily="34" charset="0"/>
+              </a:rPr>
+              <a:t>, </a:t>
+            </a:r>
+            <a:r>
+              <a:rPr lang="de-DE" sz="1800" dirty="0">
+                <a:latin typeface="Calibri" panose="020F0502020204030204" pitchFamily="34" charset="0"/>
+                <a:ea typeface="Calibri" panose="020F0502020204030204" pitchFamily="34" charset="0"/>
+                <a:cs typeface="Calibri" panose="020F0502020204030204" pitchFamily="34" charset="0"/>
+                <a:hlinkClick r:id="rId4"/>
+              </a:rPr>
+              <a:t>Python Tutor Example 2</a:t>
+            </a:r>
+            <a:r>
+              <a:rPr lang="de-DE" sz="1800" dirty="0">
+                <a:latin typeface="Calibri" panose="020F0502020204030204" pitchFamily="34" charset="0"/>
+                <a:ea typeface="Calibri" panose="020F0502020204030204" pitchFamily="34" charset="0"/>
+                <a:cs typeface="Calibri" panose="020F0502020204030204" pitchFamily="34" charset="0"/>
+              </a:rPr>
+              <a:t>, </a:t>
             </a:r>
             <a:r>
               <a:rPr lang="de-DE" sz="1800" dirty="0" err="1">
                 <a:latin typeface="Calibri" panose="020F0502020204030204" pitchFamily="34" charset="0"/>
                 <a:ea typeface="Calibri" panose="020F0502020204030204" pitchFamily="34" charset="0"/>
                 <a:cs typeface="Calibri" panose="020F0502020204030204" pitchFamily="34" charset="0"/>
-                <a:hlinkClick r:id="rId3"/>
-              </a:rPr>
-              <a:t>examples</a:t>
+              </a:rPr>
+              <a:t>see</a:t>
             </a:r>
             <a:r>
               <a:rPr lang="de-DE" sz="1800" dirty="0">
@@ -28254,69 +26484,15 @@
                 <a:ea typeface="Calibri" panose="020F0502020204030204" pitchFamily="34" charset="0"/>
                 <a:cs typeface="Calibri" panose="020F0502020204030204" pitchFamily="34" charset="0"/>
               </a:rPr>
-              <a:t>, </a:t>
-            </a:r>
-            <a:r>
-              <a:rPr lang="de-DE" sz="1800" dirty="0">
-                <a:latin typeface="Calibri" panose="020F0502020204030204" pitchFamily="34" charset="0"/>
-                <a:ea typeface="Calibri" panose="020F0502020204030204" pitchFamily="34" charset="0"/>
-                <a:cs typeface="Calibri" panose="020F0502020204030204" pitchFamily="34" charset="0"/>
-                <a:hlinkClick r:id="rId4"/>
-              </a:rPr>
-              <a:t>Python Tutor </a:t>
+              <a:t> also </a:t>
             </a:r>
             <a:r>
               <a:rPr lang="de-DE" sz="1800" dirty="0" err="1">
                 <a:latin typeface="Calibri" panose="020F0502020204030204" pitchFamily="34" charset="0"/>
                 <a:ea typeface="Calibri" panose="020F0502020204030204" pitchFamily="34" charset="0"/>
                 <a:cs typeface="Calibri" panose="020F0502020204030204" pitchFamily="34" charset="0"/>
-                <a:hlinkClick r:id="rId4"/>
-              </a:rPr>
-              <a:t>Example</a:t>
-            </a:r>
-            <a:r>
-              <a:rPr lang="de-DE" sz="1800" dirty="0">
-                <a:latin typeface="Calibri" panose="020F0502020204030204" pitchFamily="34" charset="0"/>
-                <a:ea typeface="Calibri" panose="020F0502020204030204" pitchFamily="34" charset="0"/>
-                <a:cs typeface="Calibri" panose="020F0502020204030204" pitchFamily="34" charset="0"/>
-                <a:hlinkClick r:id="rId4"/>
-              </a:rPr>
-              <a:t> 1</a:t>
-            </a:r>
-            <a:r>
-              <a:rPr lang="de-DE" sz="1800" dirty="0">
-                <a:latin typeface="Calibri" panose="020F0502020204030204" pitchFamily="34" charset="0"/>
-                <a:ea typeface="Calibri" panose="020F0502020204030204" pitchFamily="34" charset="0"/>
-                <a:cs typeface="Calibri" panose="020F0502020204030204" pitchFamily="34" charset="0"/>
-              </a:rPr>
-              <a:t>, </a:t>
-            </a:r>
-            <a:r>
-              <a:rPr lang="de-DE" sz="1800" dirty="0">
-                <a:latin typeface="Calibri" panose="020F0502020204030204" pitchFamily="34" charset="0"/>
-                <a:ea typeface="Calibri" panose="020F0502020204030204" pitchFamily="34" charset="0"/>
-                <a:cs typeface="Calibri" panose="020F0502020204030204" pitchFamily="34" charset="0"/>
-                <a:hlinkClick r:id="rId5"/>
-              </a:rPr>
-              <a:t>Python Tutor </a:t>
-            </a:r>
-            <a:r>
-              <a:rPr lang="de-DE" sz="1800" dirty="0" err="1">
-                <a:latin typeface="Calibri" panose="020F0502020204030204" pitchFamily="34" charset="0"/>
-                <a:ea typeface="Calibri" panose="020F0502020204030204" pitchFamily="34" charset="0"/>
-                <a:cs typeface="Calibri" panose="020F0502020204030204" pitchFamily="34" charset="0"/>
-                <a:hlinkClick r:id="rId5"/>
-              </a:rPr>
-              <a:t>Example</a:t>
-            </a:r>
-            <a:r>
-              <a:rPr lang="de-DE" sz="1800" dirty="0">
-                <a:latin typeface="Calibri" panose="020F0502020204030204" pitchFamily="34" charset="0"/>
-                <a:ea typeface="Calibri" panose="020F0502020204030204" pitchFamily="34" charset="0"/>
-                <a:cs typeface="Calibri" panose="020F0502020204030204" pitchFamily="34" charset="0"/>
-                <a:hlinkClick r:id="rId5"/>
-              </a:rPr>
-              <a:t> 2</a:t>
+              </a:rPr>
+              <a:t>notebook</a:t>
             </a:r>
             <a:endParaRPr lang="de-DE" sz="1800" dirty="0">
               <a:latin typeface="Calibri" panose="020F0502020204030204" pitchFamily="34" charset="0"/>
@@ -31719,6 +29895,13 @@
           </a:effectRef>
           <a:fontRef idx="minor"/>
         </p:style>
+        <p:txBody>
+          <a:bodyPr/>
+          <a:lstStyle/>
+          <a:p>
+            <a:endParaRPr lang="en-AT"/>
+          </a:p>
+        </p:txBody>
       </p:sp>
       <p:sp>
         <p:nvSpPr>
@@ -31764,6 +29947,13 @@
           </a:effectRef>
           <a:fontRef idx="minor"/>
         </p:style>
+        <p:txBody>
+          <a:bodyPr/>
+          <a:lstStyle/>
+          <a:p>
+            <a:endParaRPr lang="en-AT"/>
+          </a:p>
+        </p:txBody>
       </p:sp>
     </p:spTree>
     <p:extLst>
@@ -33774,6 +31964,13 @@
           </a:effectRef>
           <a:fontRef idx="minor"/>
         </p:style>
+        <p:txBody>
+          <a:bodyPr/>
+          <a:lstStyle/>
+          <a:p>
+            <a:endParaRPr lang="en-AT"/>
+          </a:p>
+        </p:txBody>
       </p:sp>
       <p:sp>
         <p:nvSpPr>
@@ -33819,6 +32016,13 @@
           </a:effectRef>
           <a:fontRef idx="minor"/>
         </p:style>
+        <p:txBody>
+          <a:bodyPr/>
+          <a:lstStyle/>
+          <a:p>
+            <a:endParaRPr lang="en-AT"/>
+          </a:p>
+        </p:txBody>
       </p:sp>
       <p:grpSp>
         <p:nvGrpSpPr>
@@ -33880,6 +32084,13 @@
             </a:effectRef>
             <a:fontRef idx="minor"/>
           </p:style>
+          <p:txBody>
+            <a:bodyPr/>
+            <a:lstStyle/>
+            <a:p>
+              <a:endParaRPr lang="en-AT"/>
+            </a:p>
+          </p:txBody>
         </p:sp>
         <p:sp>
           <p:nvSpPr>
@@ -33920,6 +32131,13 @@
             </a:effectRef>
             <a:fontRef idx="minor"/>
           </p:style>
+          <p:txBody>
+            <a:bodyPr/>
+            <a:lstStyle/>
+            <a:p>
+              <a:endParaRPr lang="en-AT"/>
+            </a:p>
+          </p:txBody>
         </p:sp>
         <p:sp>
           <p:nvSpPr>
@@ -33960,6 +32178,13 @@
             </a:effectRef>
             <a:fontRef idx="minor"/>
           </p:style>
+          <p:txBody>
+            <a:bodyPr/>
+            <a:lstStyle/>
+            <a:p>
+              <a:endParaRPr lang="en-AT"/>
+            </a:p>
+          </p:txBody>
         </p:sp>
       </p:grpSp>
       <p:grpSp>
@@ -34022,6 +32247,13 @@
             </a:effectRef>
             <a:fontRef idx="minor"/>
           </p:style>
+          <p:txBody>
+            <a:bodyPr/>
+            <a:lstStyle/>
+            <a:p>
+              <a:endParaRPr lang="en-AT"/>
+            </a:p>
+          </p:txBody>
         </p:sp>
         <p:sp>
           <p:nvSpPr>
@@ -34062,6 +32294,13 @@
             </a:effectRef>
             <a:fontRef idx="minor"/>
           </p:style>
+          <p:txBody>
+            <a:bodyPr/>
+            <a:lstStyle/>
+            <a:p>
+              <a:endParaRPr lang="en-AT"/>
+            </a:p>
+          </p:txBody>
         </p:sp>
         <p:sp>
           <p:nvSpPr>
@@ -34102,6 +32341,13 @@
             </a:effectRef>
             <a:fontRef idx="minor"/>
           </p:style>
+          <p:txBody>
+            <a:bodyPr/>
+            <a:lstStyle/>
+            <a:p>
+              <a:endParaRPr lang="en-AT"/>
+            </a:p>
+          </p:txBody>
         </p:sp>
       </p:grpSp>
       <p:sp>
@@ -35693,6 +33939,13 @@
           </a:effectRef>
           <a:fontRef idx="minor"/>
         </p:style>
+        <p:txBody>
+          <a:bodyPr/>
+          <a:lstStyle/>
+          <a:p>
+            <a:endParaRPr lang="en-AT"/>
+          </a:p>
+        </p:txBody>
       </p:sp>
       <p:sp>
         <p:nvSpPr>
@@ -35738,6 +33991,13 @@
           </a:effectRef>
           <a:fontRef idx="minor"/>
         </p:style>
+        <p:txBody>
+          <a:bodyPr/>
+          <a:lstStyle/>
+          <a:p>
+            <a:endParaRPr lang="en-AT"/>
+          </a:p>
+        </p:txBody>
       </p:sp>
       <p:sp>
         <p:nvSpPr>
@@ -35786,18 +34046,100 @@
                 <a:latin typeface="Calibri" panose="020F0502020204030204" pitchFamily="34" charset="0"/>
                 <a:ea typeface="Calibri" panose="020F0502020204030204" pitchFamily="34" charset="0"/>
                 <a:cs typeface="Calibri" panose="020F0502020204030204" pitchFamily="34" charset="0"/>
+              </a:rPr>
+              <a:t>Python Tutor </a:t>
+            </a:r>
+            <a:r>
+              <a:rPr lang="de-DE" sz="1800" dirty="0" err="1">
+                <a:latin typeface="Calibri" panose="020F0502020204030204" pitchFamily="34" charset="0"/>
+                <a:ea typeface="Calibri" panose="020F0502020204030204" pitchFamily="34" charset="0"/>
+                <a:cs typeface="Calibri" panose="020F0502020204030204" pitchFamily="34" charset="0"/>
+              </a:rPr>
+              <a:t>Examples</a:t>
+            </a:r>
+            <a:r>
+              <a:rPr lang="de-DE" sz="1800" dirty="0">
+                <a:latin typeface="Calibri" panose="020F0502020204030204" pitchFamily="34" charset="0"/>
+                <a:ea typeface="Calibri" panose="020F0502020204030204" pitchFamily="34" charset="0"/>
+                <a:cs typeface="Calibri" panose="020F0502020204030204" pitchFamily="34" charset="0"/>
+              </a:rPr>
+              <a:t>: </a:t>
+            </a:r>
+            <a:r>
+              <a:rPr lang="de-DE" sz="1800" dirty="0">
+                <a:latin typeface="Calibri" panose="020F0502020204030204" pitchFamily="34" charset="0"/>
+                <a:ea typeface="Calibri" panose="020F0502020204030204" pitchFamily="34" charset="0"/>
+                <a:cs typeface="Calibri" panose="020F0502020204030204" pitchFamily="34" charset="0"/>
                 <a:hlinkClick r:id="rId3"/>
               </a:rPr>
-              <a:t>Notebook </a:t>
+              <a:t>3</a:t>
+            </a:r>
+            <a:r>
+              <a:rPr lang="de-DE" sz="1800" dirty="0">
+                <a:latin typeface="Calibri" panose="020F0502020204030204" pitchFamily="34" charset="0"/>
+                <a:ea typeface="Calibri" panose="020F0502020204030204" pitchFamily="34" charset="0"/>
+                <a:cs typeface="Calibri" panose="020F0502020204030204" pitchFamily="34" charset="0"/>
+              </a:rPr>
+              <a:t>, </a:t>
+            </a:r>
+            <a:r>
+              <a:rPr lang="de-DE" sz="1800" dirty="0">
+                <a:latin typeface="Calibri" panose="020F0502020204030204" pitchFamily="34" charset="0"/>
+                <a:ea typeface="Calibri" panose="020F0502020204030204" pitchFamily="34" charset="0"/>
+                <a:cs typeface="Calibri" panose="020F0502020204030204" pitchFamily="34" charset="0"/>
+                <a:hlinkClick r:id="rId4"/>
+              </a:rPr>
+              <a:t>4</a:t>
+            </a:r>
+            <a:r>
+              <a:rPr lang="de-DE" sz="1800" dirty="0">
+                <a:latin typeface="Calibri" panose="020F0502020204030204" pitchFamily="34" charset="0"/>
+                <a:ea typeface="Calibri" panose="020F0502020204030204" pitchFamily="34" charset="0"/>
+                <a:cs typeface="Calibri" panose="020F0502020204030204" pitchFamily="34" charset="0"/>
+              </a:rPr>
+              <a:t>, </a:t>
+            </a:r>
+            <a:r>
+              <a:rPr lang="de-DE" sz="1800" dirty="0">
+                <a:latin typeface="Calibri" panose="020F0502020204030204" pitchFamily="34" charset="0"/>
+                <a:ea typeface="Calibri" panose="020F0502020204030204" pitchFamily="34" charset="0"/>
+                <a:cs typeface="Calibri" panose="020F0502020204030204" pitchFamily="34" charset="0"/>
+                <a:hlinkClick r:id="rId5"/>
+              </a:rPr>
+              <a:t>5</a:t>
+            </a:r>
+            <a:r>
+              <a:rPr lang="de-DE" sz="1800" dirty="0">
+                <a:latin typeface="Calibri" panose="020F0502020204030204" pitchFamily="34" charset="0"/>
+                <a:ea typeface="Calibri" panose="020F0502020204030204" pitchFamily="34" charset="0"/>
+                <a:cs typeface="Calibri" panose="020F0502020204030204" pitchFamily="34" charset="0"/>
+              </a:rPr>
+              <a:t>, </a:t>
+            </a:r>
+            <a:r>
+              <a:rPr lang="de-DE" sz="1800" dirty="0">
+                <a:latin typeface="Calibri" panose="020F0502020204030204" pitchFamily="34" charset="0"/>
+                <a:ea typeface="Calibri" panose="020F0502020204030204" pitchFamily="34" charset="0"/>
+                <a:cs typeface="Calibri" panose="020F0502020204030204" pitchFamily="34" charset="0"/>
+                <a:hlinkClick r:id="rId6"/>
+              </a:rPr>
+              <a:t>6</a:t>
+            </a:r>
+            <a:r>
+              <a:rPr lang="de-DE" sz="1800" dirty="0">
+                <a:latin typeface="Calibri" panose="020F0502020204030204" pitchFamily="34" charset="0"/>
+                <a:ea typeface="Calibri" panose="020F0502020204030204" pitchFamily="34" charset="0"/>
+                <a:cs typeface="Calibri" panose="020F0502020204030204" pitchFamily="34" charset="0"/>
+              </a:rPr>
+              <a:t>. Also </a:t>
             </a:r>
             <a:r>
               <a:rPr lang="de-DE" sz="1800" dirty="0" err="1">
                 <a:latin typeface="Calibri" panose="020F0502020204030204" pitchFamily="34" charset="0"/>
                 <a:ea typeface="Calibri" panose="020F0502020204030204" pitchFamily="34" charset="0"/>
                 <a:cs typeface="Calibri" panose="020F0502020204030204" pitchFamily="34" charset="0"/>
-                <a:hlinkClick r:id="rId3"/>
-              </a:rPr>
-              <a:t>examples</a:t>
+              </a:rPr>
+              <a:t>see</a:t>
             </a:r>
             <a:r>
               <a:rPr lang="de-DE" sz="1800" dirty="0">
@@ -35805,7 +34147,7 @@
                 <a:ea typeface="Calibri" panose="020F0502020204030204" pitchFamily="34" charset="0"/>
                 <a:cs typeface="Calibri" panose="020F0502020204030204" pitchFamily="34" charset="0"/>
               </a:rPr>
-              <a:t>, Python Tutor </a:t>
+              <a:t> </a:t>
             </a:r>
             <a:r>
               <a:rPr lang="de-DE" sz="1800" dirty="0" err="1">
@@ -35813,7 +34155,7 @@
                 <a:ea typeface="Calibri" panose="020F0502020204030204" pitchFamily="34" charset="0"/>
                 <a:cs typeface="Calibri" panose="020F0502020204030204" pitchFamily="34" charset="0"/>
               </a:rPr>
-              <a:t>Examples</a:t>
+              <a:t>notebook</a:t>
             </a:r>
             <a:r>
               <a:rPr lang="de-DE" sz="1800" dirty="0">
@@ -35821,73 +34163,8 @@
                 <a:ea typeface="Calibri" panose="020F0502020204030204" pitchFamily="34" charset="0"/>
                 <a:cs typeface="Calibri" panose="020F0502020204030204" pitchFamily="34" charset="0"/>
               </a:rPr>
-              <a:t>: </a:t>
-            </a:r>
-            <a:r>
-              <a:rPr lang="de-DE" sz="1800" dirty="0">
-                <a:latin typeface="Calibri" panose="020F0502020204030204" pitchFamily="34" charset="0"/>
-                <a:ea typeface="Calibri" panose="020F0502020204030204" pitchFamily="34" charset="0"/>
-                <a:cs typeface="Calibri" panose="020F0502020204030204" pitchFamily="34" charset="0"/>
-                <a:hlinkClick r:id="rId4"/>
-              </a:rPr>
-              <a:t>3</a:t>
-            </a:r>
-            <a:r>
-              <a:rPr lang="de-DE" sz="1800" dirty="0">
-                <a:latin typeface="Calibri" panose="020F0502020204030204" pitchFamily="34" charset="0"/>
-                <a:ea typeface="Calibri" panose="020F0502020204030204" pitchFamily="34" charset="0"/>
-                <a:cs typeface="Calibri" panose="020F0502020204030204" pitchFamily="34" charset="0"/>
-              </a:rPr>
-              <a:t>, </a:t>
-            </a:r>
-            <a:r>
-              <a:rPr lang="de-DE" sz="1800" dirty="0">
-                <a:latin typeface="Calibri" panose="020F0502020204030204" pitchFamily="34" charset="0"/>
-                <a:ea typeface="Calibri" panose="020F0502020204030204" pitchFamily="34" charset="0"/>
-                <a:cs typeface="Calibri" panose="020F0502020204030204" pitchFamily="34" charset="0"/>
-                <a:hlinkClick r:id="rId5"/>
-              </a:rPr>
-              <a:t>4</a:t>
-            </a:r>
-            <a:r>
-              <a:rPr lang="de-DE" sz="1800" dirty="0">
-                <a:latin typeface="Calibri" panose="020F0502020204030204" pitchFamily="34" charset="0"/>
-                <a:ea typeface="Calibri" panose="020F0502020204030204" pitchFamily="34" charset="0"/>
-                <a:cs typeface="Calibri" panose="020F0502020204030204" pitchFamily="34" charset="0"/>
-              </a:rPr>
-              <a:t>, </a:t>
-            </a:r>
-            <a:r>
-              <a:rPr lang="de-DE" sz="1800" dirty="0">
-                <a:latin typeface="Calibri" panose="020F0502020204030204" pitchFamily="34" charset="0"/>
-                <a:ea typeface="Calibri" panose="020F0502020204030204" pitchFamily="34" charset="0"/>
-                <a:cs typeface="Calibri" panose="020F0502020204030204" pitchFamily="34" charset="0"/>
-                <a:hlinkClick r:id="rId6"/>
-              </a:rPr>
-              <a:t>5</a:t>
-            </a:r>
-            <a:r>
-              <a:rPr lang="de-DE" sz="1800" dirty="0">
-                <a:latin typeface="Calibri" panose="020F0502020204030204" pitchFamily="34" charset="0"/>
-                <a:ea typeface="Calibri" panose="020F0502020204030204" pitchFamily="34" charset="0"/>
-                <a:cs typeface="Calibri" panose="020F0502020204030204" pitchFamily="34" charset="0"/>
-              </a:rPr>
-              <a:t>, </a:t>
-            </a:r>
-            <a:r>
-              <a:rPr lang="de-DE" sz="1800" dirty="0">
-                <a:latin typeface="Calibri" panose="020F0502020204030204" pitchFamily="34" charset="0"/>
-                <a:ea typeface="Calibri" panose="020F0502020204030204" pitchFamily="34" charset="0"/>
-                <a:cs typeface="Calibri" panose="020F0502020204030204" pitchFamily="34" charset="0"/>
-                <a:hlinkClick r:id="rId7"/>
-              </a:rPr>
-              <a:t>6</a:t>
-            </a:r>
-            <a:endParaRPr lang="de-DE" sz="1800" dirty="0">
-              <a:latin typeface="Calibri" panose="020F0502020204030204" pitchFamily="34" charset="0"/>
-              <a:ea typeface="Calibri" panose="020F0502020204030204" pitchFamily="34" charset="0"/>
-              <a:cs typeface="Calibri" panose="020F0502020204030204" pitchFamily="34" charset="0"/>
-            </a:endParaRPr>
+              <a:t>.</a:t>
+            </a:r>
           </a:p>
         </p:txBody>
       </p:sp>
@@ -39018,7 +37295,7 @@
               <a:t> </a:t>
             </a:r>
             <a:r>
-              <a:rPr lang="de-DE" sz="1800" dirty="0" err="1">
+              <a:rPr lang="de-DE" sz="1800" b="1" dirty="0" err="1">
                 <a:latin typeface="Calibri" panose="020F0502020204030204" pitchFamily="34" charset="0"/>
                 <a:ea typeface="Cambria Math" panose="02040503050406030204" pitchFamily="18" charset="0"/>
                 <a:cs typeface="Calibri" panose="020F0502020204030204" pitchFamily="34" charset="0"/>
@@ -39026,7 +37303,7 @@
               <a:t>list</a:t>
             </a:r>
             <a:r>
-              <a:rPr lang="de-DE" sz="1800" dirty="0">
+              <a:rPr lang="de-DE" sz="1800" b="1" dirty="0">
                 <a:latin typeface="Calibri" panose="020F0502020204030204" pitchFamily="34" charset="0"/>
                 <a:ea typeface="Cambria Math" panose="02040503050406030204" pitchFamily="18" charset="0"/>
                 <a:cs typeface="Calibri" panose="020F0502020204030204" pitchFamily="34" charset="0"/>
@@ -39034,14 +37311,14 @@
               <a:t> </a:t>
             </a:r>
             <a:r>
-              <a:rPr lang="de-DE" sz="1800" dirty="0" err="1">
+              <a:rPr lang="de-DE" sz="1800" b="1" dirty="0" err="1">
                 <a:latin typeface="Calibri" panose="020F0502020204030204" pitchFamily="34" charset="0"/>
                 <a:ea typeface="Cambria Math" panose="02040503050406030204" pitchFamily="18" charset="0"/>
                 <a:cs typeface="Calibri" panose="020F0502020204030204" pitchFamily="34" charset="0"/>
               </a:rPr>
               <a:t>comprehensions</a:t>
             </a:r>
-            <a:endParaRPr lang="de-DE" sz="1800" dirty="0">
+            <a:endParaRPr lang="de-DE" sz="1800" b="1" dirty="0">
               <a:latin typeface="Calibri" panose="020F0502020204030204" pitchFamily="34" charset="0"/>
               <a:ea typeface="Cambria Math" panose="02040503050406030204" pitchFamily="18" charset="0"/>
               <a:cs typeface="Calibri" panose="020F0502020204030204" pitchFamily="34" charset="0"/>
@@ -39073,7 +37350,7 @@
               <a:buChar char="v"/>
             </a:pPr>
             <a:r>
-              <a:rPr lang="en-US" sz="1800" dirty="0" err="1">
+              <a:rPr lang="en-US" sz="1600" b="1" dirty="0" err="1">
                 <a:highlight>
                   <a:srgbClr val="DAE3F3"/>
                 </a:highlight>
@@ -39084,7 +37361,7 @@
               <a:t>resulting_list</a:t>
             </a:r>
             <a:r>
-              <a:rPr lang="en-US" sz="1800" dirty="0">
+              <a:rPr lang="en-US" sz="1600" b="1" dirty="0">
                 <a:highlight>
                   <a:srgbClr val="DAE3F3"/>
                 </a:highlight>
@@ -39121,7 +37398,7 @@
               <a:buChar char="v"/>
             </a:pPr>
             <a:r>
-              <a:rPr lang="en-US" sz="1600" dirty="0" err="1">
+              <a:rPr lang="en-US" sz="1600" b="1" dirty="0" err="1">
                 <a:highlight>
                   <a:srgbClr val="DAE3F3"/>
                 </a:highlight>
@@ -39132,7 +37409,7 @@
               <a:t>resulting_list</a:t>
             </a:r>
             <a:r>
-              <a:rPr lang="en-US" sz="1600" dirty="0">
+              <a:rPr lang="en-US" sz="1600" b="1" dirty="0">
                 <a:highlight>
                   <a:srgbClr val="DAE3F3"/>
                 </a:highlight>
@@ -39142,7 +37419,7 @@
               </a:rPr>
               <a:t> = [iterator for iterator in sequence if condition]</a:t>
             </a:r>
-            <a:endParaRPr lang="de-DE" sz="1600" dirty="0">
+            <a:endParaRPr lang="de-DE" sz="1600" b="1" dirty="0">
               <a:highlight>
                 <a:srgbClr val="DAE3F3"/>
               </a:highlight>
@@ -39211,7 +37488,7 @@
           <a:lstStyle/>
           <a:p>
             <a:r>
-              <a:rPr lang="en-US" sz="1800" spc="-1" dirty="0" err="1">
+              <a:rPr lang="en-US" sz="1600" spc="-1" dirty="0" err="1">
                 <a:solidFill>
                   <a:srgbClr val="0F0F0F"/>
                 </a:solidFill>
@@ -39220,7 +37497,7 @@
               <a:t>squared_numbers</a:t>
             </a:r>
             <a:r>
-              <a:rPr lang="en-US" sz="1800" spc="-1" dirty="0">
+              <a:rPr lang="en-US" sz="1600" spc="-1" dirty="0">
                 <a:solidFill>
                   <a:srgbClr val="0F0F0F"/>
                 </a:solidFill>
@@ -39231,7 +37508,7 @@
           </a:p>
           <a:p>
             <a:r>
-              <a:rPr lang="en-US" sz="1800" spc="-1" dirty="0">
+              <a:rPr lang="en-US" sz="1600" spc="-1" dirty="0">
                 <a:solidFill>
                   <a:srgbClr val="0F0F0F"/>
                 </a:solidFill>
@@ -39242,7 +37519,7 @@
           </a:p>
           <a:p>
             <a:r>
-              <a:rPr lang="en-US" sz="1800" spc="-1" dirty="0">
+              <a:rPr lang="en-US" sz="1600" spc="-1" dirty="0">
                 <a:solidFill>
                   <a:srgbClr val="0F0F0F"/>
                 </a:solidFill>
@@ -39251,7 +37528,7 @@
               <a:t>for x in </a:t>
             </a:r>
             <a:r>
-              <a:rPr lang="en-US" sz="1800" spc="-1" dirty="0" err="1">
+              <a:rPr lang="en-US" sz="1600" spc="-1" dirty="0" err="1">
                 <a:solidFill>
                   <a:srgbClr val="0F0F0F"/>
                 </a:solidFill>
@@ -39260,7 +37537,7 @@
               <a:t>squared_numbers</a:t>
             </a:r>
             <a:r>
-              <a:rPr lang="en-US" sz="1800" spc="-1" dirty="0">
+              <a:rPr lang="en-US" sz="1600" spc="-1" dirty="0">
                 <a:solidFill>
                   <a:srgbClr val="0F0F0F"/>
                 </a:solidFill>
@@ -39271,7 +37548,7 @@
           </a:p>
           <a:p>
             <a:r>
-              <a:rPr lang="en-US" sz="1800" spc="-1" dirty="0">
+              <a:rPr lang="en-US" sz="1600" spc="-1" dirty="0">
                 <a:solidFill>
                   <a:srgbClr val="0F0F0F"/>
                 </a:solidFill>
@@ -39280,7 +37557,7 @@
               <a:t>    </a:t>
             </a:r>
             <a:r>
-              <a:rPr lang="en-US" sz="1800" spc="-1" dirty="0" err="1">
+              <a:rPr lang="en-US" sz="1600" spc="-1" dirty="0" err="1">
                 <a:solidFill>
                   <a:srgbClr val="0F0F0F"/>
                 </a:solidFill>
@@ -39289,7 +37566,7 @@
               <a:t>numbers.append</a:t>
             </a:r>
             <a:r>
-              <a:rPr lang="en-US" sz="1800" spc="-1" dirty="0">
+              <a:rPr lang="en-US" sz="1600" spc="-1" dirty="0">
                 <a:solidFill>
                   <a:srgbClr val="0F0F0F"/>
                 </a:solidFill>
@@ -39299,7 +37576,7 @@
             </a:r>
           </a:p>
           <a:p>
-            <a:endParaRPr lang="en-US" sz="1800" spc="-1" dirty="0">
+            <a:endParaRPr lang="en-US" sz="1600" spc="-1" dirty="0">
               <a:solidFill>
                 <a:srgbClr val="0F0F0F"/>
               </a:solidFill>
@@ -39307,7 +37584,7 @@
             </a:endParaRPr>
           </a:p>
           <a:p>
-            <a:endParaRPr lang="en-US" sz="1800" spc="-1" dirty="0">
+            <a:endParaRPr lang="en-US" sz="1600" spc="-1" dirty="0">
               <a:solidFill>
                 <a:srgbClr val="0F0F0F"/>
               </a:solidFill>
@@ -39316,7 +37593,7 @@
           </a:p>
           <a:p>
             <a:r>
-              <a:rPr lang="en-US" sz="1800" spc="-1" dirty="0">
+              <a:rPr lang="en-US" sz="1600" spc="-1" dirty="0">
                 <a:solidFill>
                   <a:srgbClr val="0F0F0F"/>
                 </a:solidFill>
@@ -39325,7 +37602,7 @@
               <a:t>numbers = [x ** (1 / 2) for x in </a:t>
             </a:r>
             <a:r>
-              <a:rPr lang="en-US" sz="1800" spc="-1" dirty="0" err="1">
+              <a:rPr lang="en-US" sz="1600" spc="-1" dirty="0" err="1">
                 <a:solidFill>
                   <a:srgbClr val="0F0F0F"/>
                 </a:solidFill>
@@ -39334,7 +37611,7 @@
               <a:t>squared_numbers</a:t>
             </a:r>
             <a:r>
-              <a:rPr lang="en-US" sz="1800" spc="-1" dirty="0">
+              <a:rPr lang="en-US" sz="1600" spc="-1" dirty="0">
                 <a:solidFill>
                   <a:srgbClr val="0F0F0F"/>
                 </a:solidFill>
@@ -39344,7 +37621,7 @@
             </a:r>
           </a:p>
           <a:p>
-            <a:endParaRPr lang="en-US" sz="1800" spc="-1" dirty="0">
+            <a:endParaRPr lang="en-US" sz="1600" spc="-1" dirty="0">
               <a:solidFill>
                 <a:srgbClr val="0F0F0F"/>
               </a:solidFill>
@@ -39353,7 +37630,7 @@
           </a:p>
           <a:p>
             <a:r>
-              <a:rPr lang="en-US" sz="1800" spc="-1" dirty="0" err="1">
+              <a:rPr lang="en-US" sz="1600" spc="-1" dirty="0" err="1">
                 <a:solidFill>
                   <a:srgbClr val="0F0F0F"/>
                 </a:solidFill>
@@ -39362,7 +37639,7 @@
               <a:t>squared_numbers</a:t>
             </a:r>
             <a:r>
-              <a:rPr lang="en-US" sz="1800" spc="-1" dirty="0">
+              <a:rPr lang="en-US" sz="1600" spc="-1" dirty="0">
                 <a:solidFill>
                   <a:srgbClr val="0F0F0F"/>
                 </a:solidFill>
@@ -39373,7 +37650,7 @@
           </a:p>
           <a:p>
             <a:r>
-              <a:rPr lang="en-US" sz="1800" spc="-1" dirty="0">
+              <a:rPr lang="en-US" sz="1600" spc="-1" dirty="0">
                 <a:solidFill>
                   <a:srgbClr val="0F0F0F"/>
                 </a:solidFill>
@@ -39382,7 +37659,7 @@
               <a:t>numbers = [x ** (1 / 2) for x in </a:t>
             </a:r>
             <a:r>
-              <a:rPr lang="en-US" sz="1800" spc="-1" dirty="0" err="1">
+              <a:rPr lang="en-US" sz="1600" spc="-1" dirty="0" err="1">
                 <a:solidFill>
                   <a:srgbClr val="0F0F0F"/>
                 </a:solidFill>
@@ -39391,7 +37668,7 @@
               <a:t>squared_numbers</a:t>
             </a:r>
             <a:r>
-              <a:rPr lang="en-US" sz="1800" spc="-1" dirty="0">
+              <a:rPr lang="en-US" sz="1600" spc="-1" dirty="0">
                 <a:solidFill>
                   <a:srgbClr val="0F0F0F"/>
                 </a:solidFill>
@@ -39680,7 +37957,7 @@
                 <a:ea typeface="Calibri" panose="020F0502020204030204" pitchFamily="34" charset="0"/>
                 <a:cs typeface="Calibri" panose="020F0502020204030204" pitchFamily="34" charset="0"/>
               </a:rPr>
-              <a:t>of the provided game,  and the way how the game was one, i.e., </a:t>
+              <a:t>of the provided game,  and the way how the game was won, i.e., </a:t>
             </a:r>
           </a:p>
           <a:p>
@@ -39835,15 +38112,9 @@
                 <a:latin typeface="Calibri" panose="020F0502020204030204" pitchFamily="34" charset="0"/>
                 <a:ea typeface="Calibri" panose="020F0502020204030204" pitchFamily="34" charset="0"/>
                 <a:cs typeface="Calibri" panose="020F0502020204030204" pitchFamily="34" charset="0"/>
-                <a:hlinkClick r:id="rId3"/>
-              </a:rPr>
-              <a:t>Notebook examples</a:t>
-            </a:r>
-            <a:endParaRPr lang="en-US" sz="1800" dirty="0">
-              <a:latin typeface="Calibri" panose="020F0502020204030204" pitchFamily="34" charset="0"/>
-              <a:ea typeface="Calibri" panose="020F0502020204030204" pitchFamily="34" charset="0"/>
-              <a:cs typeface="Calibri" panose="020F0502020204030204" pitchFamily="34" charset="0"/>
-            </a:endParaRPr>
+              </a:rPr>
+              <a:t>See notebook</a:t>
+            </a:r>
           </a:p>
         </p:txBody>
       </p:sp>
@@ -40416,9 +38687,8 @@
                 <a:latin typeface="Calibri" panose="020F0502020204030204" pitchFamily="34" charset="0"/>
                 <a:ea typeface="Calibri" panose="020F0502020204030204" pitchFamily="34" charset="0"/>
                 <a:cs typeface="Calibri" panose="020F0502020204030204" pitchFamily="34" charset="0"/>
-                <a:hlinkClick r:id="rId3"/>
-              </a:rPr>
-              <a:t>Notebook example.</a:t>
+              </a:rPr>
+              <a:t>See unit6_exercise.ipynb</a:t>
             </a:r>
             <a:endParaRPr lang="de-DE" sz="1800" dirty="0">
               <a:latin typeface="Calibri" panose="020F0502020204030204" pitchFamily="34" charset="0"/>
@@ -40505,7 +38775,7 @@
         <p:spPr>
           <a:xfrm>
             <a:off x="461938" y="1605600"/>
-            <a:ext cx="8229600" cy="1200329"/>
+            <a:ext cx="8229600" cy="1754326"/>
           </a:xfrm>
           <a:prstGeom prst="rect">
             <a:avLst/>
@@ -40862,8 +39132,31 @@
               </a:rPr>
               <a:t> otherwise.</a:t>
             </a:r>
+          </a:p>
+          <a:p>
+            <a:pPr lvl="0">
+              <a:defRPr/>
+            </a:pPr>
+            <a:endParaRPr lang="en-US" sz="1800" dirty="0">
+              <a:latin typeface="Calibri" panose="020F0502020204030204" pitchFamily="34" charset="0"/>
+              <a:cs typeface="Calibri" panose="020F0502020204030204" pitchFamily="34" charset="0"/>
+            </a:endParaRPr>
+          </a:p>
+          <a:p>
+            <a:pPr>
+              <a:defRPr/>
+            </a:pPr>
+            <a:r>
+              <a:rPr lang="en-US" sz="1800" dirty="0">
+                <a:latin typeface="Calibri" panose="020F0502020204030204" pitchFamily="34" charset="0"/>
+                <a:ea typeface="Calibri" panose="020F0502020204030204" pitchFamily="34" charset="0"/>
+                <a:cs typeface="Calibri" panose="020F0502020204030204" pitchFamily="34" charset="0"/>
+              </a:rPr>
+              <a:t>See unit6_exercise.ipynb</a:t>
+            </a:r>
             <a:endParaRPr lang="de-DE" sz="1800" dirty="0">
               <a:latin typeface="Calibri" panose="020F0502020204030204" pitchFamily="34" charset="0"/>
+              <a:ea typeface="Calibri" panose="020F0502020204030204" pitchFamily="34" charset="0"/>
               <a:cs typeface="Calibri" panose="020F0502020204030204" pitchFamily="34" charset="0"/>
             </a:endParaRPr>
           </a:p>
@@ -41087,7 +39380,7 @@
         </p:nvSpPr>
         <p:spPr>
           <a:xfrm>
-            <a:off x="457200" y="1605601"/>
+            <a:off x="467139" y="1605601"/>
             <a:ext cx="8229600" cy="2074302"/>
           </a:xfrm>
           <a:prstGeom prst="rect">
@@ -41423,7 +39716,7 @@
                 <a:ea typeface="Cambria Math" panose="02040503050406030204" pitchFamily="18" charset="0"/>
                 <a:cs typeface="Calibri" panose="020F0502020204030204" pitchFamily="34" charset="0"/>
               </a:rPr>
-              <a:t>items</a:t>
+              <a:t>times</a:t>
             </a:r>
             <a:r>
               <a:rPr lang="de-AT" sz="1800" dirty="0">

--- a/Slides/unit_6_prog_3.pptx
+++ b/Slides/unit_6_prog_3.pptx
@@ -312,7 +312,7 @@
       </p15:sldGuideLst>
     </p:ext>
     <p:ext uri="http://customooxmlschemas.google.com/">
-      <go:slidesCustomData xmlns="" xmlns:mc="http://schemas.openxmlformats.org/markup-compatibility/2006" xmlns:mv="urn:schemas-microsoft-com:mac:vml" xmlns:c="http://schemas.openxmlformats.org/drawingml/2006/chart" xmlns:dgm="http://schemas.openxmlformats.org/drawingml/2006/diagram" xmlns:o="urn:schemas-microsoft-com:office:office" xmlns:v="urn:schemas-microsoft-com:vml" xmlns:pvml="urn:schemas-microsoft-com:office:powerpoint" xmlns:com="http://schemas.openxmlformats.org/drawingml/2006/compatibility" xmlns:p14="http://schemas.microsoft.com/office/powerpoint/2010/main" xmlns:p15="http://schemas.microsoft.com/office/powerpoint/2012/main" xmlns:ahyp="http://schemas.microsoft.com/office/drawing/2018/hyperlinkcolor" xmlns:go="http://customooxmlschemas.google.com/" r:id="rId80" roundtripDataSignature="AMtx7milieXwv5OUJdQk1cj/252aZuXcIQ=="/>
+      <go:slidesCustomData xmlns:go="http://customooxmlschemas.google.com/" xmlns:ahyp="http://schemas.microsoft.com/office/drawing/2018/hyperlinkcolor" xmlns:p15="http://schemas.microsoft.com/office/powerpoint/2012/main" xmlns:p14="http://schemas.microsoft.com/office/powerpoint/2010/main" xmlns:com="http://schemas.openxmlformats.org/drawingml/2006/compatibility" xmlns:pvml="urn:schemas-microsoft-com:office:powerpoint" xmlns:v="urn:schemas-microsoft-com:vml" xmlns:o="urn:schemas-microsoft-com:office:office" xmlns:dgm="http://schemas.openxmlformats.org/drawingml/2006/diagram" xmlns:c="http://schemas.openxmlformats.org/drawingml/2006/chart" xmlns:mv="urn:schemas-microsoft-com:mac:vml" xmlns:mc="http://schemas.openxmlformats.org/markup-compatibility/2006" xmlns="" r:id="rId80" roundtripDataSignature="AMtx7milieXwv5OUJdQk1cj/252aZuXcIQ=="/>
     </p:ext>
   </p:extLst>
 </p:presentation>
@@ -20165,7 +20165,7 @@
         </p:nvSpPr>
         <p:spPr>
           <a:xfrm>
-            <a:off x="2065095" y="5132223"/>
+            <a:off x="2065095" y="5088263"/>
             <a:ext cx="3232333" cy="284902"/>
           </a:xfrm>
           <a:prstGeom prst="rect">
@@ -20217,7 +20217,7 @@
         </p:nvSpPr>
         <p:spPr>
           <a:xfrm>
-            <a:off x="2742812" y="4857197"/>
+            <a:off x="2742812" y="4795653"/>
             <a:ext cx="3133279" cy="297328"/>
           </a:xfrm>
           <a:prstGeom prst="rect">
@@ -20269,8 +20269,8 @@
         </p:nvSpPr>
         <p:spPr>
           <a:xfrm>
-            <a:off x="2744370" y="4232715"/>
-            <a:ext cx="3771900" cy="324841"/>
+            <a:off x="2744369" y="4232715"/>
+            <a:ext cx="3920199" cy="324841"/>
           </a:xfrm>
           <a:prstGeom prst="rect">
             <a:avLst/>
@@ -20363,7 +20363,7 @@
                 <a:ea typeface="Calibri" panose="020F0502020204030204" pitchFamily="34" charset="0"/>
                 <a:cs typeface="Calibri" panose="020F0502020204030204" pitchFamily="34" charset="0"/>
               </a:rPr>
-              <a:t>'</a:t>
+              <a:t>’</a:t>
             </a:r>
             <a:r>
               <a:rPr lang="en-US" sz="1800" b="0" strike="noStrike" spc="-1" dirty="0">
@@ -20374,7 +20374,7 @@
                 <a:ea typeface="Calibri" panose="020F0502020204030204" pitchFamily="34" charset="0"/>
                 <a:cs typeface="Calibri" panose="020F0502020204030204" pitchFamily="34" charset="0"/>
               </a:rPr>
-              <a:t>)</a:t>
+              <a:t>):</a:t>
             </a:r>
             <a:endParaRPr lang="en-US" sz="1800" b="0" strike="noStrike" spc="-1" dirty="0">
               <a:latin typeface="Consolas" panose="020B0609020204030204" pitchFamily="49" charset="0"/>
